--- a/assets/Slidedeck.pptx
+++ b/assets/Slidedeck.pptx
@@ -5,7 +5,7 @@
     <p:sldMasterId id="2147483648" r:id="rId1"/>
   </p:sldMasterIdLst>
   <p:notesMasterIdLst>
-    <p:notesMasterId r:id="rId43"/>
+    <p:notesMasterId r:id="rId44"/>
   </p:notesMasterIdLst>
   <p:sldIdLst>
     <p:sldId id="256" r:id="rId4"/>
@@ -47,6 +47,7 @@
     <p:sldId id="292" r:id="rId40"/>
     <p:sldId id="293" r:id="rId41"/>
     <p:sldId id="294" r:id="rId42"/>
+    <p:sldId id="295" r:id="rId43"/>
   </p:sldIdLst>
   <p:sldSz cx="12192000" cy="6858000"/>
   <p:notesSz cx="7102475" cy="10234613"/>
@@ -172,7 +173,7 @@
       </p:grpSpPr>
       <p:sp>
         <p:nvSpPr>
-          <p:cNvPr id="1064298311" name="Kopfzeilenplatzhalter 1"/>
+          <p:cNvPr id="1578827400" name="Kopfzeilenplatzhalter 1"/>
           <p:cNvSpPr>
             <a:spLocks noGrp="1"/>
           </p:cNvSpPr>
@@ -206,7 +207,7 @@
       </p:sp>
       <p:sp>
         <p:nvSpPr>
-          <p:cNvPr id="361406078" name="Datumsplatzhalter 2"/>
+          <p:cNvPr id="918417618" name="Datumsplatzhalter 2"/>
           <p:cNvSpPr>
             <a:spLocks noGrp="1"/>
           </p:cNvSpPr>
@@ -244,7 +245,7 @@
       </p:sp>
       <p:sp>
         <p:nvSpPr>
-          <p:cNvPr id="1507784956" name="Folienbildplatzhalter 3"/>
+          <p:cNvPr id="860515987" name="Folienbildplatzhalter 3"/>
           <p:cNvSpPr>
             <a:spLocks noChangeAspect="1" noGrp="1" noRot="1"/>
           </p:cNvSpPr>
@@ -280,7 +281,7 @@
       </p:sp>
       <p:sp>
         <p:nvSpPr>
-          <p:cNvPr id="580747854" name="Notizenplatzhalter 4"/>
+          <p:cNvPr id="85158633" name="Notizenplatzhalter 4"/>
           <p:cNvSpPr>
             <a:spLocks noGrp="1"/>
           </p:cNvSpPr>
@@ -354,7 +355,7 @@
       </p:sp>
       <p:sp>
         <p:nvSpPr>
-          <p:cNvPr id="1328537888" name="Fußzeilenplatzhalter 5"/>
+          <p:cNvPr id="181308521" name="Fußzeilenplatzhalter 5"/>
           <p:cNvSpPr>
             <a:spLocks noGrp="1"/>
           </p:cNvSpPr>
@@ -388,7 +389,7 @@
       </p:sp>
       <p:sp>
         <p:nvSpPr>
-          <p:cNvPr id="569354980" name="Foliennummernplatzhalter 6"/>
+          <p:cNvPr id="609974595" name="Foliennummernplatzhalter 6"/>
           <p:cNvSpPr>
             <a:spLocks noGrp="1"/>
           </p:cNvSpPr>
@@ -541,7 +542,7 @@
       </p:grpSpPr>
       <p:sp>
         <p:nvSpPr>
-          <p:cNvPr id="177600992" name="Folienbildplatzhalter 1"/>
+          <p:cNvPr id="22841433" name="Folienbildplatzhalter 1"/>
           <p:cNvSpPr>
             <a:spLocks noChangeAspect="1" noGrp="1" noRot="1"/>
           </p:cNvSpPr>
@@ -553,7 +554,7 @@
       </p:sp>
       <p:sp>
         <p:nvSpPr>
-          <p:cNvPr id="1173182355" name="Notizenplatzhalter 2"/>
+          <p:cNvPr id="263866105" name="Notizenplatzhalter 2"/>
           <p:cNvSpPr>
             <a:spLocks noGrp="1"/>
           </p:cNvSpPr>
@@ -575,7 +576,7 @@
       </p:sp>
       <p:sp>
         <p:nvSpPr>
-          <p:cNvPr id="936193266" name="Foliennummernplatzhalter 3"/>
+          <p:cNvPr id="1544493184" name="Foliennummernplatzhalter 3"/>
           <p:cNvSpPr>
             <a:spLocks noGrp="1"/>
           </p:cNvSpPr>
@@ -626,7 +627,7 @@
       </p:grpSpPr>
       <p:sp>
         <p:nvSpPr>
-          <p:cNvPr id="1636505683" name="Slide Image Placeholder 1"/>
+          <p:cNvPr id="1759980286" name="Slide Image Placeholder 1"/>
           <p:cNvSpPr>
             <a:spLocks noChangeAspect="1" noGrp="1" noRot="1"/>
           </p:cNvSpPr>
@@ -638,7 +639,7 @@
       </p:sp>
       <p:sp>
         <p:nvSpPr>
-          <p:cNvPr id="121132409" name="Notes Placeholder 2"/>
+          <p:cNvPr id="2111365318" name="Notes Placeholder 2"/>
           <p:cNvSpPr>
             <a:spLocks noGrp="1"/>
           </p:cNvSpPr>
@@ -667,7 +668,7 @@
       </p:sp>
       <p:sp>
         <p:nvSpPr>
-          <p:cNvPr id="1624493662" name="Slide Number Placeholder 3"/>
+          <p:cNvPr id="1820875640" name="Slide Number Placeholder 3"/>
           <p:cNvSpPr>
             <a:spLocks noGrp="1"/>
           </p:cNvSpPr>
@@ -718,7 +719,7 @@
       </p:grpSpPr>
       <p:sp>
         <p:nvSpPr>
-          <p:cNvPr id="1488183846" name="Slide Image Placeholder 1"/>
+          <p:cNvPr id="390565848" name="Slide Image Placeholder 1"/>
           <p:cNvSpPr>
             <a:spLocks noChangeAspect="1" noGrp="1" noRot="1"/>
           </p:cNvSpPr>
@@ -730,7 +731,7 @@
       </p:sp>
       <p:sp>
         <p:nvSpPr>
-          <p:cNvPr id="757029974" name="Notes Placeholder 2"/>
+          <p:cNvPr id="288203190" name="Notes Placeholder 2"/>
           <p:cNvSpPr>
             <a:spLocks noGrp="1"/>
           </p:cNvSpPr>
@@ -756,7 +757,7 @@
       </p:sp>
       <p:sp>
         <p:nvSpPr>
-          <p:cNvPr id="1143620009" name="Slide Number Placeholder 3"/>
+          <p:cNvPr id="369217502" name="Slide Number Placeholder 3"/>
           <p:cNvSpPr>
             <a:spLocks noGrp="1"/>
           </p:cNvSpPr>
@@ -807,7 +808,7 @@
       </p:grpSpPr>
       <p:sp>
         <p:nvSpPr>
-          <p:cNvPr id="1120380214" name="Slide Image Placeholder 1"/>
+          <p:cNvPr id="1174665981" name="Slide Image Placeholder 1"/>
           <p:cNvSpPr>
             <a:spLocks noChangeAspect="1" noGrp="1" noRot="1"/>
           </p:cNvSpPr>
@@ -819,7 +820,7 @@
       </p:sp>
       <p:sp>
         <p:nvSpPr>
-          <p:cNvPr id="1809673867" name="Notes Placeholder 2"/>
+          <p:cNvPr id="1128321380" name="Notes Placeholder 2"/>
           <p:cNvSpPr>
             <a:spLocks noGrp="1"/>
           </p:cNvSpPr>
@@ -1047,7 +1048,7 @@
       </p:sp>
       <p:sp>
         <p:nvSpPr>
-          <p:cNvPr id="62075782" name="Slide Number Placeholder 3"/>
+          <p:cNvPr id="1270041545" name="Slide Number Placeholder 3"/>
           <p:cNvSpPr>
             <a:spLocks noGrp="1"/>
           </p:cNvSpPr>
@@ -1098,7 +1099,7 @@
       </p:grpSpPr>
       <p:sp>
         <p:nvSpPr>
-          <p:cNvPr id="1808749491" name="Slide Image Placeholder 1"/>
+          <p:cNvPr id="632576710" name="Slide Image Placeholder 1"/>
           <p:cNvSpPr>
             <a:spLocks noChangeAspect="1" noGrp="1" noRot="1"/>
           </p:cNvSpPr>
@@ -1110,7 +1111,7 @@
       </p:sp>
       <p:sp>
         <p:nvSpPr>
-          <p:cNvPr id="1953453143" name="Notes Placeholder 2"/>
+          <p:cNvPr id="1483402691" name="Notes Placeholder 2"/>
           <p:cNvSpPr>
             <a:spLocks noGrp="1"/>
           </p:cNvSpPr>
@@ -1132,7 +1133,7 @@
       </p:sp>
       <p:sp>
         <p:nvSpPr>
-          <p:cNvPr id="475322239" name="Slide Number Placeholder 3"/>
+          <p:cNvPr id="1804996674" name="Slide Number Placeholder 3"/>
           <p:cNvSpPr>
             <a:spLocks noGrp="1"/>
           </p:cNvSpPr>
@@ -1183,7 +1184,7 @@
       </p:grpSpPr>
       <p:sp>
         <p:nvSpPr>
-          <p:cNvPr id="605959026" name="Slide Image Placeholder 1"/>
+          <p:cNvPr id="900598724" name="Slide Image Placeholder 1"/>
           <p:cNvSpPr>
             <a:spLocks noChangeAspect="1" noGrp="1" noRot="1"/>
           </p:cNvSpPr>
@@ -1195,7 +1196,7 @@
       </p:sp>
       <p:sp>
         <p:nvSpPr>
-          <p:cNvPr id="1208098994" name="Notes Placeholder 2"/>
+          <p:cNvPr id="411620487" name="Notes Placeholder 2"/>
           <p:cNvSpPr>
             <a:spLocks noGrp="1"/>
           </p:cNvSpPr>
@@ -1217,7 +1218,7 @@
       </p:sp>
       <p:sp>
         <p:nvSpPr>
-          <p:cNvPr id="348162201" name="Slide Number Placeholder 3"/>
+          <p:cNvPr id="1008817090" name="Slide Number Placeholder 3"/>
           <p:cNvSpPr>
             <a:spLocks noGrp="1"/>
           </p:cNvSpPr>
@@ -1268,7 +1269,7 @@
       </p:grpSpPr>
       <p:sp>
         <p:nvSpPr>
-          <p:cNvPr id="226035020" name="Slide Image Placeholder 1"/>
+          <p:cNvPr id="629312392" name="Slide Image Placeholder 1"/>
           <p:cNvSpPr>
             <a:spLocks noChangeAspect="1" noGrp="1" noRot="1"/>
           </p:cNvSpPr>
@@ -1280,7 +1281,7 @@
       </p:sp>
       <p:sp>
         <p:nvSpPr>
-          <p:cNvPr id="1831675640" name="Notes Placeholder 2"/>
+          <p:cNvPr id="2010149991" name="Notes Placeholder 2"/>
           <p:cNvSpPr>
             <a:spLocks noGrp="1"/>
           </p:cNvSpPr>
@@ -1442,7 +1443,7 @@
       </p:sp>
       <p:sp>
         <p:nvSpPr>
-          <p:cNvPr id="851324996" name="Slide Number Placeholder 3"/>
+          <p:cNvPr id="349391946" name="Slide Number Placeholder 3"/>
           <p:cNvSpPr>
             <a:spLocks noGrp="1"/>
           </p:cNvSpPr>
@@ -1493,7 +1494,7 @@
       </p:grpSpPr>
       <p:sp>
         <p:nvSpPr>
-          <p:cNvPr id="1431434802" name="Slide Image Placeholder 1"/>
+          <p:cNvPr id="875057181" name="Slide Image Placeholder 1"/>
           <p:cNvSpPr>
             <a:spLocks noChangeAspect="1" noGrp="1" noRot="1"/>
           </p:cNvSpPr>
@@ -1505,7 +1506,7 @@
       </p:sp>
       <p:sp>
         <p:nvSpPr>
-          <p:cNvPr id="975502450" name="Notes Placeholder 2"/>
+          <p:cNvPr id="1202075319" name="Notes Placeholder 2"/>
           <p:cNvSpPr>
             <a:spLocks noGrp="1"/>
           </p:cNvSpPr>
@@ -1527,7 +1528,7 @@
       </p:sp>
       <p:sp>
         <p:nvSpPr>
-          <p:cNvPr id="956584034" name="Slide Number Placeholder 3"/>
+          <p:cNvPr id="1227336843" name="Slide Number Placeholder 3"/>
           <p:cNvSpPr>
             <a:spLocks noGrp="1"/>
           </p:cNvSpPr>
@@ -1578,7 +1579,7 @@
       </p:grpSpPr>
       <p:sp>
         <p:nvSpPr>
-          <p:cNvPr id="1278473780" name="Slide Image Placeholder 1"/>
+          <p:cNvPr id="1128090886" name="Slide Image Placeholder 1"/>
           <p:cNvSpPr>
             <a:spLocks noChangeAspect="1" noGrp="1" noRot="1"/>
           </p:cNvSpPr>
@@ -1590,7 +1591,7 @@
       </p:sp>
       <p:sp>
         <p:nvSpPr>
-          <p:cNvPr id="1107422919" name="Notes Placeholder 2"/>
+          <p:cNvPr id="1060245369" name="Notes Placeholder 2"/>
           <p:cNvSpPr>
             <a:spLocks noGrp="1"/>
           </p:cNvSpPr>
@@ -1733,7 +1734,7 @@
       </p:sp>
       <p:sp>
         <p:nvSpPr>
-          <p:cNvPr id="210586993" name="Slide Number Placeholder 3"/>
+          <p:cNvPr id="2075256149" name="Slide Number Placeholder 3"/>
           <p:cNvSpPr>
             <a:spLocks noGrp="1"/>
           </p:cNvSpPr>
@@ -1784,7 +1785,7 @@
       </p:grpSpPr>
       <p:sp>
         <p:nvSpPr>
-          <p:cNvPr id="1694708976" name="Slide Image Placeholder 1"/>
+          <p:cNvPr id="538022818" name="Slide Image Placeholder 1"/>
           <p:cNvSpPr>
             <a:spLocks noChangeAspect="1" noGrp="1" noRot="1"/>
           </p:cNvSpPr>
@@ -1796,7 +1797,7 @@
       </p:sp>
       <p:sp>
         <p:nvSpPr>
-          <p:cNvPr id="892157732" name="Notes Placeholder 2"/>
+          <p:cNvPr id="563208225" name="Notes Placeholder 2"/>
           <p:cNvSpPr>
             <a:spLocks noGrp="1"/>
           </p:cNvSpPr>
@@ -1818,7 +1819,7 @@
       </p:sp>
       <p:sp>
         <p:nvSpPr>
-          <p:cNvPr id="1170272806" name="Slide Number Placeholder 3"/>
+          <p:cNvPr id="1977756439" name="Slide Number Placeholder 3"/>
           <p:cNvSpPr>
             <a:spLocks noGrp="1"/>
           </p:cNvSpPr>
@@ -1869,7 +1870,7 @@
       </p:grpSpPr>
       <p:sp>
         <p:nvSpPr>
-          <p:cNvPr id="517062660" name="Slide Image Placeholder 1"/>
+          <p:cNvPr id="291574898" name="Slide Image Placeholder 1"/>
           <p:cNvSpPr>
             <a:spLocks noChangeAspect="1" noGrp="1" noRot="1"/>
           </p:cNvSpPr>
@@ -1881,7 +1882,7 @@
       </p:sp>
       <p:sp>
         <p:nvSpPr>
-          <p:cNvPr id="533415369" name="Notes Placeholder 2"/>
+          <p:cNvPr id="662597987" name="Notes Placeholder 2"/>
           <p:cNvSpPr>
             <a:spLocks noGrp="1"/>
           </p:cNvSpPr>
@@ -1907,7 +1908,7 @@
       </p:sp>
       <p:sp>
         <p:nvSpPr>
-          <p:cNvPr id="1263131984" name="Slide Number Placeholder 3"/>
+          <p:cNvPr id="1098132056" name="Slide Number Placeholder 3"/>
           <p:cNvSpPr>
             <a:spLocks noGrp="1"/>
           </p:cNvSpPr>
@@ -1958,7 +1959,7 @@
       </p:grpSpPr>
       <p:sp>
         <p:nvSpPr>
-          <p:cNvPr id="346734276" name="Slide Image Placeholder 1"/>
+          <p:cNvPr id="1903664285" name="Slide Image Placeholder 1"/>
           <p:cNvSpPr>
             <a:spLocks noChangeAspect="1" noGrp="1" noRot="1"/>
           </p:cNvSpPr>
@@ -1970,7 +1971,7 @@
       </p:sp>
       <p:sp>
         <p:nvSpPr>
-          <p:cNvPr id="1881363851" name="Notes Placeholder 2"/>
+          <p:cNvPr id="1993863863" name="Notes Placeholder 2"/>
           <p:cNvSpPr>
             <a:spLocks noGrp="1"/>
           </p:cNvSpPr>
@@ -1992,7 +1993,7 @@
       </p:sp>
       <p:sp>
         <p:nvSpPr>
-          <p:cNvPr id="1150512269" name="Slide Number Placeholder 3"/>
+          <p:cNvPr id="136447274" name="Slide Number Placeholder 3"/>
           <p:cNvSpPr>
             <a:spLocks noGrp="1"/>
           </p:cNvSpPr>
@@ -2043,7 +2044,7 @@
       </p:grpSpPr>
       <p:sp>
         <p:nvSpPr>
-          <p:cNvPr id="473281641" name="Slide Image Placeholder 1"/>
+          <p:cNvPr id="2074635160" name="Slide Image Placeholder 1"/>
           <p:cNvSpPr>
             <a:spLocks noChangeAspect="1" noGrp="1" noRot="1"/>
           </p:cNvSpPr>
@@ -2055,7 +2056,7 @@
       </p:sp>
       <p:sp>
         <p:nvSpPr>
-          <p:cNvPr id="1878890487" name="Notes Placeholder 2"/>
+          <p:cNvPr id="1520405952" name="Notes Placeholder 2"/>
           <p:cNvSpPr>
             <a:spLocks noGrp="1"/>
           </p:cNvSpPr>
@@ -2084,6 +2085,32 @@
               </a:rPr>
               <a:t>reconnect findings to core question</a:t>
             </a:r>
+            <a:endParaRPr sz="1200" b="0" i="0" u="none">
+              <a:solidFill>
+                <a:srgbClr val="000000"/>
+              </a:solidFill>
+              <a:latin typeface="Times New Roman"/>
+              <a:ea typeface="Times New Roman"/>
+              <a:cs typeface="Times New Roman"/>
+            </a:endParaRPr>
+          </a:p>
+          <a:p>
+            <a:pPr marL="217792" indent="-217792">
+              <a:buFont typeface="Arial"/>
+              <a:buChar char="–"/>
+              <a:defRPr/>
+            </a:pPr>
+            <a:r>
+              <a:rPr lang="en-US" sz="1200" b="0" i="0" u="none" strike="noStrike" cap="none" spc="0">
+                <a:solidFill>
+                  <a:srgbClr val="000000"/>
+                </a:solidFill>
+                <a:latin typeface="Times New Roman"/>
+                <a:ea typeface="Times New Roman"/>
+                <a:cs typeface="Times New Roman"/>
+              </a:rPr>
+              <a:t>network position shapes discourse:</a:t>
+            </a:r>
             <a:endParaRPr/>
           </a:p>
           <a:p>
@@ -2267,13 +2294,39 @@
               </a:rPr>
               <a:t>difficult to integrate ecological concerns</a:t>
             </a:r>
-            <a:endParaRPr/>
-          </a:p>
-        </p:txBody>
-      </p:sp>
-      <p:sp>
-        <p:nvSpPr>
-          <p:cNvPr id="399591629" name="Slide Number Placeholder 3"/>
+            <a:endParaRPr sz="1200" b="0" i="0" u="none">
+              <a:solidFill>
+                <a:srgbClr val="000000"/>
+              </a:solidFill>
+              <a:latin typeface="Times New Roman"/>
+              <a:ea typeface="Times New Roman"/>
+              <a:cs typeface="Times New Roman"/>
+            </a:endParaRPr>
+          </a:p>
+          <a:p>
+            <a:pPr marL="217792" indent="-217792">
+              <a:buFont typeface="Arial"/>
+              <a:buChar char="–"/>
+              <a:defRPr/>
+            </a:pPr>
+            <a:r>
+              <a:rPr lang="en-US" sz="1200" b="0" i="0" u="none" strike="noStrike" cap="none" spc="0">
+                <a:solidFill>
+                  <a:srgbClr val="000000"/>
+                </a:solidFill>
+                <a:latin typeface="Times New Roman"/>
+                <a:ea typeface="Times New Roman"/>
+                <a:cs typeface="Times New Roman"/>
+              </a:rPr>
+              <a:t>No causality, but strong alignment between structural position and sustainability framing</a:t>
+            </a:r>
+            <a:endParaRPr/>
+          </a:p>
+        </p:txBody>
+      </p:sp>
+      <p:sp>
+        <p:nvSpPr>
+          <p:cNvPr id="951464158" name="Slide Number Placeholder 3"/>
           <p:cNvSpPr>
             <a:spLocks noGrp="1"/>
           </p:cNvSpPr>
@@ -2324,7 +2377,7 @@
       </p:grpSpPr>
       <p:sp>
         <p:nvSpPr>
-          <p:cNvPr id="1126428157" name="Slide Image Placeholder 1"/>
+          <p:cNvPr id="869998113" name="Slide Image Placeholder 1"/>
           <p:cNvSpPr>
             <a:spLocks noChangeAspect="1" noGrp="1" noRot="1"/>
           </p:cNvSpPr>
@@ -2336,7 +2389,7 @@
       </p:sp>
       <p:sp>
         <p:nvSpPr>
-          <p:cNvPr id="304385165" name="Notes Placeholder 2"/>
+          <p:cNvPr id="81146397" name="Notes Placeholder 2"/>
           <p:cNvSpPr>
             <a:spLocks noGrp="1"/>
           </p:cNvSpPr>
@@ -2634,7 +2687,7 @@
       </p:sp>
       <p:sp>
         <p:nvSpPr>
-          <p:cNvPr id="759632960" name="Slide Number Placeholder 3"/>
+          <p:cNvPr id="1632000147" name="Slide Number Placeholder 3"/>
           <p:cNvSpPr>
             <a:spLocks noGrp="1"/>
           </p:cNvSpPr>
@@ -2685,7 +2738,7 @@
       </p:grpSpPr>
       <p:sp>
         <p:nvSpPr>
-          <p:cNvPr id="1236046529" name="Slide Image Placeholder 1"/>
+          <p:cNvPr id="1292840766" name="Slide Image Placeholder 1"/>
           <p:cNvSpPr>
             <a:spLocks noChangeAspect="1" noGrp="1" noRot="1"/>
           </p:cNvSpPr>
@@ -2697,7 +2750,7 @@
       </p:sp>
       <p:sp>
         <p:nvSpPr>
-          <p:cNvPr id="1353332573" name="Notes Placeholder 2"/>
+          <p:cNvPr id="500022271" name="Notes Placeholder 2"/>
           <p:cNvSpPr>
             <a:spLocks noGrp="1"/>
           </p:cNvSpPr>
@@ -2959,7 +3012,7 @@
       </p:sp>
       <p:sp>
         <p:nvSpPr>
-          <p:cNvPr id="1779447453" name="Slide Number Placeholder 3"/>
+          <p:cNvPr id="132478251" name="Slide Number Placeholder 3"/>
           <p:cNvSpPr>
             <a:spLocks noGrp="1"/>
           </p:cNvSpPr>
@@ -3010,7 +3063,7 @@
       </p:grpSpPr>
       <p:sp>
         <p:nvSpPr>
-          <p:cNvPr id="262329079" name="Slide Image Placeholder 1"/>
+          <p:cNvPr id="1917017564" name="Slide Image Placeholder 1"/>
           <p:cNvSpPr>
             <a:spLocks noChangeAspect="1" noGrp="1" noRot="1"/>
           </p:cNvSpPr>
@@ -3022,7 +3075,7 @@
       </p:sp>
       <p:sp>
         <p:nvSpPr>
-          <p:cNvPr id="482876440" name="Notes Placeholder 2"/>
+          <p:cNvPr id="1981260944" name="Notes Placeholder 2"/>
           <p:cNvSpPr>
             <a:spLocks noGrp="1"/>
           </p:cNvSpPr>
@@ -3044,7 +3097,7 @@
       </p:sp>
       <p:sp>
         <p:nvSpPr>
-          <p:cNvPr id="1444408082" name="Slide Number Placeholder 3"/>
+          <p:cNvPr id="341861952" name="Slide Number Placeholder 3"/>
           <p:cNvSpPr>
             <a:spLocks noGrp="1"/>
           </p:cNvSpPr>
@@ -3095,7 +3148,7 @@
       </p:grpSpPr>
       <p:sp>
         <p:nvSpPr>
-          <p:cNvPr id="851362271" name="Slide Image Placeholder 1"/>
+          <p:cNvPr id="1640515681" name="Slide Image Placeholder 1"/>
           <p:cNvSpPr>
             <a:spLocks noChangeAspect="1" noGrp="1" noRot="1"/>
           </p:cNvSpPr>
@@ -3107,7 +3160,7 @@
       </p:sp>
       <p:sp>
         <p:nvSpPr>
-          <p:cNvPr id="828272364" name="Notes Placeholder 2"/>
+          <p:cNvPr id="592332068" name="Notes Placeholder 2"/>
           <p:cNvSpPr>
             <a:spLocks noGrp="1"/>
           </p:cNvSpPr>
@@ -3129,7 +3182,7 @@
       </p:sp>
       <p:sp>
         <p:nvSpPr>
-          <p:cNvPr id="1331882785" name="Slide Number Placeholder 3"/>
+          <p:cNvPr id="829826550" name="Slide Number Placeholder 3"/>
           <p:cNvSpPr>
             <a:spLocks noGrp="1"/>
           </p:cNvSpPr>
@@ -3180,7 +3233,7 @@
       </p:grpSpPr>
       <p:sp>
         <p:nvSpPr>
-          <p:cNvPr id="2059598262" name="Slide Image Placeholder 1"/>
+          <p:cNvPr id="1712219826" name="Slide Image Placeholder 1"/>
           <p:cNvSpPr>
             <a:spLocks noChangeAspect="1" noGrp="1" noRot="1"/>
           </p:cNvSpPr>
@@ -3192,7 +3245,7 @@
       </p:sp>
       <p:sp>
         <p:nvSpPr>
-          <p:cNvPr id="2025990102" name="Notes Placeholder 2"/>
+          <p:cNvPr id="1184374714" name="Notes Placeholder 2"/>
           <p:cNvSpPr>
             <a:spLocks noGrp="1"/>
           </p:cNvSpPr>
@@ -3214,7 +3267,7 @@
       </p:sp>
       <p:sp>
         <p:nvSpPr>
-          <p:cNvPr id="654699898" name="Slide Number Placeholder 3"/>
+          <p:cNvPr id="1665158898" name="Slide Number Placeholder 3"/>
           <p:cNvSpPr>
             <a:spLocks noGrp="1"/>
           </p:cNvSpPr>
@@ -3265,7 +3318,7 @@
       </p:grpSpPr>
       <p:sp>
         <p:nvSpPr>
-          <p:cNvPr id="800524537" name="Slide Image Placeholder 1"/>
+          <p:cNvPr id="1854307282" name="Slide Image Placeholder 1"/>
           <p:cNvSpPr>
             <a:spLocks noChangeAspect="1" noGrp="1" noRot="1"/>
           </p:cNvSpPr>
@@ -3277,7 +3330,7 @@
       </p:sp>
       <p:sp>
         <p:nvSpPr>
-          <p:cNvPr id="800882248" name="Notes Placeholder 2"/>
+          <p:cNvPr id="162885650" name="Notes Placeholder 2"/>
           <p:cNvSpPr>
             <a:spLocks noGrp="1"/>
           </p:cNvSpPr>
@@ -3299,7 +3352,7 @@
       </p:sp>
       <p:sp>
         <p:nvSpPr>
-          <p:cNvPr id="1150460544" name="Slide Number Placeholder 3"/>
+          <p:cNvPr id="1223326623" name="Slide Number Placeholder 3"/>
           <p:cNvSpPr>
             <a:spLocks noGrp="1"/>
           </p:cNvSpPr>
@@ -3350,7 +3403,7 @@
       </p:grpSpPr>
       <p:sp>
         <p:nvSpPr>
-          <p:cNvPr id="1103248507" name="Slide Image Placeholder 1"/>
+          <p:cNvPr id="2077047398" name="Slide Image Placeholder 1"/>
           <p:cNvSpPr>
             <a:spLocks noChangeAspect="1" noGrp="1" noRot="1"/>
           </p:cNvSpPr>
@@ -3362,7 +3415,7 @@
       </p:sp>
       <p:sp>
         <p:nvSpPr>
-          <p:cNvPr id="1515790033" name="Notes Placeholder 2"/>
+          <p:cNvPr id="157893244" name="Notes Placeholder 2"/>
           <p:cNvSpPr>
             <a:spLocks noGrp="1"/>
           </p:cNvSpPr>
@@ -3384,7 +3437,7 @@
       </p:sp>
       <p:sp>
         <p:nvSpPr>
-          <p:cNvPr id="869317030" name="Slide Number Placeholder 3"/>
+          <p:cNvPr id="2126412376" name="Slide Number Placeholder 3"/>
           <p:cNvSpPr>
             <a:spLocks noGrp="1"/>
           </p:cNvSpPr>
@@ -3435,7 +3488,7 @@
       </p:grpSpPr>
       <p:sp>
         <p:nvSpPr>
-          <p:cNvPr id="1167159776" name="Slide Image Placeholder 1"/>
+          <p:cNvPr id="1285111049" name="Slide Image Placeholder 1"/>
           <p:cNvSpPr>
             <a:spLocks noChangeAspect="1" noGrp="1" noRot="1"/>
           </p:cNvSpPr>
@@ -3447,7 +3500,7 @@
       </p:sp>
       <p:sp>
         <p:nvSpPr>
-          <p:cNvPr id="414131678" name="Notes Placeholder 2"/>
+          <p:cNvPr id="51170138" name="Notes Placeholder 2"/>
           <p:cNvSpPr>
             <a:spLocks noGrp="1"/>
           </p:cNvSpPr>
@@ -3614,7 +3667,7 @@
       </p:sp>
       <p:sp>
         <p:nvSpPr>
-          <p:cNvPr id="412916881" name="Slide Number Placeholder 3"/>
+          <p:cNvPr id="766076459" name="Slide Number Placeholder 3"/>
           <p:cNvSpPr>
             <a:spLocks noGrp="1"/>
           </p:cNvSpPr>
@@ -3665,7 +3718,7 @@
       </p:grpSpPr>
       <p:sp>
         <p:nvSpPr>
-          <p:cNvPr id="332829893" name="Slide Image Placeholder 1"/>
+          <p:cNvPr id="1613396055" name="Slide Image Placeholder 1"/>
           <p:cNvSpPr>
             <a:spLocks noChangeAspect="1" noGrp="1" noRot="1"/>
           </p:cNvSpPr>
@@ -3677,7 +3730,7 @@
       </p:sp>
       <p:sp>
         <p:nvSpPr>
-          <p:cNvPr id="1462817062" name="Notes Placeholder 2"/>
+          <p:cNvPr id="2123694657" name="Notes Placeholder 2"/>
           <p:cNvSpPr>
             <a:spLocks noGrp="1"/>
           </p:cNvSpPr>
@@ -3699,7 +3752,7 @@
       </p:sp>
       <p:sp>
         <p:nvSpPr>
-          <p:cNvPr id="143902378" name="Slide Number Placeholder 3"/>
+          <p:cNvPr id="353818129" name="Slide Number Placeholder 3"/>
           <p:cNvSpPr>
             <a:spLocks noGrp="1"/>
           </p:cNvSpPr>
@@ -3750,7 +3803,7 @@
       </p:grpSpPr>
       <p:sp>
         <p:nvSpPr>
-          <p:cNvPr id="744826687" name="Slide Image Placeholder 1"/>
+          <p:cNvPr id="32016256" name="Slide Image Placeholder 1"/>
           <p:cNvSpPr>
             <a:spLocks noChangeAspect="1" noGrp="1" noRot="1"/>
           </p:cNvSpPr>
@@ -3762,7 +3815,7 @@
       </p:sp>
       <p:sp>
         <p:nvSpPr>
-          <p:cNvPr id="1284500985" name="Notes Placeholder 2"/>
+          <p:cNvPr id="1618556993" name="Notes Placeholder 2"/>
           <p:cNvSpPr>
             <a:spLocks noGrp="1"/>
           </p:cNvSpPr>
@@ -3784,7 +3837,7 @@
       </p:sp>
       <p:sp>
         <p:nvSpPr>
-          <p:cNvPr id="1484372773" name="Slide Number Placeholder 3"/>
+          <p:cNvPr id="603079993" name="Slide Number Placeholder 3"/>
           <p:cNvSpPr>
             <a:spLocks noGrp="1"/>
           </p:cNvSpPr>
@@ -3835,7 +3888,7 @@
       </p:grpSpPr>
       <p:sp>
         <p:nvSpPr>
-          <p:cNvPr id="1637424536" name="Slide Image Placeholder 1"/>
+          <p:cNvPr id="2123466524" name="Slide Image Placeholder 1"/>
           <p:cNvSpPr>
             <a:spLocks noChangeAspect="1" noGrp="1" noRot="1"/>
           </p:cNvSpPr>
@@ -3847,7 +3900,7 @@
       </p:sp>
       <p:sp>
         <p:nvSpPr>
-          <p:cNvPr id="382552889" name="Notes Placeholder 2"/>
+          <p:cNvPr id="310352467" name="Notes Placeholder 2"/>
           <p:cNvSpPr>
             <a:spLocks noGrp="1"/>
           </p:cNvSpPr>
@@ -3869,7 +3922,7 @@
       </p:sp>
       <p:sp>
         <p:nvSpPr>
-          <p:cNvPr id="549204248" name="Slide Number Placeholder 3"/>
+          <p:cNvPr id="1452861215" name="Slide Number Placeholder 3"/>
           <p:cNvSpPr>
             <a:spLocks noGrp="1"/>
           </p:cNvSpPr>
@@ -3920,7 +3973,7 @@
       </p:grpSpPr>
       <p:sp>
         <p:nvSpPr>
-          <p:cNvPr id="976319467" name="Slide Image Placeholder 1"/>
+          <p:cNvPr id="1162134640" name="Slide Image Placeholder 1"/>
           <p:cNvSpPr>
             <a:spLocks noChangeAspect="1" noGrp="1" noRot="1"/>
           </p:cNvSpPr>
@@ -3932,7 +3985,7 @@
       </p:sp>
       <p:sp>
         <p:nvSpPr>
-          <p:cNvPr id="1530061821" name="Notes Placeholder 2"/>
+          <p:cNvPr id="1208019147" name="Notes Placeholder 2"/>
           <p:cNvSpPr>
             <a:spLocks noGrp="1"/>
           </p:cNvSpPr>
@@ -3954,7 +4007,7 @@
       </p:sp>
       <p:sp>
         <p:nvSpPr>
-          <p:cNvPr id="1266346082" name="Slide Number Placeholder 3"/>
+          <p:cNvPr id="349220272" name="Slide Number Placeholder 3"/>
           <p:cNvSpPr>
             <a:spLocks noGrp="1"/>
           </p:cNvSpPr>
@@ -4005,7 +4058,7 @@
       </p:grpSpPr>
       <p:sp>
         <p:nvSpPr>
-          <p:cNvPr id="1665510792" name="Slide Image Placeholder 1"/>
+          <p:cNvPr id="540191552" name="Slide Image Placeholder 1"/>
           <p:cNvSpPr>
             <a:spLocks noChangeAspect="1" noGrp="1" noRot="1"/>
           </p:cNvSpPr>
@@ -4017,7 +4070,7 @@
       </p:sp>
       <p:sp>
         <p:nvSpPr>
-          <p:cNvPr id="979558944" name="Notes Placeholder 2"/>
+          <p:cNvPr id="1302680582" name="Notes Placeholder 2"/>
           <p:cNvSpPr>
             <a:spLocks noGrp="1"/>
           </p:cNvSpPr>
@@ -4039,7 +4092,7 @@
       </p:sp>
       <p:sp>
         <p:nvSpPr>
-          <p:cNvPr id="487729394" name="Slide Number Placeholder 3"/>
+          <p:cNvPr id="1381478330" name="Slide Number Placeholder 3"/>
           <p:cNvSpPr>
             <a:spLocks noGrp="1"/>
           </p:cNvSpPr>
@@ -4090,7 +4143,7 @@
       </p:grpSpPr>
       <p:sp>
         <p:nvSpPr>
-          <p:cNvPr id="1610607911" name="Slide Image Placeholder 1"/>
+          <p:cNvPr id="809886271" name="Slide Image Placeholder 1"/>
           <p:cNvSpPr>
             <a:spLocks noChangeAspect="1" noGrp="1" noRot="1"/>
           </p:cNvSpPr>
@@ -4102,7 +4155,7 @@
       </p:sp>
       <p:sp>
         <p:nvSpPr>
-          <p:cNvPr id="138553006" name="Notes Placeholder 2"/>
+          <p:cNvPr id="2016020098" name="Notes Placeholder 2"/>
           <p:cNvSpPr>
             <a:spLocks noGrp="1"/>
           </p:cNvSpPr>
@@ -4124,7 +4177,7 @@
       </p:sp>
       <p:sp>
         <p:nvSpPr>
-          <p:cNvPr id="212682838" name="Slide Number Placeholder 3"/>
+          <p:cNvPr id="1218206268" name="Slide Number Placeholder 3"/>
           <p:cNvSpPr>
             <a:spLocks noGrp="1"/>
           </p:cNvSpPr>
@@ -4175,7 +4228,7 @@
       </p:grpSpPr>
       <p:sp>
         <p:nvSpPr>
-          <p:cNvPr id="1481308149" name="Slide Image Placeholder 1"/>
+          <p:cNvPr id="289211173" name="Slide Image Placeholder 1"/>
           <p:cNvSpPr>
             <a:spLocks noChangeAspect="1" noGrp="1" noRot="1"/>
           </p:cNvSpPr>
@@ -4187,7 +4240,7 @@
       </p:sp>
       <p:sp>
         <p:nvSpPr>
-          <p:cNvPr id="1950473688" name="Notes Placeholder 2"/>
+          <p:cNvPr id="13182316" name="Notes Placeholder 2"/>
           <p:cNvSpPr>
             <a:spLocks noGrp="1"/>
           </p:cNvSpPr>
@@ -4209,7 +4262,7 @@
       </p:sp>
       <p:sp>
         <p:nvSpPr>
-          <p:cNvPr id="405159485" name="Slide Number Placeholder 3"/>
+          <p:cNvPr id="733739831" name="Slide Number Placeholder 3"/>
           <p:cNvSpPr>
             <a:spLocks noGrp="1"/>
           </p:cNvSpPr>
@@ -4260,7 +4313,7 @@
       </p:grpSpPr>
       <p:sp>
         <p:nvSpPr>
-          <p:cNvPr id="34338580" name="Slide Image Placeholder 1"/>
+          <p:cNvPr id="916765597" name="Slide Image Placeholder 1"/>
           <p:cNvSpPr>
             <a:spLocks noChangeAspect="1" noGrp="1" noRot="1"/>
           </p:cNvSpPr>
@@ -4272,7 +4325,7 @@
       </p:sp>
       <p:sp>
         <p:nvSpPr>
-          <p:cNvPr id="1317716035" name="Notes Placeholder 2"/>
+          <p:cNvPr id="84440649" name="Notes Placeholder 2"/>
           <p:cNvSpPr>
             <a:spLocks noGrp="1"/>
           </p:cNvSpPr>
@@ -4285,160 +4338,16 @@
           <a:bodyPr/>
           <a:lstStyle/>
           <a:p>
-            <a:pPr marL="217793" indent="-217793">
-              <a:buFont typeface="Arial"/>
-              <a:buChar char="–"/>
-              <a:defRPr/>
-            </a:pPr>
-            <a:r>
-              <a:rPr sz="1200" b="0" i="0" u="none">
-                <a:solidFill>
-                  <a:srgbClr val="000000"/>
-                </a:solidFill>
-                <a:latin typeface="Times New Roman"/>
-                <a:ea typeface="Times New Roman"/>
-                <a:cs typeface="Times New Roman"/>
-              </a:rPr>
-              <a:t>influence through relations, </a:t>
-            </a:r>
-            <a:r>
-              <a:rPr sz="1200" b="0" i="0" u="none">
-                <a:solidFill>
-                  <a:srgbClr val="000000"/>
-                </a:solidFill>
-                <a:latin typeface="Times New Roman"/>
-                <a:ea typeface="Times New Roman"/>
-                <a:cs typeface="Times New Roman"/>
-              </a:rPr>
-              <a:t>embedded in network structure</a:t>
-            </a:r>
-            <a:endParaRPr/>
-          </a:p>
-          <a:p>
-            <a:pPr marL="217793" indent="-217793">
-              <a:buFont typeface="Arial"/>
-              <a:buChar char="–"/>
-              <a:defRPr/>
-            </a:pPr>
-            <a:r>
-              <a:rPr sz="1200" b="0" i="0" u="none">
-                <a:solidFill>
-                  <a:srgbClr val="000000"/>
-                </a:solidFill>
-                <a:latin typeface="Times New Roman"/>
-                <a:ea typeface="Times New Roman"/>
-                <a:cs typeface="Times New Roman"/>
-              </a:rPr>
-              <a:t>"Influence often comes from being present where decisions are shaped."</a:t>
-            </a:r>
-            <a:endParaRPr/>
-          </a:p>
-          <a:p>
-            <a:pPr marL="217793" indent="-217793">
-              <a:buFont typeface="Arial"/>
-              <a:buChar char="–"/>
-              <a:defRPr/>
-            </a:pPr>
-            <a:r>
-              <a:rPr sz="1200" b="0" i="0" u="none">
-                <a:solidFill>
-                  <a:srgbClr val="000000"/>
-                </a:solidFill>
-                <a:latin typeface="Times New Roman"/>
-                <a:ea typeface="Times New Roman"/>
-                <a:cs typeface="Times New Roman"/>
-              </a:rPr>
-              <a:t>high centrality → more connections, </a:t>
-            </a:r>
-            <a:r>
-              <a:rPr sz="1200" b="0" i="0" u="none">
-                <a:solidFill>
-                  <a:srgbClr val="000000"/>
-                </a:solidFill>
-                <a:latin typeface="Times New Roman"/>
-                <a:ea typeface="Times New Roman"/>
-                <a:cs typeface="Times New Roman"/>
-              </a:rPr>
-              <a:t>better access to information, </a:t>
-            </a:r>
-            <a:r>
-              <a:rPr sz="1200" b="0" i="0" u="none">
-                <a:solidFill>
-                  <a:srgbClr val="000000"/>
-                </a:solidFill>
-                <a:latin typeface="Times New Roman"/>
-                <a:ea typeface="Times New Roman"/>
-                <a:cs typeface="Times New Roman"/>
-              </a:rPr>
-              <a:t>higher visibility</a:t>
-            </a:r>
-            <a:endParaRPr/>
-          </a:p>
-          <a:p>
-            <a:pPr marL="217793" indent="-217793">
-              <a:buFont typeface="Arial"/>
-              <a:buChar char="–"/>
-              <a:defRPr/>
-            </a:pPr>
-            <a:r>
-              <a:rPr sz="1200" b="0" i="0" u="none">
-                <a:solidFill>
-                  <a:srgbClr val="000000"/>
-                </a:solidFill>
-                <a:latin typeface="Times New Roman"/>
-                <a:ea typeface="Times New Roman"/>
-                <a:cs typeface="Times New Roman"/>
-              </a:rPr>
-              <a:t>brokers connect different groups, </a:t>
-            </a:r>
-            <a:r>
-              <a:rPr sz="1200" b="0" i="0" u="none">
-                <a:solidFill>
-                  <a:srgbClr val="000000"/>
-                </a:solidFill>
-                <a:latin typeface="Times New Roman"/>
-                <a:ea typeface="Times New Roman"/>
-                <a:cs typeface="Times New Roman"/>
-              </a:rPr>
-              <a:t>control information flows, </a:t>
-            </a:r>
-            <a:r>
-              <a:rPr sz="1200" b="0" i="0" u="none">
-                <a:solidFill>
-                  <a:srgbClr val="000000"/>
-                </a:solidFill>
-                <a:latin typeface="Times New Roman"/>
-                <a:ea typeface="Times New Roman"/>
-                <a:cs typeface="Times New Roman"/>
-              </a:rPr>
-              <a:t>enable coordination across clusters</a:t>
-            </a:r>
-            <a:endParaRPr/>
-          </a:p>
-          <a:p>
-            <a:pPr marL="217793" indent="-217793">
-              <a:buFont typeface="Arial"/>
-              <a:buChar char="–"/>
-              <a:defRPr/>
-            </a:pPr>
-            <a:r>
-              <a:rPr sz="1200" b="0" i="0" u="none">
-                <a:solidFill>
-                  <a:srgbClr val="000000"/>
-                </a:solidFill>
-                <a:latin typeface="Times New Roman"/>
-                <a:ea typeface="Times New Roman"/>
-                <a:cs typeface="Times New Roman"/>
-              </a:rPr>
-              <a:t>influence = position + access + coordination</a:t>
-            </a:r>
-            <a:endParaRPr/>
-          </a:p>
-        </p:txBody>
-      </p:sp>
-      <p:sp>
-        <p:nvSpPr>
-          <p:cNvPr id="485745128" name="Slide Number Placeholder 3"/>
+            <a:pPr>
+              <a:defRPr/>
+            </a:pPr>
+            <a:endParaRPr/>
+          </a:p>
+        </p:txBody>
+      </p:sp>
+      <p:sp>
+        <p:nvSpPr>
+          <p:cNvPr id="1227952222" name="Slide Number Placeholder 3"/>
           <p:cNvSpPr>
             <a:spLocks noGrp="1"/>
           </p:cNvSpPr>
@@ -4454,7 +4363,7 @@
             <a:pPr>
               <a:defRPr/>
             </a:pPr>
-            <a:fld id="{BCA22EAD-B72A-2A2D-8FFD-B8E7E7C2FEA3}" type="slidenum">
+            <a:fld id="{ACE345B4-ADB7-2EEF-04CE-D3711A2E1966}" type="slidenum">
               <a:rPr/>
               <a:t/>
             </a:fld>
@@ -4489,7 +4398,7 @@
       </p:grpSpPr>
       <p:sp>
         <p:nvSpPr>
-          <p:cNvPr id="1775881073" name="Slide Image Placeholder 1"/>
+          <p:cNvPr id="1871779187" name="Slide Image Placeholder 1"/>
           <p:cNvSpPr>
             <a:spLocks noChangeAspect="1" noGrp="1" noRot="1"/>
           </p:cNvSpPr>
@@ -4501,7 +4410,7 @@
       </p:sp>
       <p:sp>
         <p:nvSpPr>
-          <p:cNvPr id="116278441" name="Notes Placeholder 2"/>
+          <p:cNvPr id="630893258" name="Notes Placeholder 2"/>
           <p:cNvSpPr>
             <a:spLocks noGrp="1"/>
           </p:cNvSpPr>
@@ -4528,7 +4437,18 @@
                 <a:ea typeface="Times New Roman"/>
                 <a:cs typeface="Times New Roman"/>
               </a:rPr>
-              <a:t>network position shapes discourse:</a:t>
+              <a:t>influence through relations, </a:t>
+            </a:r>
+            <a:r>
+              <a:rPr sz="1200" b="0" i="0" u="none">
+                <a:solidFill>
+                  <a:srgbClr val="000000"/>
+                </a:solidFill>
+                <a:latin typeface="Times New Roman"/>
+                <a:ea typeface="Times New Roman"/>
+                <a:cs typeface="Times New Roman"/>
+              </a:rPr>
+              <a:t>embedded in network structure</a:t>
             </a:r>
             <a:endParaRPr/>
           </a:p>
@@ -4547,8 +4467,16 @@
                 <a:ea typeface="Times New Roman"/>
                 <a:cs typeface="Times New Roman"/>
               </a:rPr>
-              <a:t>incumbents dominate core, </a:t>
-            </a:r>
+              <a:t>"Influence often comes from being present where decisions are shaped."</a:t>
+            </a:r>
+            <a:endParaRPr/>
+          </a:p>
+          <a:p>
+            <a:pPr marL="217793" indent="-217793">
+              <a:buFont typeface="Arial"/>
+              <a:buChar char="–"/>
+              <a:defRPr/>
+            </a:pPr>
             <a:r>
               <a:rPr sz="1200" b="0" i="0" u="none">
                 <a:solidFill>
@@ -4558,7 +4486,7 @@
                 <a:ea typeface="Times New Roman"/>
                 <a:cs typeface="Times New Roman"/>
               </a:rPr>
-              <a:t>market-oriented logic, </a:t>
+              <a:t>high centrality → more connections, </a:t>
             </a:r>
             <a:r>
               <a:rPr sz="1200" b="0" i="0" u="none">
@@ -4569,7 +4497,18 @@
                 <a:ea typeface="Times New Roman"/>
                 <a:cs typeface="Times New Roman"/>
               </a:rPr>
-              <a:t>strong structural embeddedness</a:t>
+              <a:t>better access to information, </a:t>
+            </a:r>
+            <a:r>
+              <a:rPr sz="1200" b="0" i="0" u="none">
+                <a:solidFill>
+                  <a:srgbClr val="000000"/>
+                </a:solidFill>
+                <a:latin typeface="Times New Roman"/>
+                <a:ea typeface="Times New Roman"/>
+                <a:cs typeface="Times New Roman"/>
+              </a:rPr>
+              <a:t>higher visibility</a:t>
             </a:r>
             <a:endParaRPr/>
           </a:p>
@@ -4588,7 +4527,7 @@
                 <a:ea typeface="Times New Roman"/>
                 <a:cs typeface="Times New Roman"/>
               </a:rPr>
-              <a:t>ecological justice perspectives exist, </a:t>
+              <a:t>brokers connect different groups, </a:t>
             </a:r>
             <a:r>
               <a:rPr sz="1200" b="0" i="0" u="none">
@@ -4599,7 +4538,7 @@
                 <a:ea typeface="Times New Roman"/>
                 <a:cs typeface="Times New Roman"/>
               </a:rPr>
-              <a:t>located at the margins, </a:t>
+              <a:t>control information flows, </a:t>
             </a:r>
             <a:r>
               <a:rPr sz="1200" b="0" i="0" u="none">
@@ -4610,7 +4549,7 @@
                 <a:ea typeface="Times New Roman"/>
                 <a:cs typeface="Times New Roman"/>
               </a:rPr>
-              <a:t>low connectivity</a:t>
+              <a:t>enable coordination across clusters</a:t>
             </a:r>
             <a:endParaRPr/>
           </a:p>
@@ -4629,97 +4568,15 @@
                 <a:ea typeface="Times New Roman"/>
                 <a:cs typeface="Times New Roman"/>
               </a:rPr>
-              <a:t>follows centrality, </a:t>
-            </a:r>
-            <a:r>
-              <a:rPr sz="1200" b="0" i="0" u="none">
-                <a:solidFill>
-                  <a:srgbClr val="000000"/>
-                </a:solidFill>
-                <a:latin typeface="Times New Roman"/>
-                <a:ea typeface="Times New Roman"/>
-                <a:cs typeface="Times New Roman"/>
-              </a:rPr>
-              <a:t>central actors define framing, </a:t>
-            </a:r>
-            <a:r>
-              <a:rPr sz="1200" b="0" i="0" u="none">
-                <a:solidFill>
-                  <a:srgbClr val="000000"/>
-                </a:solidFill>
-                <a:latin typeface="Times New Roman"/>
-                <a:ea typeface="Times New Roman"/>
-                <a:cs typeface="Times New Roman"/>
-              </a:rPr>
-              <a:t>peripheral voices less visible</a:t>
-            </a:r>
-            <a:endParaRPr/>
-          </a:p>
-          <a:p>
-            <a:pPr marL="217793" indent="-217793">
-              <a:buFont typeface="Arial"/>
-              <a:buChar char="–"/>
-              <a:defRPr/>
-            </a:pPr>
-            <a:r>
-              <a:rPr sz="1200" b="0" i="0" u="none">
-                <a:solidFill>
-                  <a:srgbClr val="000000"/>
-                </a:solidFill>
-                <a:latin typeface="Times New Roman"/>
-                <a:ea typeface="Times New Roman"/>
-                <a:cs typeface="Times New Roman"/>
-              </a:rPr>
-              <a:t>limited access for challengers, </a:t>
-            </a:r>
-            <a:r>
-              <a:rPr sz="1200" b="0" i="0" u="none">
-                <a:solidFill>
-                  <a:srgbClr val="000000"/>
-                </a:solidFill>
-                <a:latin typeface="Times New Roman"/>
-                <a:ea typeface="Times New Roman"/>
-                <a:cs typeface="Times New Roman"/>
-              </a:rPr>
-              <a:t>hard to shift dominant narratives/the action field, </a:t>
-            </a:r>
-            <a:r>
-              <a:rPr sz="1200" b="0" i="0" u="none">
-                <a:solidFill>
-                  <a:srgbClr val="000000"/>
-                </a:solidFill>
-                <a:latin typeface="Times New Roman"/>
-                <a:ea typeface="Times New Roman"/>
-                <a:cs typeface="Times New Roman"/>
-              </a:rPr>
-              <a:t>structural barriers persist</a:t>
-            </a:r>
-            <a:endParaRPr/>
-          </a:p>
-          <a:p>
-            <a:pPr marL="217793" indent="-217793">
-              <a:buFont typeface="Arial"/>
-              <a:buChar char="–"/>
-              <a:defRPr/>
-            </a:pPr>
-            <a:r>
-              <a:rPr sz="1200" b="0" i="0" u="none">
-                <a:solidFill>
-                  <a:srgbClr val="000000"/>
-                </a:solidFill>
-                <a:latin typeface="Times New Roman"/>
-                <a:ea typeface="Times New Roman"/>
-                <a:cs typeface="Times New Roman"/>
-              </a:rPr>
-              <a:t>No causality, but strong alignment between structural position and sustainability framing</a:t>
-            </a:r>
-            <a:endParaRPr/>
-          </a:p>
-        </p:txBody>
-      </p:sp>
-      <p:sp>
-        <p:nvSpPr>
-          <p:cNvPr id="1286199579" name="Slide Number Placeholder 3"/>
+              <a:t>influence = position + access + coordination</a:t>
+            </a:r>
+            <a:endParaRPr/>
+          </a:p>
+        </p:txBody>
+      </p:sp>
+      <p:sp>
+        <p:nvSpPr>
+          <p:cNvPr id="258053201" name="Slide Number Placeholder 3"/>
           <p:cNvSpPr>
             <a:spLocks noGrp="1"/>
           </p:cNvSpPr>
@@ -4735,7 +4592,7 @@
             <a:pPr>
               <a:defRPr/>
             </a:pPr>
-            <a:fld id="{63D8725F-0DFF-365C-D7DD-3AE45AFE6F87}" type="slidenum">
+            <a:fld id="{BCA22EAD-B72A-2A2D-8FFD-B8E7E7C2FEA3}" type="slidenum">
               <a:rPr/>
               <a:t/>
             </a:fld>
@@ -4770,7 +4627,7 @@
       </p:grpSpPr>
       <p:sp>
         <p:nvSpPr>
-          <p:cNvPr id="1382649583" name="Slide Image Placeholder 1"/>
+          <p:cNvPr id="2086482312" name="Slide Image Placeholder 1"/>
           <p:cNvSpPr>
             <a:spLocks noChangeAspect="1" noGrp="1" noRot="1"/>
           </p:cNvSpPr>
@@ -4782,7 +4639,7 @@
       </p:sp>
       <p:sp>
         <p:nvSpPr>
-          <p:cNvPr id="1818723205" name="Notes Placeholder 2"/>
+          <p:cNvPr id="2027403191" name="Notes Placeholder 2"/>
           <p:cNvSpPr>
             <a:spLocks noGrp="1"/>
           </p:cNvSpPr>
@@ -4795,16 +4652,212 @@
           <a:bodyPr/>
           <a:lstStyle/>
           <a:p>
-            <a:pPr>
-              <a:defRPr/>
-            </a:pPr>
-            <a:endParaRPr/>
-          </a:p>
-        </p:txBody>
-      </p:sp>
-      <p:sp>
-        <p:nvSpPr>
-          <p:cNvPr id="1254602995" name="Slide Number Placeholder 3"/>
+            <a:pPr marL="217793" indent="-217793">
+              <a:buFont typeface="Arial"/>
+              <a:buChar char="–"/>
+              <a:defRPr/>
+            </a:pPr>
+            <a:r>
+              <a:rPr sz="1200" b="0" i="0" u="none">
+                <a:solidFill>
+                  <a:srgbClr val="000000"/>
+                </a:solidFill>
+                <a:latin typeface="Times New Roman"/>
+                <a:ea typeface="Times New Roman"/>
+                <a:cs typeface="Times New Roman"/>
+              </a:rPr>
+              <a:t>network position shapes discourse:</a:t>
+            </a:r>
+            <a:endParaRPr/>
+          </a:p>
+          <a:p>
+            <a:pPr marL="217793" indent="-217793">
+              <a:buFont typeface="Arial"/>
+              <a:buChar char="–"/>
+              <a:defRPr/>
+            </a:pPr>
+            <a:r>
+              <a:rPr sz="1200" b="0" i="0" u="none">
+                <a:solidFill>
+                  <a:srgbClr val="000000"/>
+                </a:solidFill>
+                <a:latin typeface="Times New Roman"/>
+                <a:ea typeface="Times New Roman"/>
+                <a:cs typeface="Times New Roman"/>
+              </a:rPr>
+              <a:t>incumbents dominate core, </a:t>
+            </a:r>
+            <a:r>
+              <a:rPr sz="1200" b="0" i="0" u="none">
+                <a:solidFill>
+                  <a:srgbClr val="000000"/>
+                </a:solidFill>
+                <a:latin typeface="Times New Roman"/>
+                <a:ea typeface="Times New Roman"/>
+                <a:cs typeface="Times New Roman"/>
+              </a:rPr>
+              <a:t>market-oriented logic, </a:t>
+            </a:r>
+            <a:r>
+              <a:rPr sz="1200" b="0" i="0" u="none">
+                <a:solidFill>
+                  <a:srgbClr val="000000"/>
+                </a:solidFill>
+                <a:latin typeface="Times New Roman"/>
+                <a:ea typeface="Times New Roman"/>
+                <a:cs typeface="Times New Roman"/>
+              </a:rPr>
+              <a:t>strong structural embeddedness</a:t>
+            </a:r>
+            <a:endParaRPr/>
+          </a:p>
+          <a:p>
+            <a:pPr marL="217793" indent="-217793">
+              <a:buFont typeface="Arial"/>
+              <a:buChar char="–"/>
+              <a:defRPr/>
+            </a:pPr>
+            <a:r>
+              <a:rPr sz="1200" b="0" i="0" u="none">
+                <a:solidFill>
+                  <a:srgbClr val="000000"/>
+                </a:solidFill>
+                <a:latin typeface="Times New Roman"/>
+                <a:ea typeface="Times New Roman"/>
+                <a:cs typeface="Times New Roman"/>
+              </a:rPr>
+              <a:t>ecological justice perspectives exist, </a:t>
+            </a:r>
+            <a:r>
+              <a:rPr sz="1200" b="0" i="0" u="none">
+                <a:solidFill>
+                  <a:srgbClr val="000000"/>
+                </a:solidFill>
+                <a:latin typeface="Times New Roman"/>
+                <a:ea typeface="Times New Roman"/>
+                <a:cs typeface="Times New Roman"/>
+              </a:rPr>
+              <a:t>located at the margins, </a:t>
+            </a:r>
+            <a:r>
+              <a:rPr sz="1200" b="0" i="0" u="none">
+                <a:solidFill>
+                  <a:srgbClr val="000000"/>
+                </a:solidFill>
+                <a:latin typeface="Times New Roman"/>
+                <a:ea typeface="Times New Roman"/>
+                <a:cs typeface="Times New Roman"/>
+              </a:rPr>
+              <a:t>low connectivity</a:t>
+            </a:r>
+            <a:endParaRPr/>
+          </a:p>
+          <a:p>
+            <a:pPr marL="217793" indent="-217793">
+              <a:buFont typeface="Arial"/>
+              <a:buChar char="–"/>
+              <a:defRPr/>
+            </a:pPr>
+            <a:r>
+              <a:rPr sz="1200" b="0" i="0" u="none">
+                <a:solidFill>
+                  <a:srgbClr val="000000"/>
+                </a:solidFill>
+                <a:latin typeface="Times New Roman"/>
+                <a:ea typeface="Times New Roman"/>
+                <a:cs typeface="Times New Roman"/>
+              </a:rPr>
+              <a:t>follows centrality, </a:t>
+            </a:r>
+            <a:r>
+              <a:rPr sz="1200" b="0" i="0" u="none">
+                <a:solidFill>
+                  <a:srgbClr val="000000"/>
+                </a:solidFill>
+                <a:latin typeface="Times New Roman"/>
+                <a:ea typeface="Times New Roman"/>
+                <a:cs typeface="Times New Roman"/>
+              </a:rPr>
+              <a:t>central actors define framing, </a:t>
+            </a:r>
+            <a:r>
+              <a:rPr sz="1200" b="0" i="0" u="none">
+                <a:solidFill>
+                  <a:srgbClr val="000000"/>
+                </a:solidFill>
+                <a:latin typeface="Times New Roman"/>
+                <a:ea typeface="Times New Roman"/>
+                <a:cs typeface="Times New Roman"/>
+              </a:rPr>
+              <a:t>peripheral voices less visible</a:t>
+            </a:r>
+            <a:endParaRPr/>
+          </a:p>
+          <a:p>
+            <a:pPr marL="217793" indent="-217793">
+              <a:buFont typeface="Arial"/>
+              <a:buChar char="–"/>
+              <a:defRPr/>
+            </a:pPr>
+            <a:r>
+              <a:rPr sz="1200" b="0" i="0" u="none">
+                <a:solidFill>
+                  <a:srgbClr val="000000"/>
+                </a:solidFill>
+                <a:latin typeface="Times New Roman"/>
+                <a:ea typeface="Times New Roman"/>
+                <a:cs typeface="Times New Roman"/>
+              </a:rPr>
+              <a:t>limited access for challengers, </a:t>
+            </a:r>
+            <a:r>
+              <a:rPr sz="1200" b="0" i="0" u="none">
+                <a:solidFill>
+                  <a:srgbClr val="000000"/>
+                </a:solidFill>
+                <a:latin typeface="Times New Roman"/>
+                <a:ea typeface="Times New Roman"/>
+                <a:cs typeface="Times New Roman"/>
+              </a:rPr>
+              <a:t>hard to shift dominant narratives/the action field, </a:t>
+            </a:r>
+            <a:r>
+              <a:rPr sz="1200" b="0" i="0" u="none">
+                <a:solidFill>
+                  <a:srgbClr val="000000"/>
+                </a:solidFill>
+                <a:latin typeface="Times New Roman"/>
+                <a:ea typeface="Times New Roman"/>
+                <a:cs typeface="Times New Roman"/>
+              </a:rPr>
+              <a:t>structural barriers persist</a:t>
+            </a:r>
+            <a:endParaRPr/>
+          </a:p>
+          <a:p>
+            <a:pPr marL="217793" indent="-217793">
+              <a:buFont typeface="Arial"/>
+              <a:buChar char="–"/>
+              <a:defRPr/>
+            </a:pPr>
+            <a:r>
+              <a:rPr sz="1200" b="0" i="0" u="none">
+                <a:solidFill>
+                  <a:srgbClr val="000000"/>
+                </a:solidFill>
+                <a:latin typeface="Times New Roman"/>
+                <a:ea typeface="Times New Roman"/>
+                <a:cs typeface="Times New Roman"/>
+              </a:rPr>
+              <a:t>No causality, but strong alignment between structural position and sustainability framing</a:t>
+            </a:r>
+            <a:endParaRPr/>
+          </a:p>
+        </p:txBody>
+      </p:sp>
+      <p:sp>
+        <p:nvSpPr>
+          <p:cNvPr id="971825964" name="Slide Number Placeholder 3"/>
           <p:cNvSpPr>
             <a:spLocks noGrp="1"/>
           </p:cNvSpPr>
@@ -4820,7 +4873,7 @@
             <a:pPr>
               <a:defRPr/>
             </a:pPr>
-            <a:fld id="{AA5E7DAB-56CD-25C7-6D9F-8CFD712CEF8C}" type="slidenum">
+            <a:fld id="{63D8725F-0DFF-365C-D7DD-3AE45AFE6F87}" type="slidenum">
               <a:rPr/>
               <a:t/>
             </a:fld>
@@ -4855,7 +4908,7 @@
       </p:grpSpPr>
       <p:sp>
         <p:nvSpPr>
-          <p:cNvPr id="1790475088" name="Slide Image Placeholder 1"/>
+          <p:cNvPr id="1357257937" name="Slide Image Placeholder 1"/>
           <p:cNvSpPr>
             <a:spLocks noChangeAspect="1" noGrp="1" noRot="1"/>
           </p:cNvSpPr>
@@ -4867,7 +4920,7 @@
       </p:sp>
       <p:sp>
         <p:nvSpPr>
-          <p:cNvPr id="497005428" name="Notes Placeholder 2"/>
+          <p:cNvPr id="211087599" name="Notes Placeholder 2"/>
           <p:cNvSpPr>
             <a:spLocks noGrp="1"/>
           </p:cNvSpPr>
@@ -4889,7 +4942,7 @@
       </p:sp>
       <p:sp>
         <p:nvSpPr>
-          <p:cNvPr id="120242520" name="Slide Number Placeholder 3"/>
+          <p:cNvPr id="2097530039" name="Slide Number Placeholder 3"/>
           <p:cNvSpPr>
             <a:spLocks noGrp="1"/>
           </p:cNvSpPr>
@@ -4905,7 +4958,7 @@
             <a:pPr>
               <a:defRPr/>
             </a:pPr>
-            <a:fld id="{58BC14F9-1C07-4B5A-C8E7-FF96DE1F7526}" type="slidenum">
+            <a:fld id="{AA5E7DAB-56CD-25C7-6D9F-8CFD712CEF8C}" type="slidenum">
               <a:rPr/>
               <a:t/>
             </a:fld>
@@ -4940,7 +4993,7 @@
       </p:grpSpPr>
       <p:sp>
         <p:nvSpPr>
-          <p:cNvPr id="1046608964" name="Slide Image Placeholder 1"/>
+          <p:cNvPr id="2109398868" name="Slide Image Placeholder 1"/>
           <p:cNvSpPr>
             <a:spLocks noChangeAspect="1" noGrp="1" noRot="1"/>
           </p:cNvSpPr>
@@ -4952,7 +5005,7 @@
       </p:sp>
       <p:sp>
         <p:nvSpPr>
-          <p:cNvPr id="831145375" name="Notes Placeholder 2"/>
+          <p:cNvPr id="1684722087" name="Notes Placeholder 2"/>
           <p:cNvSpPr>
             <a:spLocks noGrp="1"/>
           </p:cNvSpPr>
@@ -4974,7 +5027,7 @@
       </p:sp>
       <p:sp>
         <p:nvSpPr>
-          <p:cNvPr id="37975473" name="Slide Number Placeholder 3"/>
+          <p:cNvPr id="622442233" name="Slide Number Placeholder 3"/>
           <p:cNvSpPr>
             <a:spLocks noGrp="1"/>
           </p:cNvSpPr>
@@ -4990,7 +5043,7 @@
             <a:pPr>
               <a:defRPr/>
             </a:pPr>
-            <a:fld id="{4E8F402D-6635-3F4C-BAB1-BD5309C33762}" type="slidenum">
+            <a:fld id="{58BC14F9-1C07-4B5A-C8E7-FF96DE1F7526}" type="slidenum">
               <a:rPr/>
               <a:t/>
             </a:fld>
@@ -5025,7 +5078,7 @@
       </p:grpSpPr>
       <p:sp>
         <p:nvSpPr>
-          <p:cNvPr id="1658281028" name="Slide Image Placeholder 1"/>
+          <p:cNvPr id="1897470492" name="Slide Image Placeholder 1"/>
           <p:cNvSpPr>
             <a:spLocks noChangeAspect="1" noGrp="1" noRot="1"/>
           </p:cNvSpPr>
@@ -5037,7 +5090,7 @@
       </p:sp>
       <p:sp>
         <p:nvSpPr>
-          <p:cNvPr id="1060310523" name="Notes Placeholder 2"/>
+          <p:cNvPr id="562385179" name="Notes Placeholder 2"/>
           <p:cNvSpPr>
             <a:spLocks noGrp="1"/>
           </p:cNvSpPr>
@@ -5168,7 +5221,7 @@
       </p:sp>
       <p:sp>
         <p:nvSpPr>
-          <p:cNvPr id="98298068" name="Slide Number Placeholder 3"/>
+          <p:cNvPr id="197000473" name="Slide Number Placeholder 3"/>
           <p:cNvSpPr>
             <a:spLocks noGrp="1"/>
           </p:cNvSpPr>
@@ -5185,6 +5238,91 @@
               <a:defRPr/>
             </a:pPr>
             <a:fld id="{866BEF7C-AC53-BC59-7961-089A45147F21}" type="slidenum">
+              <a:rPr/>
+              <a:t/>
+            </a:fld>
+            <a:endParaRPr/>
+          </a:p>
+        </p:txBody>
+      </p:sp>
+    </p:spTree>
+  </p:cSld>
+  <p:clrMapOvr>
+    <a:masterClrMapping/>
+  </p:clrMapOvr>
+</p:notes>
+</file>
+
+<file path=ppt/notesSlides/notesSlide40.xml><?xml version="1.0" encoding="utf-8"?>
+<p:notes xmlns:a="http://schemas.openxmlformats.org/drawingml/2006/main" xmlns:r="http://schemas.openxmlformats.org/officeDocument/2006/relationships" xmlns:p="http://schemas.openxmlformats.org/presentationml/2006/main" xmlns:m="http://schemas.openxmlformats.org/officeDocument/2006/math" xmlns:w="http://schemas.openxmlformats.org/wordprocessingml/2006/main">
+  <p:cSld name="">
+    <p:spTree>
+      <p:nvGrpSpPr>
+        <p:cNvPr id="1" name=""/>
+        <p:cNvGrpSpPr/>
+        <p:nvPr/>
+      </p:nvGrpSpPr>
+      <p:grpSpPr bwMode="auto">
+        <a:xfrm>
+          <a:off x="0" y="0"/>
+          <a:ext cx="0" cy="0"/>
+          <a:chOff x="0" y="0"/>
+          <a:chExt cx="0" cy="0"/>
+        </a:xfrm>
+      </p:grpSpPr>
+      <p:sp>
+        <p:nvSpPr>
+          <p:cNvPr id="1637482319" name="Slide Image Placeholder 1"/>
+          <p:cNvSpPr>
+            <a:spLocks noChangeAspect="1" noGrp="1" noRot="1"/>
+          </p:cNvSpPr>
+          <p:nvPr>
+            <p:ph type="sldImg"/>
+          </p:nvPr>
+        </p:nvSpPr>
+        <p:spPr bwMode="auto"/>
+      </p:sp>
+      <p:sp>
+        <p:nvSpPr>
+          <p:cNvPr id="1326019199" name="Notes Placeholder 2"/>
+          <p:cNvSpPr>
+            <a:spLocks noGrp="1"/>
+          </p:cNvSpPr>
+          <p:nvPr>
+            <p:ph type="body" idx="1"/>
+          </p:nvPr>
+        </p:nvSpPr>
+        <p:spPr bwMode="auto"/>
+        <p:txBody>
+          <a:bodyPr/>
+          <a:lstStyle/>
+          <a:p>
+            <a:pPr>
+              <a:defRPr/>
+            </a:pPr>
+            <a:endParaRPr/>
+          </a:p>
+        </p:txBody>
+      </p:sp>
+      <p:sp>
+        <p:nvSpPr>
+          <p:cNvPr id="1877719895" name="Slide Number Placeholder 3"/>
+          <p:cNvSpPr>
+            <a:spLocks noGrp="1"/>
+          </p:cNvSpPr>
+          <p:nvPr>
+            <p:ph type="sldNum" sz="quarter" idx="10"/>
+          </p:nvPr>
+        </p:nvSpPr>
+        <p:spPr bwMode="auto"/>
+        <p:txBody>
+          <a:bodyPr/>
+          <a:lstStyle/>
+          <a:p>
+            <a:pPr>
+              <a:defRPr/>
+            </a:pPr>
+            <a:fld id="{4E8F402D-6635-3F4C-BAB1-BD5309C33762}" type="slidenum">
               <a:rPr/>
               <a:t/>
             </a:fld>
@@ -5219,7 +5357,7 @@
       </p:grpSpPr>
       <p:sp>
         <p:nvSpPr>
-          <p:cNvPr id="607916198" name="Slide Image Placeholder 1"/>
+          <p:cNvPr id="1861615760" name="Slide Image Placeholder 1"/>
           <p:cNvSpPr>
             <a:spLocks noChangeAspect="1" noGrp="1" noRot="1"/>
           </p:cNvSpPr>
@@ -5231,7 +5369,7 @@
       </p:sp>
       <p:sp>
         <p:nvSpPr>
-          <p:cNvPr id="592380453" name="Notes Placeholder 2"/>
+          <p:cNvPr id="21867581" name="Notes Placeholder 2"/>
           <p:cNvSpPr>
             <a:spLocks noGrp="1"/>
           </p:cNvSpPr>
@@ -5253,7 +5391,7 @@
       </p:sp>
       <p:sp>
         <p:nvSpPr>
-          <p:cNvPr id="2114827401" name="Slide Number Placeholder 3"/>
+          <p:cNvPr id="590473161" name="Slide Number Placeholder 3"/>
           <p:cNvSpPr>
             <a:spLocks noGrp="1"/>
           </p:cNvSpPr>
@@ -5304,7 +5442,7 @@
       </p:grpSpPr>
       <p:sp>
         <p:nvSpPr>
-          <p:cNvPr id="309355371" name="Slide Image Placeholder 1"/>
+          <p:cNvPr id="507606211" name="Slide Image Placeholder 1"/>
           <p:cNvSpPr>
             <a:spLocks noChangeAspect="1" noGrp="1" noRot="1"/>
           </p:cNvSpPr>
@@ -5316,7 +5454,7 @@
       </p:sp>
       <p:sp>
         <p:nvSpPr>
-          <p:cNvPr id="273842683" name="Notes Placeholder 2"/>
+          <p:cNvPr id="710117552" name="Notes Placeholder 2"/>
           <p:cNvSpPr>
             <a:spLocks noGrp="1"/>
           </p:cNvSpPr>
@@ -5342,7 +5480,7 @@
       </p:sp>
       <p:sp>
         <p:nvSpPr>
-          <p:cNvPr id="2099299501" name="Slide Number Placeholder 3"/>
+          <p:cNvPr id="1830248612" name="Slide Number Placeholder 3"/>
           <p:cNvSpPr>
             <a:spLocks noGrp="1"/>
           </p:cNvSpPr>
@@ -5393,7 +5531,7 @@
       </p:grpSpPr>
       <p:sp>
         <p:nvSpPr>
-          <p:cNvPr id="1887453511" name="Slide Image Placeholder 1"/>
+          <p:cNvPr id="619942425" name="Slide Image Placeholder 1"/>
           <p:cNvSpPr>
             <a:spLocks noChangeAspect="1" noGrp="1" noRot="1"/>
           </p:cNvSpPr>
@@ -5405,7 +5543,7 @@
       </p:sp>
       <p:sp>
         <p:nvSpPr>
-          <p:cNvPr id="452577852" name="Notes Placeholder 2"/>
+          <p:cNvPr id="1862818437" name="Notes Placeholder 2"/>
           <p:cNvSpPr>
             <a:spLocks noGrp="1"/>
           </p:cNvSpPr>
@@ -5677,7 +5815,7 @@
       </p:sp>
       <p:sp>
         <p:nvSpPr>
-          <p:cNvPr id="598707367" name="Slide Number Placeholder 3"/>
+          <p:cNvPr id="722235535" name="Slide Number Placeholder 3"/>
           <p:cNvSpPr>
             <a:spLocks noGrp="1"/>
           </p:cNvSpPr>
@@ -5728,7 +5866,7 @@
       </p:grpSpPr>
       <p:sp>
         <p:nvSpPr>
-          <p:cNvPr id="943223742" name="Slide Image Placeholder 1"/>
+          <p:cNvPr id="2098976248" name="Slide Image Placeholder 1"/>
           <p:cNvSpPr>
             <a:spLocks noChangeAspect="1" noGrp="1" noRot="1"/>
           </p:cNvSpPr>
@@ -5740,7 +5878,7 @@
       </p:sp>
       <p:sp>
         <p:nvSpPr>
-          <p:cNvPr id="1671556480" name="Notes Placeholder 2"/>
+          <p:cNvPr id="650074853" name="Notes Placeholder 2"/>
           <p:cNvSpPr>
             <a:spLocks noGrp="1"/>
           </p:cNvSpPr>
@@ -6057,7 +6195,7 @@
       </p:sp>
       <p:sp>
         <p:nvSpPr>
-          <p:cNvPr id="566681796" name="Slide Number Placeholder 3"/>
+          <p:cNvPr id="1467164857" name="Slide Number Placeholder 3"/>
           <p:cNvSpPr>
             <a:spLocks noGrp="1"/>
           </p:cNvSpPr>
@@ -6108,7 +6246,7 @@
       </p:grpSpPr>
       <p:sp>
         <p:nvSpPr>
-          <p:cNvPr id="1377876759" name="Slide Image Placeholder 1"/>
+          <p:cNvPr id="653356128" name="Slide Image Placeholder 1"/>
           <p:cNvSpPr>
             <a:spLocks noChangeAspect="1" noGrp="1" noRot="1"/>
           </p:cNvSpPr>
@@ -6120,7 +6258,7 @@
       </p:sp>
       <p:sp>
         <p:nvSpPr>
-          <p:cNvPr id="557988234" name="Notes Placeholder 2"/>
+          <p:cNvPr id="1667217264" name="Notes Placeholder 2"/>
           <p:cNvSpPr>
             <a:spLocks noGrp="1"/>
           </p:cNvSpPr>
@@ -6360,7 +6498,7 @@
       </p:sp>
       <p:sp>
         <p:nvSpPr>
-          <p:cNvPr id="601391705" name="Slide Number Placeholder 3"/>
+          <p:cNvPr id="1028864401" name="Slide Number Placeholder 3"/>
           <p:cNvSpPr>
             <a:spLocks noGrp="1"/>
           </p:cNvSpPr>
@@ -6411,7 +6549,7 @@
       </p:grpSpPr>
       <p:pic>
         <p:nvPicPr>
-          <p:cNvPr id="873612346" name="Grafik 2"/>
+          <p:cNvPr id="695814811" name="Grafik 2"/>
           <p:cNvPicPr>
             <a:picLocks noChangeAspect="1"/>
           </p:cNvPicPr>
@@ -6464,7 +6602,7 @@
       </p:grpSpPr>
       <p:sp>
         <p:nvSpPr>
-          <p:cNvPr id="2080743805" name="Bildplatzhalter 6"/>
+          <p:cNvPr id="484366778" name="Bildplatzhalter 6"/>
           <p:cNvSpPr>
             <a:spLocks noGrp="1"/>
           </p:cNvSpPr>
@@ -6503,7 +6641,7 @@
       </p:sp>
       <p:sp>
         <p:nvSpPr>
-          <p:cNvPr id="1740540453" name="Title 1"/>
+          <p:cNvPr id="371327758" name="Title 1"/>
           <p:cNvSpPr>
             <a:spLocks noGrp="1"/>
           </p:cNvSpPr>
@@ -6544,7 +6682,7 @@
       </p:sp>
       <p:sp>
         <p:nvSpPr>
-          <p:cNvPr id="1244265024" name="Datumsplatzhalter 2"/>
+          <p:cNvPr id="538734457" name="Datumsplatzhalter 2"/>
           <p:cNvSpPr>
             <a:spLocks noGrp="1"/>
           </p:cNvSpPr>
@@ -6570,7 +6708,7 @@
       </p:sp>
       <p:sp>
         <p:nvSpPr>
-          <p:cNvPr id="588003769" name="Fußzeilenplatzhalter 3"/>
+          <p:cNvPr id="62933428" name="Fußzeilenplatzhalter 3"/>
           <p:cNvSpPr>
             <a:spLocks noGrp="1"/>
           </p:cNvSpPr>
@@ -6596,7 +6734,7 @@
       </p:sp>
       <p:sp>
         <p:nvSpPr>
-          <p:cNvPr id="604765642" name="Foliennummernplatzhalter 4"/>
+          <p:cNvPr id="743069192" name="Foliennummernplatzhalter 4"/>
           <p:cNvSpPr>
             <a:spLocks noGrp="1"/>
           </p:cNvSpPr>
@@ -6647,7 +6785,7 @@
       </p:grpSpPr>
       <p:sp>
         <p:nvSpPr>
-          <p:cNvPr id="181897464" name="Title 1"/>
+          <p:cNvPr id="1201297006" name="Title 1"/>
           <p:cNvSpPr>
             <a:spLocks noGrp="1"/>
           </p:cNvSpPr>
@@ -6684,7 +6822,7 @@
       </p:sp>
       <p:sp>
         <p:nvSpPr>
-          <p:cNvPr id="26963554" name="Content Placeholder 2"/>
+          <p:cNvPr id="1964277354" name="Content Placeholder 2"/>
           <p:cNvSpPr>
             <a:spLocks noGrp="1"/>
           </p:cNvSpPr>
@@ -6758,7 +6896,7 @@
       </p:sp>
       <p:sp>
         <p:nvSpPr>
-          <p:cNvPr id="609353028" name="Textplatzhalter 5"/>
+          <p:cNvPr id="1199947255" name="Textplatzhalter 5"/>
           <p:cNvSpPr>
             <a:spLocks noGrp="1"/>
           </p:cNvSpPr>
@@ -6832,7 +6970,7 @@
       </p:sp>
       <p:sp>
         <p:nvSpPr>
-          <p:cNvPr id="430486705" name="Datumsplatzhalter 3"/>
+          <p:cNvPr id="1421452359" name="Datumsplatzhalter 3"/>
           <p:cNvSpPr>
             <a:spLocks noGrp="1"/>
           </p:cNvSpPr>
@@ -6858,7 +6996,7 @@
       </p:sp>
       <p:sp>
         <p:nvSpPr>
-          <p:cNvPr id="373466442" name="Fußzeilenplatzhalter 4"/>
+          <p:cNvPr id="1284205772" name="Fußzeilenplatzhalter 4"/>
           <p:cNvSpPr>
             <a:spLocks noGrp="1"/>
           </p:cNvSpPr>
@@ -6884,7 +7022,7 @@
       </p:sp>
       <p:sp>
         <p:nvSpPr>
-          <p:cNvPr id="1270527912" name="Foliennummernplatzhalter 5"/>
+          <p:cNvPr id="1047340053" name="Foliennummernplatzhalter 5"/>
           <p:cNvSpPr>
             <a:spLocks noGrp="1"/>
           </p:cNvSpPr>
@@ -6935,7 +7073,7 @@
       </p:grpSpPr>
       <p:sp>
         <p:nvSpPr>
-          <p:cNvPr id="515602064" name="Title 1"/>
+          <p:cNvPr id="919717964" name="Title 1"/>
           <p:cNvSpPr>
             <a:spLocks noGrp="1"/>
           </p:cNvSpPr>
@@ -6972,7 +7110,7 @@
       </p:sp>
       <p:sp>
         <p:nvSpPr>
-          <p:cNvPr id="1775948424" name="Content Placeholder 2"/>
+          <p:cNvPr id="1184673371" name="Content Placeholder 2"/>
           <p:cNvSpPr>
             <a:spLocks noGrp="1"/>
           </p:cNvSpPr>
@@ -7046,7 +7184,7 @@
       </p:sp>
       <p:sp>
         <p:nvSpPr>
-          <p:cNvPr id="255682639" name="Content Placeholder 3"/>
+          <p:cNvPr id="972592461" name="Content Placeholder 3"/>
           <p:cNvSpPr>
             <a:spLocks noGrp="1"/>
           </p:cNvSpPr>
@@ -7120,7 +7258,7 @@
       </p:sp>
       <p:sp>
         <p:nvSpPr>
-          <p:cNvPr id="1771986310" name="Datumsplatzhalter 4"/>
+          <p:cNvPr id="373880077" name="Datumsplatzhalter 4"/>
           <p:cNvSpPr>
             <a:spLocks noGrp="1"/>
           </p:cNvSpPr>
@@ -7146,7 +7284,7 @@
       </p:sp>
       <p:sp>
         <p:nvSpPr>
-          <p:cNvPr id="723532182" name="Fußzeilenplatzhalter 5"/>
+          <p:cNvPr id="1960963715" name="Fußzeilenplatzhalter 5"/>
           <p:cNvSpPr>
             <a:spLocks noGrp="1"/>
           </p:cNvSpPr>
@@ -7172,7 +7310,7 @@
       </p:sp>
       <p:sp>
         <p:nvSpPr>
-          <p:cNvPr id="835374429" name="Foliennummernplatzhalter 6"/>
+          <p:cNvPr id="1701948863" name="Foliennummernplatzhalter 6"/>
           <p:cNvSpPr>
             <a:spLocks noGrp="1"/>
           </p:cNvSpPr>
@@ -7223,7 +7361,7 @@
       </p:grpSpPr>
       <p:sp>
         <p:nvSpPr>
-          <p:cNvPr id="382956270" name="Content Placeholder 2"/>
+          <p:cNvPr id="176577674" name="Content Placeholder 2"/>
           <p:cNvSpPr>
             <a:spLocks noGrp="1"/>
           </p:cNvSpPr>
@@ -7297,7 +7435,7 @@
       </p:sp>
       <p:sp>
         <p:nvSpPr>
-          <p:cNvPr id="2116995175" name="Bildplatzhalter 7"/>
+          <p:cNvPr id="884648257" name="Bildplatzhalter 7"/>
           <p:cNvSpPr>
             <a:spLocks noGrp="1"/>
           </p:cNvSpPr>
@@ -7336,7 +7474,7 @@
       </p:sp>
       <p:sp>
         <p:nvSpPr>
-          <p:cNvPr id="1134146396" name="Textplatzhalter 5"/>
+          <p:cNvPr id="2050539519" name="Textplatzhalter 5"/>
           <p:cNvSpPr>
             <a:spLocks noGrp="1"/>
           </p:cNvSpPr>
@@ -7410,7 +7548,7 @@
       </p:sp>
       <p:sp>
         <p:nvSpPr>
-          <p:cNvPr id="1255848734" name="Titel 4"/>
+          <p:cNvPr id="990278740" name="Titel 4"/>
           <p:cNvSpPr>
             <a:spLocks noGrp="1"/>
           </p:cNvSpPr>
@@ -7447,7 +7585,7 @@
       </p:sp>
       <p:sp>
         <p:nvSpPr>
-          <p:cNvPr id="689252250" name="Datumsplatzhalter 1"/>
+          <p:cNvPr id="139863618" name="Datumsplatzhalter 1"/>
           <p:cNvSpPr>
             <a:spLocks noGrp="1"/>
           </p:cNvSpPr>
@@ -7473,7 +7611,7 @@
       </p:sp>
       <p:sp>
         <p:nvSpPr>
-          <p:cNvPr id="1253652086" name="Fußzeilenplatzhalter 3"/>
+          <p:cNvPr id="1984804358" name="Fußzeilenplatzhalter 3"/>
           <p:cNvSpPr>
             <a:spLocks noGrp="1"/>
           </p:cNvSpPr>
@@ -7499,7 +7637,7 @@
       </p:sp>
       <p:sp>
         <p:nvSpPr>
-          <p:cNvPr id="953952420" name="Foliennummernplatzhalter 5"/>
+          <p:cNvPr id="854804493" name="Foliennummernplatzhalter 5"/>
           <p:cNvSpPr>
             <a:spLocks noGrp="1"/>
           </p:cNvSpPr>
@@ -7550,7 +7688,7 @@
       </p:grpSpPr>
       <p:sp>
         <p:nvSpPr>
-          <p:cNvPr id="2118242187" name="Bildplatzhalter 7"/>
+          <p:cNvPr id="382018927" name="Bildplatzhalter 7"/>
           <p:cNvSpPr>
             <a:spLocks noGrp="1"/>
           </p:cNvSpPr>
@@ -7589,7 +7727,7 @@
       </p:sp>
       <p:sp>
         <p:nvSpPr>
-          <p:cNvPr id="92672040" name="Textplatzhalter 5"/>
+          <p:cNvPr id="1112748033" name="Textplatzhalter 5"/>
           <p:cNvSpPr>
             <a:spLocks noGrp="1"/>
           </p:cNvSpPr>
@@ -7663,7 +7801,7 @@
       </p:sp>
       <p:sp>
         <p:nvSpPr>
-          <p:cNvPr id="1837793352" name="Titel 3"/>
+          <p:cNvPr id="992914997" name="Titel 3"/>
           <p:cNvSpPr>
             <a:spLocks noGrp="1"/>
           </p:cNvSpPr>
@@ -7700,7 +7838,7 @@
       </p:sp>
       <p:sp>
         <p:nvSpPr>
-          <p:cNvPr id="1710590687" name="Datumsplatzhalter 1"/>
+          <p:cNvPr id="601522220" name="Datumsplatzhalter 1"/>
           <p:cNvSpPr>
             <a:spLocks noGrp="1"/>
           </p:cNvSpPr>
@@ -7726,7 +7864,7 @@
       </p:sp>
       <p:sp>
         <p:nvSpPr>
-          <p:cNvPr id="308455124" name="Fußzeilenplatzhalter 4"/>
+          <p:cNvPr id="1163480541" name="Fußzeilenplatzhalter 4"/>
           <p:cNvSpPr>
             <a:spLocks noGrp="1"/>
           </p:cNvSpPr>
@@ -7752,7 +7890,7 @@
       </p:sp>
       <p:sp>
         <p:nvSpPr>
-          <p:cNvPr id="697377417" name="Foliennummernplatzhalter 5"/>
+          <p:cNvPr id="274596157" name="Foliennummernplatzhalter 5"/>
           <p:cNvSpPr>
             <a:spLocks noGrp="1"/>
           </p:cNvSpPr>
@@ -7803,7 +7941,7 @@
       </p:grpSpPr>
       <p:sp>
         <p:nvSpPr>
-          <p:cNvPr id="124547258" name="Titel 1"/>
+          <p:cNvPr id="1045601780" name="Titel 1"/>
           <p:cNvSpPr>
             <a:spLocks noGrp="1"/>
           </p:cNvSpPr>
@@ -7840,7 +7978,7 @@
       </p:sp>
       <p:sp>
         <p:nvSpPr>
-          <p:cNvPr id="827783978" name="Medienplatzhalter 6"/>
+          <p:cNvPr id="22245853" name="Medienplatzhalter 6"/>
           <p:cNvSpPr>
             <a:spLocks noGrp="1"/>
           </p:cNvSpPr>
@@ -7874,7 +8012,7 @@
       </p:sp>
       <p:sp>
         <p:nvSpPr>
-          <p:cNvPr id="1720103425" name="Textplatzhalter 5"/>
+          <p:cNvPr id="1264107388" name="Textplatzhalter 5"/>
           <p:cNvSpPr>
             <a:spLocks noGrp="1"/>
           </p:cNvSpPr>
@@ -7948,7 +8086,7 @@
       </p:sp>
       <p:sp>
         <p:nvSpPr>
-          <p:cNvPr id="1057015293" name="Datumsplatzhalter 2"/>
+          <p:cNvPr id="1898617312" name="Datumsplatzhalter 2"/>
           <p:cNvSpPr>
             <a:spLocks noGrp="1"/>
           </p:cNvSpPr>
@@ -7974,7 +8112,7 @@
       </p:sp>
       <p:sp>
         <p:nvSpPr>
-          <p:cNvPr id="410620173" name="Fußzeilenplatzhalter 3"/>
+          <p:cNvPr id="948361328" name="Fußzeilenplatzhalter 3"/>
           <p:cNvSpPr>
             <a:spLocks noGrp="1"/>
           </p:cNvSpPr>
@@ -8000,7 +8138,7 @@
       </p:sp>
       <p:sp>
         <p:nvSpPr>
-          <p:cNvPr id="236165708" name="Foliennummernplatzhalter 4"/>
+          <p:cNvPr id="748703732" name="Foliennummernplatzhalter 4"/>
           <p:cNvSpPr>
             <a:spLocks noGrp="1"/>
           </p:cNvSpPr>
@@ -8051,7 +8189,7 @@
       </p:grpSpPr>
       <p:sp>
         <p:nvSpPr>
-          <p:cNvPr id="1600778849" name="Title 1"/>
+          <p:cNvPr id="320080762" name="Title 1"/>
           <p:cNvSpPr>
             <a:spLocks noGrp="1"/>
           </p:cNvSpPr>
@@ -8088,7 +8226,7 @@
       </p:sp>
       <p:sp>
         <p:nvSpPr>
-          <p:cNvPr id="958350292" name="Content Placeholder 2"/>
+          <p:cNvPr id="1224762353" name="Content Placeholder 2"/>
           <p:cNvSpPr>
             <a:spLocks noGrp="1"/>
           </p:cNvSpPr>
@@ -8162,7 +8300,7 @@
       </p:sp>
       <p:sp>
         <p:nvSpPr>
-          <p:cNvPr id="756911907" name="Bildplatzhalter 7"/>
+          <p:cNvPr id="737734709" name="Bildplatzhalter 7"/>
           <p:cNvSpPr>
             <a:spLocks noGrp="1"/>
           </p:cNvSpPr>
@@ -8201,7 +8339,7 @@
       </p:sp>
       <p:sp>
         <p:nvSpPr>
-          <p:cNvPr id="1392142469" name="Bildplatzhalter 7"/>
+          <p:cNvPr id="315565048" name="Bildplatzhalter 7"/>
           <p:cNvSpPr>
             <a:spLocks noGrp="1"/>
           </p:cNvSpPr>
@@ -8240,7 +8378,7 @@
       </p:sp>
       <p:sp>
         <p:nvSpPr>
-          <p:cNvPr id="892215213" name="Bildplatzhalter 7"/>
+          <p:cNvPr id="1907434060" name="Bildplatzhalter 7"/>
           <p:cNvSpPr>
             <a:spLocks noGrp="1"/>
           </p:cNvSpPr>
@@ -8279,7 +8417,7 @@
       </p:sp>
       <p:sp>
         <p:nvSpPr>
-          <p:cNvPr id="1458782448" name="Rechteck 13"/>
+          <p:cNvPr id="294538508" name="Rechteck 13"/>
           <p:cNvSpPr/>
           <p:nvPr userDrawn="1"/>
         </p:nvSpPr>
@@ -8325,7 +8463,7 @@
       </p:sp>
       <p:sp>
         <p:nvSpPr>
-          <p:cNvPr id="215142614" name="Datumsplatzhalter 3"/>
+          <p:cNvPr id="1426827531" name="Datumsplatzhalter 3"/>
           <p:cNvSpPr>
             <a:spLocks noGrp="1"/>
           </p:cNvSpPr>
@@ -8351,7 +8489,7 @@
       </p:sp>
       <p:sp>
         <p:nvSpPr>
-          <p:cNvPr id="542668809" name="Fußzeilenplatzhalter 4"/>
+          <p:cNvPr id="486175179" name="Fußzeilenplatzhalter 4"/>
           <p:cNvSpPr>
             <a:spLocks noGrp="1"/>
           </p:cNvSpPr>
@@ -8377,7 +8515,7 @@
       </p:sp>
       <p:sp>
         <p:nvSpPr>
-          <p:cNvPr id="852708313" name="Foliennummernplatzhalter 5"/>
+          <p:cNvPr id="1680715833" name="Foliennummernplatzhalter 5"/>
           <p:cNvSpPr>
             <a:spLocks noGrp="1"/>
           </p:cNvSpPr>
@@ -8428,7 +8566,7 @@
       </p:grpSpPr>
       <p:sp>
         <p:nvSpPr>
-          <p:cNvPr id="2113411885" name="Title 1"/>
+          <p:cNvPr id="1889488052" name="Title 1"/>
           <p:cNvSpPr>
             <a:spLocks noGrp="1"/>
           </p:cNvSpPr>
@@ -8465,7 +8603,7 @@
       </p:sp>
       <p:sp>
         <p:nvSpPr>
-          <p:cNvPr id="1073126170" name="Content Placeholder 2"/>
+          <p:cNvPr id="1459606775" name="Content Placeholder 2"/>
           <p:cNvSpPr>
             <a:spLocks noGrp="1"/>
           </p:cNvSpPr>
@@ -8539,7 +8677,7 @@
       </p:sp>
       <p:sp>
         <p:nvSpPr>
-          <p:cNvPr id="1526858348" name="Bildplatzhalter 7"/>
+          <p:cNvPr id="1352588761" name="Bildplatzhalter 7"/>
           <p:cNvSpPr>
             <a:spLocks noGrp="1"/>
           </p:cNvSpPr>
@@ -8578,7 +8716,7 @@
       </p:sp>
       <p:sp>
         <p:nvSpPr>
-          <p:cNvPr id="1873447732" name="Datumsplatzhalter 3"/>
+          <p:cNvPr id="1562434300" name="Datumsplatzhalter 3"/>
           <p:cNvSpPr>
             <a:spLocks noGrp="1"/>
           </p:cNvSpPr>
@@ -8604,7 +8742,7 @@
       </p:sp>
       <p:sp>
         <p:nvSpPr>
-          <p:cNvPr id="1341925318" name="Fußzeilenplatzhalter 4"/>
+          <p:cNvPr id="1554641333" name="Fußzeilenplatzhalter 4"/>
           <p:cNvSpPr>
             <a:spLocks noGrp="1"/>
           </p:cNvSpPr>
@@ -8630,7 +8768,7 @@
       </p:sp>
       <p:sp>
         <p:nvSpPr>
-          <p:cNvPr id="1543026363" name="Foliennummernplatzhalter 5"/>
+          <p:cNvPr id="2141757298" name="Foliennummernplatzhalter 5"/>
           <p:cNvSpPr>
             <a:spLocks noGrp="1"/>
           </p:cNvSpPr>
@@ -8681,7 +8819,7 @@
       </p:grpSpPr>
       <p:sp>
         <p:nvSpPr>
-          <p:cNvPr id="427848151" name="Titel 1"/>
+          <p:cNvPr id="799343986" name="Titel 1"/>
           <p:cNvSpPr>
             <a:spLocks noGrp="1"/>
           </p:cNvSpPr>
@@ -8718,7 +8856,7 @@
       </p:sp>
       <p:sp>
         <p:nvSpPr>
-          <p:cNvPr id="1671125789" name="Datumsplatzhalter 5"/>
+          <p:cNvPr id="1584088743" name="Datumsplatzhalter 5"/>
           <p:cNvSpPr>
             <a:spLocks noGrp="1"/>
           </p:cNvSpPr>
@@ -8744,7 +8882,7 @@
       </p:sp>
       <p:sp>
         <p:nvSpPr>
-          <p:cNvPr id="2107333775" name="Fußzeilenplatzhalter 7"/>
+          <p:cNvPr id="1695775283" name="Fußzeilenplatzhalter 7"/>
           <p:cNvSpPr>
             <a:spLocks noGrp="1"/>
           </p:cNvSpPr>
@@ -8770,7 +8908,7 @@
       </p:sp>
       <p:sp>
         <p:nvSpPr>
-          <p:cNvPr id="1292683196" name="Foliennummernplatzhalter 8"/>
+          <p:cNvPr id="867932232" name="Foliennummernplatzhalter 8"/>
           <p:cNvSpPr>
             <a:spLocks noGrp="1"/>
           </p:cNvSpPr>
@@ -8828,7 +8966,7 @@
       </p:grpSpPr>
       <p:pic>
         <p:nvPicPr>
-          <p:cNvPr id="597867796" name="Grafik 1"/>
+          <p:cNvPr id="591279511" name="Grafik 1"/>
           <p:cNvPicPr>
             <a:picLocks noChangeAspect="1"/>
           </p:cNvPicPr>
@@ -8881,7 +9019,7 @@
       </p:grpSpPr>
       <p:pic>
         <p:nvPicPr>
-          <p:cNvPr id="497237466" name="Grafik 4"/>
+          <p:cNvPr id="705213052" name="Grafik 4"/>
           <p:cNvPicPr>
             <a:picLocks noChangeAspect="1"/>
           </p:cNvPicPr>
@@ -8910,7 +9048,7 @@
       </p:pic>
       <p:sp>
         <p:nvSpPr>
-          <p:cNvPr id="134627658" name="Subtitle 2"/>
+          <p:cNvPr id="1976369563" name="Subtitle 2"/>
           <p:cNvSpPr>
             <a:spLocks noGrp="1"/>
           </p:cNvSpPr>
@@ -8986,7 +9124,7 @@
       </p:sp>
       <p:sp>
         <p:nvSpPr>
-          <p:cNvPr id="1778669180" name="Titel 5"/>
+          <p:cNvPr id="1760777265" name="Titel 5"/>
           <p:cNvSpPr>
             <a:spLocks noGrp="1"/>
           </p:cNvSpPr>
@@ -9028,7 +9166,7 @@
       </p:sp>
       <p:sp>
         <p:nvSpPr>
-          <p:cNvPr id="382902626" name="Textfeld 6"/>
+          <p:cNvPr id="1954197881" name="Textfeld 6"/>
           <p:cNvSpPr txBox="1"/>
           <p:nvPr userDrawn="1"/>
         </p:nvSpPr>
@@ -9137,7 +9275,7 @@
       </p:sp>
       <p:pic>
         <p:nvPicPr>
-          <p:cNvPr id="1937861872" name="Grafik 8"/>
+          <p:cNvPr id="1647372671" name="Grafik 8"/>
           <p:cNvPicPr>
             <a:picLocks noChangeAspect="1"/>
           </p:cNvPicPr>
@@ -9165,7 +9303,7 @@
       </p:pic>
       <p:sp>
         <p:nvSpPr>
-          <p:cNvPr id="841338837" name="Bildplatzhalter 9"/>
+          <p:cNvPr id="1717557492" name="Bildplatzhalter 9"/>
           <p:cNvSpPr>
             <a:spLocks noGrp="1"/>
           </p:cNvSpPr>
@@ -9230,7 +9368,7 @@
       </p:sp>
       <p:sp>
         <p:nvSpPr>
-          <p:cNvPr id="782880524" name="Bildplatzhalter 9"/>
+          <p:cNvPr id="245088426" name="Bildplatzhalter 9"/>
           <p:cNvSpPr>
             <a:spLocks noGrp="1"/>
           </p:cNvSpPr>
@@ -9327,7 +9465,7 @@
       </p:grpSpPr>
       <p:sp>
         <p:nvSpPr>
-          <p:cNvPr id="1955546747" name="Subtitle 2"/>
+          <p:cNvPr id="481120050" name="Subtitle 2"/>
           <p:cNvSpPr>
             <a:spLocks noGrp="1"/>
           </p:cNvSpPr>
@@ -9407,7 +9545,7 @@
       </p:sp>
       <p:sp>
         <p:nvSpPr>
-          <p:cNvPr id="674672304" name="Titel 5"/>
+          <p:cNvPr id="1276653363" name="Titel 5"/>
           <p:cNvSpPr>
             <a:spLocks noGrp="1"/>
           </p:cNvSpPr>
@@ -9453,7 +9591,7 @@
       </p:sp>
       <p:sp>
         <p:nvSpPr>
-          <p:cNvPr id="1175752308" name="Textfeld 6"/>
+          <p:cNvPr id="251781912" name="Textfeld 6"/>
           <p:cNvSpPr txBox="1"/>
           <p:nvPr userDrawn="1"/>
         </p:nvSpPr>
@@ -9562,7 +9700,7 @@
       </p:sp>
       <p:sp>
         <p:nvSpPr>
-          <p:cNvPr id="1010547925" name="Bildplatzhalter 9"/>
+          <p:cNvPr id="1988229310" name="Bildplatzhalter 9"/>
           <p:cNvSpPr>
             <a:spLocks noGrp="1"/>
           </p:cNvSpPr>
@@ -9631,7 +9769,7 @@
       </p:sp>
       <p:sp>
         <p:nvSpPr>
-          <p:cNvPr id="29591340" name="Bildplatzhalter 9"/>
+          <p:cNvPr id="1632448651" name="Bildplatzhalter 9"/>
           <p:cNvSpPr>
             <a:spLocks noGrp="1"/>
           </p:cNvSpPr>
@@ -9700,7 +9838,7 @@
       </p:sp>
       <p:pic>
         <p:nvPicPr>
-          <p:cNvPr id="2009233119" name="Grafik 17"/>
+          <p:cNvPr id="1457937164" name="Grafik 17"/>
           <p:cNvPicPr>
             <a:picLocks noChangeAspect="1"/>
           </p:cNvPicPr>
@@ -9728,7 +9866,7 @@
       </p:pic>
       <p:pic>
         <p:nvPicPr>
-          <p:cNvPr id="1544365407" name="Grafik 18"/>
+          <p:cNvPr id="1889934115" name="Grafik 18"/>
           <p:cNvPicPr>
             <a:picLocks noChangeAspect="1"/>
           </p:cNvPicPr>
@@ -9775,7 +9913,7 @@
       </p:grpSpPr>
       <p:sp>
         <p:nvSpPr>
-          <p:cNvPr id="1704510907" name="Subtitle 2"/>
+          <p:cNvPr id="2092810028" name="Subtitle 2"/>
           <p:cNvSpPr>
             <a:spLocks noGrp="1"/>
           </p:cNvSpPr>
@@ -9855,7 +9993,7 @@
       </p:sp>
       <p:sp>
         <p:nvSpPr>
-          <p:cNvPr id="1998529372" name="Titel 5"/>
+          <p:cNvPr id="1157473201" name="Titel 5"/>
           <p:cNvSpPr>
             <a:spLocks noGrp="1"/>
           </p:cNvSpPr>
@@ -9901,7 +10039,7 @@
       </p:sp>
       <p:pic>
         <p:nvPicPr>
-          <p:cNvPr id="1994950439" name="Grafik 12"/>
+          <p:cNvPr id="340160932" name="Grafik 12"/>
           <p:cNvPicPr>
             <a:picLocks noChangeAspect="1"/>
           </p:cNvPicPr>
@@ -9924,7 +10062,7 @@
       </p:pic>
       <p:sp>
         <p:nvSpPr>
-          <p:cNvPr id="953599393" name="Datumsplatzhalter 10"/>
+          <p:cNvPr id="41643179" name="Datumsplatzhalter 10"/>
           <p:cNvSpPr>
             <a:spLocks noGrp="1"/>
           </p:cNvSpPr>
@@ -9950,7 +10088,7 @@
       </p:sp>
       <p:sp>
         <p:nvSpPr>
-          <p:cNvPr id="288154019" name="Fußzeilenplatzhalter 13"/>
+          <p:cNvPr id="1732239392" name="Fußzeilenplatzhalter 13"/>
           <p:cNvSpPr>
             <a:spLocks noGrp="1"/>
           </p:cNvSpPr>
@@ -9976,7 +10114,7 @@
       </p:sp>
       <p:sp>
         <p:nvSpPr>
-          <p:cNvPr id="1500168049" name="Foliennummernplatzhalter 14"/>
+          <p:cNvPr id="842426897" name="Foliennummernplatzhalter 14"/>
           <p:cNvSpPr>
             <a:spLocks noGrp="1"/>
           </p:cNvSpPr>
@@ -10027,7 +10165,7 @@
       </p:grpSpPr>
       <p:sp>
         <p:nvSpPr>
-          <p:cNvPr id="1313845528" name="Rechteck 1"/>
+          <p:cNvPr id="1569798763" name="Rechteck 1"/>
           <p:cNvSpPr/>
           <p:nvPr userDrawn="1"/>
         </p:nvSpPr>
@@ -10075,7 +10213,7 @@
       </p:sp>
       <p:sp>
         <p:nvSpPr>
-          <p:cNvPr id="2145392111" name="Subtitle 2"/>
+          <p:cNvPr id="1512780858" name="Subtitle 2"/>
           <p:cNvSpPr>
             <a:spLocks noGrp="1"/>
           </p:cNvSpPr>
@@ -10155,7 +10293,7 @@
       </p:sp>
       <p:sp>
         <p:nvSpPr>
-          <p:cNvPr id="921393480" name="Titel 5"/>
+          <p:cNvPr id="1900230537" name="Titel 5"/>
           <p:cNvSpPr>
             <a:spLocks noGrp="1"/>
           </p:cNvSpPr>
@@ -10201,7 +10339,7 @@
       </p:sp>
       <p:pic>
         <p:nvPicPr>
-          <p:cNvPr id="1517529860" name="Grafik 17"/>
+          <p:cNvPr id="148003161" name="Grafik 17"/>
           <p:cNvPicPr>
             <a:picLocks noChangeAspect="1"/>
           </p:cNvPicPr>
@@ -10223,7 +10361,7 @@
       </p:pic>
       <p:sp>
         <p:nvSpPr>
-          <p:cNvPr id="728154513" name="Datumsplatzhalter 12"/>
+          <p:cNvPr id="868098702" name="Datumsplatzhalter 12"/>
           <p:cNvSpPr>
             <a:spLocks noGrp="1"/>
           </p:cNvSpPr>
@@ -10249,7 +10387,7 @@
       </p:sp>
       <p:sp>
         <p:nvSpPr>
-          <p:cNvPr id="1493631445" name="Fußzeilenplatzhalter 19"/>
+          <p:cNvPr id="719496647" name="Fußzeilenplatzhalter 19"/>
           <p:cNvSpPr>
             <a:spLocks noGrp="1"/>
           </p:cNvSpPr>
@@ -10275,7 +10413,7 @@
       </p:sp>
       <p:sp>
         <p:nvSpPr>
-          <p:cNvPr id="1367486441" name="Foliennummernplatzhalter 20"/>
+          <p:cNvPr id="920716807" name="Foliennummernplatzhalter 20"/>
           <p:cNvSpPr>
             <a:spLocks noGrp="1"/>
           </p:cNvSpPr>
@@ -10326,7 +10464,7 @@
       </p:grpSpPr>
       <p:sp>
         <p:nvSpPr>
-          <p:cNvPr id="1375658496" name="Bildplatzhalter 6"/>
+          <p:cNvPr id="2101168607" name="Bildplatzhalter 6"/>
           <p:cNvSpPr>
             <a:spLocks noGrp="1"/>
           </p:cNvSpPr>
@@ -10385,7 +10523,7 @@
       </p:sp>
       <p:sp>
         <p:nvSpPr>
-          <p:cNvPr id="834202622" name="Bildplatzhalter 6"/>
+          <p:cNvPr id="1554228659" name="Bildplatzhalter 6"/>
           <p:cNvSpPr>
             <a:spLocks noGrp="1"/>
           </p:cNvSpPr>
@@ -10444,7 +10582,7 @@
       </p:sp>
       <p:sp>
         <p:nvSpPr>
-          <p:cNvPr id="1469005993" name="Bildplatzhalter 6"/>
+          <p:cNvPr id="2113080482" name="Bildplatzhalter 6"/>
           <p:cNvSpPr>
             <a:spLocks noGrp="1"/>
           </p:cNvSpPr>
@@ -10503,7 +10641,7 @@
       </p:sp>
       <p:sp>
         <p:nvSpPr>
-          <p:cNvPr id="919400155" name="Titel 2"/>
+          <p:cNvPr id="513988281" name="Titel 2"/>
           <p:cNvSpPr>
             <a:spLocks noGrp="1"/>
           </p:cNvSpPr>
@@ -10533,7 +10671,7 @@
       </p:sp>
       <p:sp>
         <p:nvSpPr>
-          <p:cNvPr id="1814192562" name="Bildplatzhalter 6"/>
+          <p:cNvPr id="1731839737" name="Bildplatzhalter 6"/>
           <p:cNvSpPr>
             <a:spLocks noGrp="1"/>
           </p:cNvSpPr>
@@ -10592,7 +10730,7 @@
       </p:sp>
       <p:sp>
         <p:nvSpPr>
-          <p:cNvPr id="2068611384" name="Bildplatzhalter 6"/>
+          <p:cNvPr id="42020303" name="Bildplatzhalter 6"/>
           <p:cNvSpPr>
             <a:spLocks noGrp="1"/>
           </p:cNvSpPr>
@@ -10651,7 +10789,7 @@
       </p:sp>
       <p:sp>
         <p:nvSpPr>
-          <p:cNvPr id="147722426" name="Bildplatzhalter 6"/>
+          <p:cNvPr id="529081318" name="Bildplatzhalter 6"/>
           <p:cNvSpPr>
             <a:spLocks noGrp="1"/>
           </p:cNvSpPr>
@@ -10710,7 +10848,7 @@
       </p:sp>
       <p:sp>
         <p:nvSpPr>
-          <p:cNvPr id="1949016258" name="Bildplatzhalter 6"/>
+          <p:cNvPr id="224598879" name="Bildplatzhalter 6"/>
           <p:cNvSpPr>
             <a:spLocks noGrp="1"/>
           </p:cNvSpPr>
@@ -10769,7 +10907,7 @@
       </p:sp>
       <p:sp>
         <p:nvSpPr>
-          <p:cNvPr id="894644153" name="Bildplatzhalter 6"/>
+          <p:cNvPr id="465941426" name="Bildplatzhalter 6"/>
           <p:cNvSpPr>
             <a:spLocks noGrp="1"/>
           </p:cNvSpPr>
@@ -10828,7 +10966,7 @@
       </p:sp>
       <p:sp>
         <p:nvSpPr>
-          <p:cNvPr id="2002971164" name="Bildplatzhalter 6"/>
+          <p:cNvPr id="1573655507" name="Bildplatzhalter 6"/>
           <p:cNvSpPr>
             <a:spLocks noGrp="1"/>
           </p:cNvSpPr>
@@ -10887,7 +11025,7 @@
       </p:sp>
       <p:sp>
         <p:nvSpPr>
-          <p:cNvPr id="1444471677" name="Datumsplatzhalter 29"/>
+          <p:cNvPr id="236490991" name="Datumsplatzhalter 29"/>
           <p:cNvSpPr>
             <a:spLocks noGrp="1"/>
           </p:cNvSpPr>
@@ -10913,7 +11051,7 @@
       </p:sp>
       <p:sp>
         <p:nvSpPr>
-          <p:cNvPr id="266178146" name="Fußzeilenplatzhalter 30"/>
+          <p:cNvPr id="1579503069" name="Fußzeilenplatzhalter 30"/>
           <p:cNvSpPr>
             <a:spLocks noGrp="1"/>
           </p:cNvSpPr>
@@ -10939,7 +11077,7 @@
       </p:sp>
       <p:sp>
         <p:nvSpPr>
-          <p:cNvPr id="451960051" name="Foliennummernplatzhalter 31"/>
+          <p:cNvPr id="1376693132" name="Foliennummernplatzhalter 31"/>
           <p:cNvSpPr>
             <a:spLocks noGrp="1"/>
           </p:cNvSpPr>
@@ -10990,7 +11128,7 @@
       </p:grpSpPr>
       <p:sp>
         <p:nvSpPr>
-          <p:cNvPr id="467776334" name="Textplatzhalter 8"/>
+          <p:cNvPr id="822178319" name="Textplatzhalter 8"/>
           <p:cNvSpPr>
             <a:spLocks noGrp="1"/>
           </p:cNvSpPr>
@@ -11195,7 +11333,7 @@
       </p:sp>
       <p:sp>
         <p:nvSpPr>
-          <p:cNvPr id="423490355" name="Datumsplatzhalter 1"/>
+          <p:cNvPr id="147974793" name="Datumsplatzhalter 1"/>
           <p:cNvSpPr>
             <a:spLocks noGrp="1"/>
           </p:cNvSpPr>
@@ -11221,7 +11359,7 @@
       </p:sp>
       <p:sp>
         <p:nvSpPr>
-          <p:cNvPr id="983599052" name="Fußzeilenplatzhalter 2"/>
+          <p:cNvPr id="1611426897" name="Fußzeilenplatzhalter 2"/>
           <p:cNvSpPr>
             <a:spLocks noGrp="1"/>
           </p:cNvSpPr>
@@ -11247,7 +11385,7 @@
       </p:sp>
       <p:sp>
         <p:nvSpPr>
-          <p:cNvPr id="9254189" name="Foliennummernplatzhalter 3"/>
+          <p:cNvPr id="1669073873" name="Foliennummernplatzhalter 3"/>
           <p:cNvSpPr>
             <a:spLocks noGrp="1"/>
           </p:cNvSpPr>
@@ -11298,7 +11436,7 @@
       </p:grpSpPr>
       <p:sp>
         <p:nvSpPr>
-          <p:cNvPr id="253297227" name="Bildplatzhalter 6"/>
+          <p:cNvPr id="574493551" name="Bildplatzhalter 6"/>
           <p:cNvSpPr>
             <a:spLocks noGrp="1"/>
           </p:cNvSpPr>
@@ -11337,7 +11475,7 @@
       </p:sp>
       <p:sp>
         <p:nvSpPr>
-          <p:cNvPr id="75666304" name="Titel 4"/>
+          <p:cNvPr id="1912627656" name="Titel 4"/>
           <p:cNvSpPr>
             <a:spLocks noGrp="1"/>
           </p:cNvSpPr>
@@ -11374,7 +11512,7 @@
       </p:sp>
       <p:sp>
         <p:nvSpPr>
-          <p:cNvPr id="1931082307" name="Datumsplatzhalter 5"/>
+          <p:cNvPr id="877468327" name="Datumsplatzhalter 5"/>
           <p:cNvSpPr>
             <a:spLocks noGrp="1"/>
           </p:cNvSpPr>
@@ -11400,7 +11538,7 @@
       </p:sp>
       <p:sp>
         <p:nvSpPr>
-          <p:cNvPr id="992914886" name="Fußzeilenplatzhalter 7"/>
+          <p:cNvPr id="688308006" name="Fußzeilenplatzhalter 7"/>
           <p:cNvSpPr>
             <a:spLocks noGrp="1"/>
           </p:cNvSpPr>
@@ -11426,7 +11564,7 @@
       </p:sp>
       <p:sp>
         <p:nvSpPr>
-          <p:cNvPr id="1177724187" name="Foliennummernplatzhalter 8"/>
+          <p:cNvPr id="1170628839" name="Foliennummernplatzhalter 8"/>
           <p:cNvSpPr>
             <a:spLocks noGrp="1"/>
           </p:cNvSpPr>
@@ -11482,7 +11620,7 @@
       </p:grpSpPr>
       <p:sp>
         <p:nvSpPr>
-          <p:cNvPr id="96026984" name="Title Placeholder 1"/>
+          <p:cNvPr id="143562111" name="Title Placeholder 1"/>
           <p:cNvSpPr>
             <a:spLocks noGrp="1"/>
           </p:cNvSpPr>
@@ -11522,7 +11660,7 @@
       </p:sp>
       <p:sp>
         <p:nvSpPr>
-          <p:cNvPr id="1502503466" name="Date Placeholder 3"/>
+          <p:cNvPr id="153531019" name="Date Placeholder 3"/>
           <p:cNvSpPr>
             <a:spLocks noGrp="1"/>
           </p:cNvSpPr>
@@ -11565,7 +11703,7 @@
       </p:sp>
       <p:sp>
         <p:nvSpPr>
-          <p:cNvPr id="469767684" name="Footer Placeholder 4"/>
+          <p:cNvPr id="1056806213" name="Footer Placeholder 4"/>
           <p:cNvSpPr>
             <a:spLocks noGrp="1"/>
           </p:cNvSpPr>
@@ -11608,7 +11746,7 @@
       </p:sp>
       <p:sp>
         <p:nvSpPr>
-          <p:cNvPr id="1396711876" name="Slide Number Placeholder 5"/>
+          <p:cNvPr id="713888252" name="Slide Number Placeholder 5"/>
           <p:cNvSpPr>
             <a:spLocks noGrp="1"/>
           </p:cNvSpPr>
@@ -11651,7 +11789,7 @@
       </p:sp>
       <p:pic>
         <p:nvPicPr>
-          <p:cNvPr id="177967180" name="Grafik 29"/>
+          <p:cNvPr id="1523053944" name="Grafik 29"/>
           <p:cNvPicPr>
             <a:picLocks noChangeAspect="1"/>
           </p:cNvPicPr>
@@ -11679,7 +11817,7 @@
       </p:pic>
       <p:sp>
         <p:nvSpPr>
-          <p:cNvPr id="624280052" name="Textplatzhalter 32"/>
+          <p:cNvPr id="137541091" name="Textplatzhalter 32"/>
           <p:cNvSpPr>
             <a:spLocks noGrp="1"/>
           </p:cNvSpPr>
@@ -12099,7 +12237,7 @@
       </p:grpSpPr>
       <p:sp>
         <p:nvSpPr>
-          <p:cNvPr id="1205400820" name="Untertitel 2"/>
+          <p:cNvPr id="578226537" name="Untertitel 2"/>
           <p:cNvSpPr>
             <a:spLocks noGrp="1"/>
           </p:cNvSpPr>
@@ -12154,7 +12292,7 @@
       </p:sp>
       <p:sp>
         <p:nvSpPr>
-          <p:cNvPr id="531003477" name="Titel 1"/>
+          <p:cNvPr id="1854562118" name="Titel 1"/>
           <p:cNvSpPr>
             <a:spLocks noGrp="1"/>
           </p:cNvSpPr>
@@ -12281,7 +12419,7 @@
       </p:sp>
       <p:sp>
         <p:nvSpPr>
-          <p:cNvPr id="778259213" name="Bildplatzhalter 5"/>
+          <p:cNvPr id="6531163" name="Bildplatzhalter 5"/>
           <p:cNvSpPr>
             <a:spLocks noGrp="1"/>
           </p:cNvSpPr>
@@ -12293,7 +12431,7 @@
       </p:sp>
       <p:sp>
         <p:nvSpPr>
-          <p:cNvPr id="830952618" name="Bildplatzhalter 6"/>
+          <p:cNvPr id="1423522186" name="Bildplatzhalter 6"/>
           <p:cNvSpPr>
             <a:spLocks noGrp="1"/>
           </p:cNvSpPr>
@@ -12338,7 +12476,7 @@
       </p:grpSpPr>
       <p:sp>
         <p:nvSpPr>
-          <p:cNvPr id="2024849092" name="Titel 1"/>
+          <p:cNvPr id="1534485882" name="Titel 1"/>
           <p:cNvSpPr>
             <a:spLocks noGrp="1"/>
           </p:cNvSpPr>
@@ -12371,7 +12509,7 @@
       </p:sp>
       <p:sp>
         <p:nvSpPr>
-          <p:cNvPr id="1195947966" name="Inhaltsplatzhalter 2"/>
+          <p:cNvPr id="1486669349" name="Inhaltsplatzhalter 2"/>
           <p:cNvSpPr>
             <a:spLocks noGrp="1"/>
           </p:cNvSpPr>
@@ -12634,7 +12772,7 @@
       </p:grpSpPr>
       <p:sp>
         <p:nvSpPr>
-          <p:cNvPr id="2143375099" name="Subtitle 2"/>
+          <p:cNvPr id="1386530612" name="Subtitle 2"/>
           <p:cNvSpPr>
             <a:spLocks noGrp="1"/>
           </p:cNvSpPr>
@@ -12708,7 +12846,7 @@
       </p:sp>
       <p:sp>
         <p:nvSpPr>
-          <p:cNvPr id="1691325625" name="Titel 5"/>
+          <p:cNvPr id="392402912" name="Titel 5"/>
           <p:cNvSpPr>
             <a:spLocks noGrp="1"/>
           </p:cNvSpPr>
@@ -12764,7 +12902,7 @@
       </p:sp>
       <p:sp>
         <p:nvSpPr>
-          <p:cNvPr id="211506353" name="Bildplatzhalter 9"/>
+          <p:cNvPr id="347102243" name="Bildplatzhalter 9"/>
           <p:cNvSpPr>
             <a:spLocks noGrp="1"/>
           </p:cNvSpPr>
@@ -12803,7 +12941,7 @@
       </p:sp>
       <p:sp>
         <p:nvSpPr>
-          <p:cNvPr id="1868866633" name="Bildplatzhalter 9"/>
+          <p:cNvPr id="1569114998" name="Bildplatzhalter 9"/>
           <p:cNvSpPr>
             <a:spLocks noGrp="1"/>
           </p:cNvSpPr>
@@ -12875,7 +13013,7 @@
       </p:grpSpPr>
       <p:sp>
         <p:nvSpPr>
-          <p:cNvPr id="1166375363" name="Titel 1"/>
+          <p:cNvPr id="1911083475" name="Titel 1"/>
           <p:cNvSpPr>
             <a:spLocks noGrp="1"/>
           </p:cNvSpPr>
@@ -12908,7 +13046,7 @@
       </p:sp>
       <p:sp>
         <p:nvSpPr>
-          <p:cNvPr id="1564364481" name="Inhaltsplatzhalter 2"/>
+          <p:cNvPr id="2134545538" name="Inhaltsplatzhalter 2"/>
           <p:cNvSpPr>
             <a:spLocks noGrp="1"/>
           </p:cNvSpPr>
@@ -13091,7 +13229,7 @@
       </p:grpSpPr>
       <p:sp>
         <p:nvSpPr>
-          <p:cNvPr id="1160785537" name="Titel 1"/>
+          <p:cNvPr id="1220686158" name="Titel 1"/>
           <p:cNvSpPr>
             <a:spLocks noGrp="1"/>
           </p:cNvSpPr>
@@ -13124,7 +13262,7 @@
       </p:sp>
       <p:pic>
         <p:nvPicPr>
-          <p:cNvPr id="479874678" name=""/>
+          <p:cNvPr id="1942005057" name=""/>
           <p:cNvPicPr>
             <a:picLocks noChangeAspect="1"/>
           </p:cNvPicPr>
@@ -13146,7 +13284,7 @@
       </p:pic>
       <p:sp>
         <p:nvSpPr>
-          <p:cNvPr id="10109362" name=""/>
+          <p:cNvPr id="1694591579" name=""/>
           <p:cNvSpPr/>
           <p:nvPr/>
         </p:nvSpPr>
@@ -13186,7 +13324,7 @@
       </p:sp>
       <p:sp>
         <p:nvSpPr>
-          <p:cNvPr id="1480379180" name=""/>
+          <p:cNvPr id="225523815" name=""/>
           <p:cNvSpPr/>
           <p:nvPr/>
         </p:nvSpPr>
@@ -13226,7 +13364,7 @@
       </p:sp>
       <p:sp>
         <p:nvSpPr>
-          <p:cNvPr id="1574231387" name=""/>
+          <p:cNvPr id="164917868" name=""/>
           <p:cNvSpPr/>
           <p:nvPr/>
         </p:nvSpPr>
@@ -13266,7 +13404,7 @@
       </p:sp>
       <p:sp>
         <p:nvSpPr>
-          <p:cNvPr id="442591314" name=""/>
+          <p:cNvPr id="1922821447" name=""/>
           <p:cNvSpPr/>
           <p:nvPr/>
         </p:nvSpPr>
@@ -13306,7 +13444,7 @@
       </p:sp>
       <p:sp>
         <p:nvSpPr>
-          <p:cNvPr id="1604105714" name=""/>
+          <p:cNvPr id="630846177" name=""/>
           <p:cNvSpPr/>
           <p:nvPr/>
         </p:nvSpPr>
@@ -13346,7 +13484,7 @@
       </p:sp>
       <p:sp>
         <p:nvSpPr>
-          <p:cNvPr id="1334741876" name=""/>
+          <p:cNvPr id="275508372" name=""/>
           <p:cNvSpPr/>
           <p:nvPr/>
         </p:nvSpPr>
@@ -13386,7 +13524,7 @@
       </p:sp>
       <p:sp>
         <p:nvSpPr>
-          <p:cNvPr id="1703915670" name=""/>
+          <p:cNvPr id="1398734512" name=""/>
           <p:cNvSpPr/>
           <p:nvPr/>
         </p:nvSpPr>
@@ -13426,10 +13564,10 @@
       </p:sp>
       <p:cxnSp>
         <p:nvCxnSpPr>
-          <p:cNvPr id="735606781" name=""/>
+          <p:cNvPr id="1023865084" name=""/>
           <p:cNvCxnSpPr>
-            <a:stCxn id="1281955215" idx="3"/>
-            <a:endCxn id="10109362" idx="2"/>
+            <a:stCxn id="1791928106" idx="3"/>
+            <a:endCxn id="1694591579" idx="2"/>
           </p:cNvCxnSpPr>
           <p:nvPr/>
         </p:nvCxnSpPr>
@@ -13464,7 +13602,7 @@
       </p:cxnSp>
       <p:sp>
         <p:nvSpPr>
-          <p:cNvPr id="1281955215" name=""/>
+          <p:cNvPr id="1791928106" name=""/>
           <p:cNvSpPr/>
           <p:nvPr/>
         </p:nvSpPr>
@@ -13525,7 +13663,7 @@
       </p:sp>
       <p:sp>
         <p:nvSpPr>
-          <p:cNvPr id="821187120" name=""/>
+          <p:cNvPr id="1174482061" name=""/>
           <p:cNvSpPr/>
           <p:nvPr/>
         </p:nvSpPr>
@@ -13619,7 +13757,7 @@
       </p:grpSpPr>
       <p:sp>
         <p:nvSpPr>
-          <p:cNvPr id="2144889844" name="Titel 1"/>
+          <p:cNvPr id="1435711818" name="Titel 1"/>
           <p:cNvSpPr>
             <a:spLocks noGrp="1"/>
           </p:cNvSpPr>
@@ -13652,7 +13790,7 @@
       </p:sp>
       <p:pic>
         <p:nvPicPr>
-          <p:cNvPr id="1690956701" name=""/>
+          <p:cNvPr id="310762148" name=""/>
           <p:cNvPicPr>
             <a:picLocks noChangeAspect="1"/>
           </p:cNvPicPr>
@@ -13707,7 +13845,7 @@
       </p:grpSpPr>
       <p:sp>
         <p:nvSpPr>
-          <p:cNvPr id="2071397143" name="Titel 1"/>
+          <p:cNvPr id="1933584986" name="Titel 1"/>
           <p:cNvSpPr>
             <a:spLocks noGrp="1"/>
           </p:cNvSpPr>
@@ -13751,7 +13889,7 @@
       </p:sp>
       <p:sp>
         <p:nvSpPr>
-          <p:cNvPr id="890033131" name="Inhaltsplatzhalter 2"/>
+          <p:cNvPr id="1015647328" name="Inhaltsplatzhalter 2"/>
           <p:cNvSpPr>
             <a:spLocks noGrp="1"/>
           </p:cNvSpPr>
@@ -14056,7 +14194,7 @@
       </p:grpSpPr>
       <p:sp>
         <p:nvSpPr>
-          <p:cNvPr id="913953729" name="Titel 1"/>
+          <p:cNvPr id="1633099389" name="Titel 1"/>
           <p:cNvSpPr>
             <a:spLocks noGrp="1"/>
           </p:cNvSpPr>
@@ -14100,7 +14238,7 @@
       </p:sp>
       <p:pic>
         <p:nvPicPr>
-          <p:cNvPr id="752450978" name=""/>
+          <p:cNvPr id="1045526860" name=""/>
           <p:cNvPicPr>
             <a:picLocks noChangeAspect="1"/>
           </p:cNvPicPr>
@@ -14155,7 +14293,7 @@
       </p:grpSpPr>
       <p:sp>
         <p:nvSpPr>
-          <p:cNvPr id="1956610864" name="Titel 1"/>
+          <p:cNvPr id="432585118" name="Titel 1"/>
           <p:cNvSpPr>
             <a:spLocks noGrp="1"/>
           </p:cNvSpPr>
@@ -14210,7 +14348,7 @@
       </p:sp>
       <p:sp>
         <p:nvSpPr>
-          <p:cNvPr id="1023061635" name="Inhaltsplatzhalter 2"/>
+          <p:cNvPr id="436367951" name="Inhaltsplatzhalter 2"/>
           <p:cNvSpPr>
             <a:spLocks noGrp="1"/>
           </p:cNvSpPr>
@@ -14369,7 +14507,7 @@
       </p:grpSpPr>
       <p:sp>
         <p:nvSpPr>
-          <p:cNvPr id="938248875" name="Titel 1"/>
+          <p:cNvPr id="1609417897" name="Titel 1"/>
           <p:cNvSpPr>
             <a:spLocks noGrp="1"/>
           </p:cNvSpPr>
@@ -14424,7 +14562,7 @@
       </p:sp>
       <p:pic>
         <p:nvPicPr>
-          <p:cNvPr id="775235331" name=""/>
+          <p:cNvPr id="2047928457" name=""/>
           <p:cNvPicPr>
             <a:picLocks noChangeAspect="1"/>
           </p:cNvPicPr>
@@ -14479,7 +14617,7 @@
       </p:grpSpPr>
       <p:sp>
         <p:nvSpPr>
-          <p:cNvPr id="41230208" name="Subtitle 2"/>
+          <p:cNvPr id="1313845089" name="Subtitle 2"/>
           <p:cNvSpPr>
             <a:spLocks noGrp="1"/>
           </p:cNvSpPr>
@@ -14553,7 +14691,7 @@
       </p:sp>
       <p:sp>
         <p:nvSpPr>
-          <p:cNvPr id="1584263733" name="Titel 5"/>
+          <p:cNvPr id="162731386" name="Titel 5"/>
           <p:cNvSpPr>
             <a:spLocks noGrp="1"/>
           </p:cNvSpPr>
@@ -14609,7 +14747,7 @@
       </p:sp>
       <p:sp>
         <p:nvSpPr>
-          <p:cNvPr id="1790453144" name="Bildplatzhalter 9"/>
+          <p:cNvPr id="916693882" name="Bildplatzhalter 9"/>
           <p:cNvSpPr>
             <a:spLocks noGrp="1"/>
           </p:cNvSpPr>
@@ -14648,7 +14786,7 @@
       </p:sp>
       <p:sp>
         <p:nvSpPr>
-          <p:cNvPr id="356129669" name="Bildplatzhalter 9"/>
+          <p:cNvPr id="1725953201" name="Bildplatzhalter 9"/>
           <p:cNvSpPr>
             <a:spLocks noGrp="1"/>
           </p:cNvSpPr>
@@ -14720,7 +14858,7 @@
       </p:grpSpPr>
       <p:sp>
         <p:nvSpPr>
-          <p:cNvPr id="1442177956" name="TextBox 2"/>
+          <p:cNvPr id="1548632239" name="TextBox 2"/>
           <p:cNvSpPr txBox="1"/>
           <p:nvPr/>
         </p:nvSpPr>
@@ -14766,7 +14904,7 @@
       </p:sp>
       <p:grpSp>
         <p:nvGrpSpPr>
-          <p:cNvPr id="1378608552" name=""/>
+          <p:cNvPr id="107856588" name=""/>
           <p:cNvGrpSpPr/>
           <p:nvPr/>
         </p:nvGrpSpPr>
@@ -15206,7 +15344,7 @@
       </p:grpSpPr>
       <p:sp>
         <p:nvSpPr>
-          <p:cNvPr id="1205746503" name="Titel 1"/>
+          <p:cNvPr id="1773832652" name="Titel 1"/>
           <p:cNvSpPr>
             <a:spLocks noGrp="1"/>
           </p:cNvSpPr>
@@ -15239,7 +15377,7 @@
       </p:sp>
       <p:sp>
         <p:nvSpPr>
-          <p:cNvPr id="970395010" name="Inhaltsplatzhalter 2"/>
+          <p:cNvPr id="1471036777" name="Inhaltsplatzhalter 2"/>
           <p:cNvSpPr>
             <a:spLocks noGrp="1"/>
           </p:cNvSpPr>
@@ -15257,17 +15395,29 @@
             <a:pPr>
               <a:defRPr/>
             </a:pPr>
-            <a:endParaRPr>
+            <a:endParaRPr sz="2500">
               <a:latin typeface="Arial"/>
               <a:cs typeface="Arial"/>
             </a:endParaRPr>
           </a:p>
           <a:p>
-            <a:pPr>
-              <a:defRPr/>
-            </a:pPr>
-            <a:r>
-              <a:rPr lang="en-US" sz="2700" b="0" i="0" u="none" strike="noStrike" cap="none" spc="0">
+            <a:pPr marL="216000" marR="0" indent="-216000" algn="l">
+              <a:lnSpc>
+                <a:spcPct val="102000"/>
+              </a:lnSpc>
+              <a:spcBef>
+                <a:spcPts val="799"/>
+              </a:spcBef>
+              <a:spcAft>
+                <a:spcPts val="0"/>
+              </a:spcAft>
+              <a:buSzPct val="120000"/>
+              <a:buFont typeface="Arial"/>
+              <a:buChar char="•"/>
+              <a:defRPr/>
+            </a:pPr>
+            <a:r>
+              <a:rPr lang="en-US" sz="2500" b="0" i="0" u="none" strike="noStrike" cap="none" spc="0">
                 <a:solidFill>
                   <a:srgbClr val="262626"/>
                 </a:solidFill>
@@ -15275,29 +15425,9 @@
                 <a:ea typeface="Arial"/>
                 <a:cs typeface="Arial"/>
               </a:rPr>
-              <a:t>Who defines sustainable AI? What are the consequences?</a:t>
-            </a:r>
-            <a:endParaRPr>
-              <a:latin typeface="Arial"/>
-              <a:cs typeface="Arial"/>
-            </a:endParaRPr>
-          </a:p>
-          <a:p>
-            <a:pPr lvl="0">
-              <a:defRPr/>
-            </a:pPr>
-            <a:r>
-              <a:rPr lang="en-US" sz="2800" b="0" i="0" u="none" strike="noStrike" cap="none" spc="0">
-                <a:solidFill>
-                  <a:srgbClr val="262626"/>
-                </a:solidFill>
-                <a:latin typeface="Arial"/>
-                <a:ea typeface="Arial"/>
-                <a:cs typeface="Arial"/>
-              </a:rPr>
-              <a:t>Need for broader inclusion, especially environmental perspectives</a:t>
-            </a:r>
-            <a:endParaRPr sz="2800" b="0" i="0" u="none" strike="noStrike" cap="none" spc="0">
+              <a:t>Network position shapes discourse</a:t>
+            </a:r>
+            <a:endParaRPr sz="2500" b="0" i="0" u="none" strike="noStrike" cap="none" spc="0">
               <a:solidFill>
                 <a:srgbClr val="262626"/>
               </a:solidFill>
@@ -15306,11 +15436,23 @@
             </a:endParaRPr>
           </a:p>
           <a:p>
-            <a:pPr lvl="0">
-              <a:defRPr/>
-            </a:pPr>
-            <a:r>
-              <a:rPr lang="en-US" sz="2800" b="0" i="0" u="none" strike="noStrike" cap="none" spc="0">
+            <a:pPr marL="216000" marR="0" indent="-216000" algn="l">
+              <a:lnSpc>
+                <a:spcPct val="102000"/>
+              </a:lnSpc>
+              <a:spcBef>
+                <a:spcPts val="799"/>
+              </a:spcBef>
+              <a:spcAft>
+                <a:spcPts val="0"/>
+              </a:spcAft>
+              <a:buSzPct val="120000"/>
+              <a:buFont typeface="Arial"/>
+              <a:buChar char="•"/>
+              <a:defRPr/>
+            </a:pPr>
+            <a:r>
+              <a:rPr lang="en-US" sz="2500" b="0" i="0" u="none" strike="noStrike" cap="none" spc="0">
                 <a:solidFill>
                   <a:srgbClr val="262626"/>
                 </a:solidFill>
@@ -15318,9 +15460,9 @@
                 <a:ea typeface="Arial"/>
                 <a:cs typeface="Arial"/>
               </a:rPr>
-              <a:t>Power asymmetries favor industry actors</a:t>
-            </a:r>
-            <a:endParaRPr sz="2800" b="0" i="0" u="none" strike="noStrike" cap="none" spc="0">
+              <a:t>Incumbents dominate core, market-oriented logic</a:t>
+            </a:r>
+            <a:endParaRPr sz="2500" b="0" i="0" u="none" strike="noStrike" cap="none" spc="0">
               <a:solidFill>
                 <a:srgbClr val="262626"/>
               </a:solidFill>
@@ -15329,11 +15471,23 @@
             </a:endParaRPr>
           </a:p>
           <a:p>
-            <a:pPr lvl="0">
-              <a:defRPr/>
-            </a:pPr>
-            <a:r>
-              <a:rPr lang="en-US" sz="2800" b="0" i="0" u="none" strike="noStrike" cap="none" spc="0">
+            <a:pPr marL="216000" marR="0" indent="-216000" algn="l">
+              <a:lnSpc>
+                <a:spcPct val="102000"/>
+              </a:lnSpc>
+              <a:spcBef>
+                <a:spcPts val="799"/>
+              </a:spcBef>
+              <a:spcAft>
+                <a:spcPts val="0"/>
+              </a:spcAft>
+              <a:buSzPct val="120000"/>
+              <a:buFont typeface="Arial"/>
+              <a:buChar char="•"/>
+              <a:defRPr/>
+            </a:pPr>
+            <a:r>
+              <a:rPr lang="en-US" sz="2500" b="0" i="0" u="none" strike="noStrike" cap="none" spc="0">
                 <a:solidFill>
                   <a:srgbClr val="262626"/>
                 </a:solidFill>
@@ -15341,9 +15495,9 @@
                 <a:ea typeface="Arial"/>
                 <a:cs typeface="Arial"/>
               </a:rPr>
-              <a:t>Raises questions about legitimacy of the governance process</a:t>
-            </a:r>
-            <a:endParaRPr sz="2800" b="0" i="0" u="none" strike="noStrike" cap="none" spc="0">
+              <a:t>Ecological justice perspectives exist at the margins, low connectivity</a:t>
+            </a:r>
+            <a:endParaRPr sz="2500" b="0" i="0" u="none" strike="noStrike" cap="none" spc="0">
               <a:solidFill>
                 <a:srgbClr val="262626"/>
               </a:solidFill>
@@ -15352,11 +15506,23 @@
             </a:endParaRPr>
           </a:p>
           <a:p>
-            <a:pPr lvl="0">
-              <a:defRPr/>
-            </a:pPr>
-            <a:r>
-              <a:rPr lang="en-US" sz="2800" b="0" i="0" u="none" strike="noStrike" cap="none" spc="0">
+            <a:pPr marL="216000" marR="0" lvl="0" indent="-216000" algn="l">
+              <a:lnSpc>
+                <a:spcPct val="102000"/>
+              </a:lnSpc>
+              <a:spcBef>
+                <a:spcPts val="799"/>
+              </a:spcBef>
+              <a:spcAft>
+                <a:spcPts val="0"/>
+              </a:spcAft>
+              <a:buSzPct val="120000"/>
+              <a:buFont typeface="Arial"/>
+              <a:buChar char="•"/>
+              <a:defRPr/>
+            </a:pPr>
+            <a:r>
+              <a:rPr lang="en-US" sz="2500" b="0" i="0" u="none" strike="noStrike" cap="none" spc="0">
                 <a:solidFill>
                   <a:srgbClr val="262626"/>
                 </a:solidFill>
@@ -15364,10 +15530,34 @@
                 <a:ea typeface="Arial"/>
                 <a:cs typeface="Arial"/>
               </a:rPr>
-              <a:t>Structural bias</a:t>
-            </a:r>
-            <a:r>
-              <a:rPr lang="en-US" sz="2800" b="0" i="0" u="none" strike="noStrike" cap="none" spc="0">
+              <a:t>Need for broader inclusion, especially environmental perspectives</a:t>
+            </a:r>
+            <a:endParaRPr sz="2500" b="0" i="0" u="none" strike="noStrike" cap="none" spc="0">
+              <a:solidFill>
+                <a:srgbClr val="262626"/>
+              </a:solidFill>
+              <a:latin typeface="Arial"/>
+              <a:cs typeface="Arial"/>
+            </a:endParaRPr>
+          </a:p>
+          <a:p>
+            <a:pPr marL="216000" marR="0" lvl="0" indent="-216000" algn="l">
+              <a:lnSpc>
+                <a:spcPct val="102000"/>
+              </a:lnSpc>
+              <a:spcBef>
+                <a:spcPts val="799"/>
+              </a:spcBef>
+              <a:spcAft>
+                <a:spcPts val="0"/>
+              </a:spcAft>
+              <a:buSzPct val="120000"/>
+              <a:buFont typeface="Arial"/>
+              <a:buChar char="•"/>
+              <a:defRPr/>
+            </a:pPr>
+            <a:r>
+              <a:rPr lang="en-US" sz="2500" b="0" i="0" u="none" strike="noStrike" cap="none" spc="0">
                 <a:solidFill>
                   <a:srgbClr val="262626"/>
                 </a:solidFill>
@@ -15375,9 +15565,55 @@
                 <a:ea typeface="Arial"/>
                 <a:cs typeface="Arial"/>
               </a:rPr>
+              <a:t>Raises questions about legitimacy of the governance process</a:t>
+            </a:r>
+            <a:endParaRPr sz="2500" b="0" i="0" u="none" strike="noStrike" cap="none" spc="0">
+              <a:solidFill>
+                <a:srgbClr val="262626"/>
+              </a:solidFill>
+              <a:latin typeface="Arial"/>
+              <a:cs typeface="Arial"/>
+            </a:endParaRPr>
+          </a:p>
+          <a:p>
+            <a:pPr marL="216000" marR="0" lvl="0" indent="-216000" algn="l">
+              <a:lnSpc>
+                <a:spcPct val="102000"/>
+              </a:lnSpc>
+              <a:spcBef>
+                <a:spcPts val="799"/>
+              </a:spcBef>
+              <a:spcAft>
+                <a:spcPts val="0"/>
+              </a:spcAft>
+              <a:buSzPct val="120000"/>
+              <a:buFont typeface="Arial"/>
+              <a:buChar char="•"/>
+              <a:defRPr/>
+            </a:pPr>
+            <a:r>
+              <a:rPr lang="en-US" sz="2500" b="0" i="0" u="none" strike="noStrike" cap="none" spc="0">
+                <a:solidFill>
+                  <a:srgbClr val="262626"/>
+                </a:solidFill>
+                <a:latin typeface="Arial"/>
+                <a:ea typeface="Arial"/>
+                <a:cs typeface="Arial"/>
+              </a:rPr>
+              <a:t>Structural bias</a:t>
+            </a:r>
+            <a:r>
+              <a:rPr lang="en-US" sz="2500" b="0" i="0" u="none" strike="noStrike" cap="none" spc="0">
+                <a:solidFill>
+                  <a:srgbClr val="262626"/>
+                </a:solidFill>
+                <a:latin typeface="Arial"/>
+                <a:ea typeface="Arial"/>
+                <a:cs typeface="Arial"/>
+              </a:rPr>
               <a:t>: those who profit most decide the rules</a:t>
             </a:r>
-            <a:endParaRPr sz="2800" b="0" i="0" u="none" strike="noStrike" cap="none" spc="0">
+            <a:endParaRPr sz="2500" b="0" i="0" u="none" strike="noStrike" cap="none" spc="0">
               <a:solidFill>
                 <a:srgbClr val="262626"/>
               </a:solidFill>
@@ -15422,7 +15658,7 @@
       </p:grpSpPr>
       <p:sp>
         <p:nvSpPr>
-          <p:cNvPr id="1055417573" name="Titel 1"/>
+          <p:cNvPr id="1820321359" name="Titel 1"/>
           <p:cNvSpPr>
             <a:spLocks noGrp="1"/>
           </p:cNvSpPr>
@@ -15455,7 +15691,7 @@
       </p:sp>
       <p:sp>
         <p:nvSpPr>
-          <p:cNvPr id="504040671" name="Inhaltsplatzhalter 2"/>
+          <p:cNvPr id="1510594178" name="Inhaltsplatzhalter 2"/>
           <p:cNvSpPr>
             <a:spLocks noGrp="1"/>
           </p:cNvSpPr>
@@ -15717,7 +15953,7 @@
       </p:grpSpPr>
       <p:sp>
         <p:nvSpPr>
-          <p:cNvPr id="335921466" name="Titel 1"/>
+          <p:cNvPr id="1686075352" name="Titel 1"/>
           <p:cNvSpPr>
             <a:spLocks noGrp="1"/>
           </p:cNvSpPr>
@@ -15750,7 +15986,7 @@
       </p:sp>
       <p:sp>
         <p:nvSpPr>
-          <p:cNvPr id="1062576666" name="Inhaltsplatzhalter 2"/>
+          <p:cNvPr id="1696012920" name="Inhaltsplatzhalter 2"/>
           <p:cNvSpPr>
             <a:spLocks noGrp="1"/>
           </p:cNvSpPr>
@@ -15924,7 +16160,7 @@
       </p:grpSpPr>
       <p:sp>
         <p:nvSpPr>
-          <p:cNvPr id="1736572549" name="Title 1"/>
+          <p:cNvPr id="1388853083" name="Title 1"/>
           <p:cNvSpPr>
             <a:spLocks noGrp="1"/>
           </p:cNvSpPr>
@@ -15961,7 +16197,7 @@
       </p:sp>
       <p:sp>
         <p:nvSpPr>
-          <p:cNvPr id="861857441" name="Textplatzhalter 5"/>
+          <p:cNvPr id="1962052652" name="Textplatzhalter 5"/>
           <p:cNvSpPr>
             <a:spLocks noGrp="1"/>
           </p:cNvSpPr>
@@ -16029,7 +16265,7 @@
       </p:sp>
       <p:sp>
         <p:nvSpPr>
-          <p:cNvPr id="137163780" name="TextBox 2"/>
+          <p:cNvPr id="162121470" name="TextBox 2"/>
           <p:cNvSpPr txBox="1"/>
           <p:nvPr/>
         </p:nvSpPr>
@@ -16085,7 +16321,7 @@
       </p:sp>
       <p:grpSp>
         <p:nvGrpSpPr>
-          <p:cNvPr id="658329923" name="Group 4"/>
+          <p:cNvPr id="1359962692" name="Group 4"/>
           <p:cNvGrpSpPr/>
           <p:nvPr/>
         </p:nvGrpSpPr>
@@ -16207,7 +16443,7 @@
       </p:grpSp>
       <p:grpSp>
         <p:nvGrpSpPr>
-          <p:cNvPr id="1414203571" name="Group 10"/>
+          <p:cNvPr id="696584295" name="Group 10"/>
           <p:cNvGrpSpPr/>
           <p:nvPr/>
         </p:nvGrpSpPr>
@@ -16323,7 +16559,7 @@
       </p:grpSp>
       <p:sp>
         <p:nvSpPr>
-          <p:cNvPr id="1382194345" name="TextBox 2"/>
+          <p:cNvPr id="1207434145" name="TextBox 2"/>
           <p:cNvSpPr txBox="1"/>
           <p:nvPr/>
         </p:nvSpPr>
@@ -16379,7 +16615,7 @@
       </p:sp>
       <p:grpSp>
         <p:nvGrpSpPr>
-          <p:cNvPr id="2102800780" name="Group 4"/>
+          <p:cNvPr id="124180788" name="Group 4"/>
           <p:cNvGrpSpPr/>
           <p:nvPr/>
         </p:nvGrpSpPr>
@@ -16501,7 +16737,7 @@
       </p:grpSp>
       <p:sp>
         <p:nvSpPr>
-          <p:cNvPr id="1176306833" name="TextBox 2"/>
+          <p:cNvPr id="1806978914" name="TextBox 2"/>
           <p:cNvSpPr txBox="1"/>
           <p:nvPr/>
         </p:nvSpPr>
@@ -16590,7 +16826,7 @@
       </p:grpSpPr>
       <p:sp>
         <p:nvSpPr>
-          <p:cNvPr id="2138792897" name="Untertitel 1"/>
+          <p:cNvPr id="624350757" name="Untertitel 1"/>
           <p:cNvSpPr>
             <a:spLocks noGrp="1"/>
           </p:cNvSpPr>
@@ -16612,7 +16848,7 @@
       </p:sp>
       <p:sp>
         <p:nvSpPr>
-          <p:cNvPr id="153446126" name="Titel 2"/>
+          <p:cNvPr id="1004239826" name="Titel 2"/>
           <p:cNvSpPr>
             <a:spLocks noGrp="1"/>
           </p:cNvSpPr>
@@ -16671,7 +16907,7 @@
       </p:grpSpPr>
       <p:sp>
         <p:nvSpPr>
-          <p:cNvPr id="975457884" name="Titel 1"/>
+          <p:cNvPr id="558497039" name="Titel 1"/>
           <p:cNvSpPr>
             <a:spLocks noGrp="1"/>
           </p:cNvSpPr>
@@ -16701,7 +16937,7 @@
       </p:sp>
       <p:sp>
         <p:nvSpPr>
-          <p:cNvPr id="1629620666" name="Inhaltsplatzhalter 2"/>
+          <p:cNvPr id="223688631" name="Inhaltsplatzhalter 2"/>
           <p:cNvSpPr>
             <a:spLocks noGrp="1"/>
           </p:cNvSpPr>
@@ -16828,7 +17064,7 @@
       </p:sp>
       <p:sp>
         <p:nvSpPr>
-          <p:cNvPr id="1251551436" name="Textplatzhalter 3"/>
+          <p:cNvPr id="126773643" name="Textplatzhalter 3"/>
           <p:cNvSpPr>
             <a:spLocks noGrp="1"/>
           </p:cNvSpPr>
@@ -16883,7 +17119,7 @@
       </p:grpSpPr>
       <p:sp>
         <p:nvSpPr>
-          <p:cNvPr id="1955259090" name="Title 1"/>
+          <p:cNvPr id="672000486" name="Title 1"/>
           <p:cNvSpPr>
             <a:spLocks noGrp="1"/>
           </p:cNvSpPr>
@@ -16941,7 +17177,7 @@
       </p:sp>
       <p:sp>
         <p:nvSpPr>
-          <p:cNvPr id="673807206" name="Content Placeholder 2"/>
+          <p:cNvPr id="1832857479" name="Content Placeholder 2"/>
           <p:cNvSpPr>
             <a:spLocks noGrp="1"/>
           </p:cNvSpPr>
@@ -17169,7 +17405,7 @@
       </p:sp>
       <p:sp>
         <p:nvSpPr>
-          <p:cNvPr id="1730553300" name="Textplatzhalter 5"/>
+          <p:cNvPr id="1221358812" name="Textplatzhalter 5"/>
           <p:cNvSpPr>
             <a:spLocks noGrp="1"/>
           </p:cNvSpPr>
@@ -17270,7 +17506,7 @@
       </p:grpSpPr>
       <p:sp>
         <p:nvSpPr>
-          <p:cNvPr id="1232708067" name="Title 1"/>
+          <p:cNvPr id="1449544502" name="Title 1"/>
           <p:cNvSpPr>
             <a:spLocks noGrp="1"/>
           </p:cNvSpPr>
@@ -17328,7 +17564,7 @@
       </p:sp>
       <p:sp>
         <p:nvSpPr>
-          <p:cNvPr id="851969127" name="Content Placeholder 2"/>
+          <p:cNvPr id="156312964" name="Content Placeholder 2"/>
           <p:cNvSpPr>
             <a:spLocks noGrp="1"/>
           </p:cNvSpPr>
@@ -17461,7 +17697,7 @@
       </p:sp>
       <p:sp>
         <p:nvSpPr>
-          <p:cNvPr id="2011402619" name="Textplatzhalter 5"/>
+          <p:cNvPr id="1311694969" name="Textplatzhalter 5"/>
           <p:cNvSpPr>
             <a:spLocks noGrp="1"/>
           </p:cNvSpPr>
@@ -17562,7 +17798,7 @@
       </p:grpSpPr>
       <p:sp>
         <p:nvSpPr>
-          <p:cNvPr id="1578322883" name="Titel 1"/>
+          <p:cNvPr id="2116451949" name="Titel 1"/>
           <p:cNvSpPr>
             <a:spLocks noGrp="1"/>
           </p:cNvSpPr>
@@ -17616,7 +17852,7 @@
       </p:sp>
       <p:sp>
         <p:nvSpPr>
-          <p:cNvPr id="1385760479" name="Inhaltsplatzhalter 2"/>
+          <p:cNvPr id="1850515744" name="Inhaltsplatzhalter 2"/>
           <p:cNvSpPr>
             <a:spLocks noGrp="1"/>
           </p:cNvSpPr>
@@ -17771,7 +18007,7 @@
       </p:grpSpPr>
       <p:sp>
         <p:nvSpPr>
-          <p:cNvPr id="741935046" name="Titel 1"/>
+          <p:cNvPr id="369824764" name="Titel 1"/>
           <p:cNvSpPr>
             <a:spLocks noGrp="1"/>
           </p:cNvSpPr>
@@ -17808,7 +18044,7 @@
       </p:sp>
       <p:sp>
         <p:nvSpPr>
-          <p:cNvPr id="333786090" name="Inhaltsplatzhalter 2"/>
+          <p:cNvPr id="456425297" name="Inhaltsplatzhalter 2"/>
           <p:cNvSpPr>
             <a:spLocks noGrp="1"/>
           </p:cNvSpPr>
@@ -17959,7 +18195,7 @@
       </p:sp>
       <p:sp>
         <p:nvSpPr>
-          <p:cNvPr id="1666410962" name="Textplatzhalter 3"/>
+          <p:cNvPr id="1373527377" name="Textplatzhalter 3"/>
           <p:cNvSpPr>
             <a:spLocks noGrp="1"/>
           </p:cNvSpPr>
@@ -18014,7 +18250,7 @@
       </p:grpSpPr>
       <p:sp>
         <p:nvSpPr>
-          <p:cNvPr id="1439874407" name="Subtitle 2"/>
+          <p:cNvPr id="1597937607" name="Subtitle 2"/>
           <p:cNvSpPr>
             <a:spLocks noGrp="1"/>
           </p:cNvSpPr>
@@ -18088,7 +18324,7 @@
       </p:sp>
       <p:sp>
         <p:nvSpPr>
-          <p:cNvPr id="1671706351" name="Titel 5"/>
+          <p:cNvPr id="1634104348" name="Titel 5"/>
           <p:cNvSpPr>
             <a:spLocks noGrp="1"/>
           </p:cNvSpPr>
@@ -18144,7 +18380,7 @@
       </p:sp>
       <p:sp>
         <p:nvSpPr>
-          <p:cNvPr id="183685109" name="Bildplatzhalter 9"/>
+          <p:cNvPr id="630502502" name="Bildplatzhalter 9"/>
           <p:cNvSpPr>
             <a:spLocks noGrp="1"/>
           </p:cNvSpPr>
@@ -18183,7 +18419,7 @@
       </p:sp>
       <p:sp>
         <p:nvSpPr>
-          <p:cNvPr id="1144834483" name="Bildplatzhalter 9"/>
+          <p:cNvPr id="1655248585" name="Bildplatzhalter 9"/>
           <p:cNvSpPr>
             <a:spLocks noGrp="1"/>
           </p:cNvSpPr>
@@ -18255,7 +18491,7 @@
       </p:grpSpPr>
       <p:sp>
         <p:nvSpPr>
-          <p:cNvPr id="818972287" name="Titel 1"/>
+          <p:cNvPr id="1716521872" name="Titel 1"/>
           <p:cNvSpPr>
             <a:spLocks noGrp="1"/>
           </p:cNvSpPr>
@@ -18299,7 +18535,7 @@
       </p:sp>
       <p:sp>
         <p:nvSpPr>
-          <p:cNvPr id="1987542635" name="Inhaltsplatzhalter 2"/>
+          <p:cNvPr id="1919799546" name="Inhaltsplatzhalter 2"/>
           <p:cNvSpPr>
             <a:spLocks noGrp="1"/>
           </p:cNvSpPr>
@@ -18490,7 +18726,7 @@
       </p:sp>
       <p:sp>
         <p:nvSpPr>
-          <p:cNvPr id="514341859" name="Textplatzhalter 3"/>
+          <p:cNvPr id="1495903905" name="Textplatzhalter 3"/>
           <p:cNvSpPr>
             <a:spLocks noGrp="1"/>
           </p:cNvSpPr>
@@ -18545,7 +18781,7 @@
       </p:grpSpPr>
       <p:sp>
         <p:nvSpPr>
-          <p:cNvPr id="1114115100" name="Titel 1"/>
+          <p:cNvPr id="1959674776" name="Titel 1"/>
           <p:cNvSpPr>
             <a:spLocks noGrp="1"/>
           </p:cNvSpPr>
@@ -18589,7 +18825,7 @@
       </p:sp>
       <p:sp>
         <p:nvSpPr>
-          <p:cNvPr id="2121534005" name="Inhaltsplatzhalter 2"/>
+          <p:cNvPr id="158454832" name="Inhaltsplatzhalter 2"/>
           <p:cNvSpPr>
             <a:spLocks noGrp="1"/>
           </p:cNvSpPr>
@@ -18720,7 +18956,7 @@
       </p:sp>
       <p:sp>
         <p:nvSpPr>
-          <p:cNvPr id="1819164900" name="Textplatzhalter 3"/>
+          <p:cNvPr id="1902991408" name="Textplatzhalter 3"/>
           <p:cNvSpPr>
             <a:spLocks noGrp="1"/>
           </p:cNvSpPr>
@@ -18775,7 +19011,7 @@
       </p:grpSpPr>
       <p:sp>
         <p:nvSpPr>
-          <p:cNvPr id="1737641823" name="Titel 1"/>
+          <p:cNvPr id="729181203" name="Titel 1"/>
           <p:cNvSpPr>
             <a:spLocks noGrp="1"/>
           </p:cNvSpPr>
@@ -18819,7 +19055,7 @@
       </p:sp>
       <p:sp>
         <p:nvSpPr>
-          <p:cNvPr id="1560995298" name="Inhaltsplatzhalter 2"/>
+          <p:cNvPr id="1892340268" name="Inhaltsplatzhalter 2"/>
           <p:cNvSpPr>
             <a:spLocks noGrp="1"/>
           </p:cNvSpPr>
@@ -19104,7 +19340,7 @@
       </p:grpSpPr>
       <p:sp>
         <p:nvSpPr>
-          <p:cNvPr id="1804369965" name="Titel 1"/>
+          <p:cNvPr id="478537028" name="Titel 1"/>
           <p:cNvSpPr>
             <a:spLocks noGrp="1"/>
           </p:cNvSpPr>
@@ -19148,7 +19384,7 @@
       </p:sp>
       <p:sp>
         <p:nvSpPr>
-          <p:cNvPr id="1894126845" name="Inhaltsplatzhalter 2"/>
+          <p:cNvPr id="938440001" name="Inhaltsplatzhalter 2"/>
           <p:cNvSpPr>
             <a:spLocks noGrp="1"/>
           </p:cNvSpPr>
@@ -19287,7 +19523,7 @@
       </p:sp>
       <p:sp>
         <p:nvSpPr>
-          <p:cNvPr id="398245729" name="Textplatzhalter 3"/>
+          <p:cNvPr id="614985463" name="Textplatzhalter 3"/>
           <p:cNvSpPr>
             <a:spLocks noGrp="1"/>
           </p:cNvSpPr>
@@ -19342,7 +19578,7 @@
       </p:grpSpPr>
       <p:sp>
         <p:nvSpPr>
-          <p:cNvPr id="128293209" name="Titel 1"/>
+          <p:cNvPr id="939664532" name="Titel 1"/>
           <p:cNvSpPr>
             <a:spLocks noGrp="1"/>
           </p:cNvSpPr>
@@ -19367,7 +19603,7 @@
                 <a:ea typeface="Arial Black"/>
                 <a:cs typeface="Arial Black"/>
               </a:rPr>
-              <a:t>Backup Slide 8: </a:t>
+              <a:t>Backup Slide 8a: </a:t>
             </a:r>
             <a:r>
               <a:rPr lang="en-US" sz="3600" b="0" i="0" u="none" strike="noStrike" cap="none" spc="0">
@@ -19384,49 +19620,172 @@
           </a:p>
         </p:txBody>
       </p:sp>
-      <p:pic>
-        <p:nvPicPr>
-          <p:cNvPr id="326554427" name=""/>
-          <p:cNvPicPr>
-            <a:picLocks noChangeAspect="1"/>
-          </p:cNvPicPr>
-          <p:nvPr/>
-        </p:nvPicPr>
-        <p:blipFill rotWithShape="1">
-          <a:blip r:embed="rId3"/>
-          <a:stretch/>
-        </p:blipFill>
+      <p:sp>
+        <p:nvSpPr>
+          <p:cNvPr id="747693808" name="Inhaltsplatzhalter 2"/>
+          <p:cNvSpPr>
+            <a:spLocks noGrp="1"/>
+          </p:cNvSpPr>
+          <p:nvPr>
+            <p:ph idx="1"/>
+          </p:nvPr>
+        </p:nvSpPr>
         <p:spPr bwMode="auto">
           <a:xfrm flipH="0" flipV="0">
-            <a:off x="487121" y="1861739"/>
-            <a:ext cx="5301054" cy="3959654"/>
+            <a:off x="471539" y="1621584"/>
+            <a:ext cx="11546950" cy="4516749"/>
           </a:xfrm>
-          <a:prstGeom prst="rect">
-            <a:avLst/>
-          </a:prstGeom>
         </p:spPr>
-      </p:pic>
-      <p:pic>
-        <p:nvPicPr>
-          <p:cNvPr id="1821456602" name=""/>
-          <p:cNvPicPr>
-            <a:picLocks noChangeAspect="1"/>
-          </p:cNvPicPr>
-          <p:nvPr/>
-        </p:nvPicPr>
-        <p:blipFill rotWithShape="1">
-          <a:blip r:embed="rId4"/>
-        </p:blipFill>
-        <p:spPr bwMode="auto">
-          <a:xfrm flipH="0" flipV="0">
-            <a:off x="6433896" y="1861739"/>
-            <a:ext cx="5301054" cy="3959654"/>
-          </a:xfrm>
-          <a:prstGeom prst="rect">
-            <a:avLst/>
-          </a:prstGeom>
-        </p:spPr>
-      </p:pic>
+        <p:txBody>
+          <a:bodyPr vertOverflow="overflow" horzOverflow="overflow" vert="horz" wrap="square" lIns="91440" tIns="45720" rIns="91440" bIns="45720" numCol="1" spcCol="0" rtlCol="0" fromWordArt="0" anchor="t" anchorCtr="0" forceAA="0" upright="0" compatLnSpc="0">
+            <a:normAutofit/>
+          </a:bodyPr>
+          <a:lstStyle/>
+          <a:p>
+            <a:pPr>
+              <a:defRPr/>
+            </a:pPr>
+            <a:r>
+              <a:rPr lang="en-US" sz="2800" b="0" i="0" u="none" strike="noStrike" cap="none" spc="0">
+                <a:solidFill>
+                  <a:schemeClr val="tx1"/>
+                </a:solidFill>
+                <a:latin typeface="Arial"/>
+                <a:ea typeface="Arial"/>
+                <a:cs typeface="Arial"/>
+              </a:rPr>
+              <a:t>Modularity-based community detection</a:t>
+            </a:r>
+            <a:endParaRPr lang="en-US" sz="2800" b="0" i="0" u="none" strike="noStrike" cap="none" spc="0">
+              <a:solidFill>
+                <a:schemeClr val="tx1"/>
+              </a:solidFill>
+              <a:latin typeface="Arial"/>
+              <a:ea typeface="Arial"/>
+              <a:cs typeface="Arial"/>
+            </a:endParaRPr>
+          </a:p>
+          <a:p>
+            <a:pPr>
+              <a:defRPr/>
+            </a:pPr>
+            <a:r>
+              <a:rPr lang="en-US" sz="2800" b="0" i="0" u="none" strike="noStrike" cap="none" spc="0">
+                <a:solidFill>
+                  <a:schemeClr val="tx1"/>
+                </a:solidFill>
+                <a:latin typeface="Arial"/>
+                <a:ea typeface="Arial"/>
+                <a:cs typeface="Arial"/>
+              </a:rPr>
+              <a:t>Network partitioned into groups</a:t>
+            </a:r>
+            <a:endParaRPr lang="en-US" sz="2800" b="0" i="0" u="none" strike="noStrike" cap="none" spc="0">
+              <a:solidFill>
+                <a:schemeClr val="tx1"/>
+              </a:solidFill>
+              <a:latin typeface="Arial"/>
+              <a:ea typeface="Arial"/>
+              <a:cs typeface="Arial"/>
+            </a:endParaRPr>
+          </a:p>
+          <a:p>
+            <a:pPr>
+              <a:defRPr/>
+            </a:pPr>
+            <a:r>
+              <a:rPr lang="en-US" sz="2800" b="0" i="0" u="none" strike="noStrike" cap="none" spc="0">
+                <a:solidFill>
+                  <a:schemeClr val="tx1"/>
+                </a:solidFill>
+                <a:latin typeface="Arial"/>
+                <a:ea typeface="Arial"/>
+                <a:cs typeface="Arial"/>
+              </a:rPr>
+              <a:t>Maximize internal connectivit</a:t>
+            </a:r>
+            <a:endParaRPr lang="en-US" sz="2800" b="0" i="0" u="none" strike="noStrike" cap="none" spc="0">
+              <a:solidFill>
+                <a:schemeClr val="tx1"/>
+              </a:solidFill>
+              <a:latin typeface="Arial"/>
+              <a:ea typeface="Arial"/>
+              <a:cs typeface="Arial"/>
+            </a:endParaRPr>
+          </a:p>
+          <a:p>
+            <a:pPr>
+              <a:defRPr/>
+            </a:pPr>
+            <a:r>
+              <a:rPr lang="en-US" sz="2800" b="0" i="0" u="none" strike="noStrike" cap="none" spc="0">
+                <a:solidFill>
+                  <a:schemeClr val="tx1"/>
+                </a:solidFill>
+                <a:latin typeface="Arial"/>
+                <a:ea typeface="Arial"/>
+                <a:cs typeface="Arial"/>
+              </a:rPr>
+              <a:t>Minimize connections between groups</a:t>
+            </a:r>
+            <a:endParaRPr lang="en-US" sz="2800" b="0" i="0" u="none" strike="noStrike" cap="none" spc="0">
+              <a:solidFill>
+                <a:schemeClr val="tx1"/>
+              </a:solidFill>
+              <a:latin typeface="Arial"/>
+              <a:ea typeface="Arial"/>
+              <a:cs typeface="Arial"/>
+            </a:endParaRPr>
+          </a:p>
+          <a:p>
+            <a:pPr>
+              <a:defRPr/>
+            </a:pPr>
+            <a:r>
+              <a:rPr lang="en-US" sz="2800" b="0" i="0" u="none" strike="noStrike" cap="none" spc="0">
+                <a:solidFill>
+                  <a:schemeClr val="tx1"/>
+                </a:solidFill>
+                <a:latin typeface="Arial"/>
+                <a:ea typeface="Arial"/>
+                <a:cs typeface="Arial"/>
+              </a:rPr>
+              <a:t>Groups serve as coalition proxies</a:t>
+            </a:r>
+            <a:endParaRPr lang="en-US" sz="2800" b="0" i="0" u="none" strike="noStrike" cap="none" spc="0">
+              <a:solidFill>
+                <a:schemeClr val="tx1"/>
+              </a:solidFill>
+              <a:latin typeface="Arial"/>
+              <a:ea typeface="Arial"/>
+              <a:cs typeface="Arial"/>
+            </a:endParaRPr>
+          </a:p>
+          <a:p>
+            <a:pPr>
+              <a:defRPr/>
+            </a:pPr>
+            <a:r>
+              <a:rPr lang="en-US" sz="2800" b="0" i="0" u="none" strike="noStrike" cap="none" spc="0">
+                <a:solidFill>
+                  <a:schemeClr val="tx1"/>
+                </a:solidFill>
+                <a:latin typeface="Arial"/>
+                <a:ea typeface="Arial"/>
+                <a:cs typeface="Arial"/>
+              </a:rPr>
+              <a:t>sensitive to parameter choices —&gt; seen as exploratory summary</a:t>
+            </a:r>
+            <a:endParaRPr lang="en-US" sz="2800" b="0" i="0" u="none" strike="noStrike" cap="none" spc="0">
+              <a:solidFill>
+                <a:schemeClr val="tx1"/>
+              </a:solidFill>
+              <a:latin typeface="Arial"/>
+              <a:cs typeface="Arial"/>
+            </a:endParaRPr>
+          </a:p>
+        </p:txBody>
+      </p:sp>
     </p:spTree>
   </p:cSld>
   <p:clrMapOvr>
@@ -19462,7 +19821,7 @@
       </p:grpSpPr>
       <p:sp>
         <p:nvSpPr>
-          <p:cNvPr id="1868053618" name="Titel 1"/>
+          <p:cNvPr id="1603699921" name="Titel 1"/>
           <p:cNvSpPr>
             <a:spLocks noGrp="1"/>
           </p:cNvSpPr>
@@ -19487,161 +19846,66 @@
                 <a:ea typeface="Arial Black"/>
                 <a:cs typeface="Arial Black"/>
               </a:rPr>
-              <a:t>What Is Influence?</a:t>
-            </a:r>
-            <a:endParaRPr/>
-          </a:p>
-        </p:txBody>
-      </p:sp>
-      <p:sp>
-        <p:nvSpPr>
-          <p:cNvPr id="763651457" name="Inhaltsplatzhalter 2"/>
-          <p:cNvSpPr>
-            <a:spLocks noGrp="1"/>
-          </p:cNvSpPr>
-          <p:nvPr>
-            <p:ph idx="1"/>
-          </p:nvPr>
-        </p:nvSpPr>
-        <p:spPr bwMode="auto"/>
-        <p:txBody>
-          <a:bodyPr vertOverflow="overflow" horzOverflow="overflow" vert="horz" wrap="square" lIns="91440" tIns="45720" rIns="91440" bIns="45720" numCol="1" spcCol="0" rtlCol="0" fromWordArt="0" anchor="t" anchorCtr="0" forceAA="0" upright="0" compatLnSpc="0">
-            <a:normAutofit/>
-          </a:bodyPr>
-          <a:lstStyle/>
-          <a:p>
-            <a:pPr marL="0" indent="0">
-              <a:buSzPct val="120000"/>
-              <a:buFont typeface="Arial"/>
-              <a:buNone/>
-              <a:defRPr/>
-            </a:pPr>
-            <a:r>
-              <a:rPr lang="en-US" sz="2800" b="0" i="0" u="none" strike="noStrike" cap="none" spc="0">
+              <a:t>Backup Slide 8b: </a:t>
+            </a:r>
+            <a:r>
+              <a:rPr lang="en-US" sz="3600" b="0" i="0" u="none" strike="noStrike" cap="none" spc="0">
                 <a:solidFill>
                   <a:schemeClr val="tx1"/>
                 </a:solidFill>
-                <a:latin typeface="Arial"/>
-                <a:ea typeface="Arial"/>
-                <a:cs typeface="Arial"/>
-              </a:rPr>
-              <a:t>Network ties capture relations such as</a:t>
-            </a:r>
-            <a:endParaRPr lang="en-US" sz="2800" b="0" i="0" u="none" strike="noStrike" cap="none" spc="0">
-              <a:solidFill>
-                <a:schemeClr val="tx1"/>
-              </a:solidFill>
-              <a:latin typeface="Arial"/>
-              <a:cs typeface="Arial"/>
-            </a:endParaRPr>
-          </a:p>
-          <a:p>
-            <a:pPr>
-              <a:defRPr/>
-            </a:pPr>
-            <a:r>
-              <a:rPr lang="en-US" sz="2800" b="0" i="0" u="none" strike="noStrike" cap="none" spc="0">
-                <a:solidFill>
-                  <a:schemeClr val="tx1"/>
-                </a:solidFill>
-                <a:latin typeface="Arial"/>
-                <a:ea typeface="Arial"/>
-                <a:cs typeface="Arial"/>
-              </a:rPr>
-              <a:t>Co-membership in institutional settings</a:t>
-            </a:r>
-            <a:endParaRPr lang="en-US" sz="2800" b="0" i="0" u="none" strike="noStrike" cap="none" spc="0">
-              <a:solidFill>
-                <a:schemeClr val="tx1"/>
-              </a:solidFill>
-              <a:latin typeface="Arial"/>
-              <a:cs typeface="Arial"/>
-            </a:endParaRPr>
-          </a:p>
-          <a:p>
-            <a:pPr>
-              <a:defRPr/>
-            </a:pPr>
-            <a:r>
-              <a:rPr lang="en-US" sz="2800" b="0" i="0" u="none" strike="noStrike" cap="none" spc="0">
-                <a:solidFill>
-                  <a:schemeClr val="tx1"/>
-                </a:solidFill>
-                <a:latin typeface="Arial"/>
-                <a:ea typeface="Arial"/>
-                <a:cs typeface="Arial"/>
-              </a:rPr>
-              <a:t>Shared participation in policy texts</a:t>
-            </a:r>
-            <a:endParaRPr lang="en-US" sz="2800" b="0" i="0" u="none" strike="noStrike" cap="none" spc="0">
-              <a:solidFill>
-                <a:schemeClr val="tx1"/>
-              </a:solidFill>
-              <a:latin typeface="Arial"/>
-              <a:cs typeface="Arial"/>
-            </a:endParaRPr>
-          </a:p>
-          <a:p>
-            <a:pPr>
-              <a:defRPr/>
-            </a:pPr>
-            <a:r>
-              <a:rPr lang="en-US" sz="2800" b="0" i="0" u="none" strike="noStrike" cap="none" spc="0">
-                <a:solidFill>
-                  <a:schemeClr val="tx1"/>
-                </a:solidFill>
-                <a:latin typeface="Arial"/>
-                <a:ea typeface="Arial"/>
-                <a:cs typeface="Arial"/>
-              </a:rPr>
-              <a:t>Formal authorship, contribution, or affiliation</a:t>
-            </a:r>
-            <a:endParaRPr lang="en-US" sz="2800" b="0" i="0" u="none" strike="noStrike" cap="none" spc="0">
-              <a:solidFill>
-                <a:schemeClr val="tx1"/>
-              </a:solidFill>
-              <a:latin typeface="Arial"/>
-              <a:cs typeface="Arial"/>
-            </a:endParaRPr>
-          </a:p>
-          <a:p>
-            <a:pPr>
-              <a:defRPr/>
-            </a:pPr>
-            <a:endParaRPr lang="en-US" sz="2800" b="0" i="0" u="none" strike="noStrike" cap="none" spc="0">
-              <a:solidFill>
-                <a:schemeClr val="tx1"/>
-              </a:solidFill>
-              <a:latin typeface="Arial"/>
-              <a:cs typeface="Arial"/>
-            </a:endParaRPr>
-          </a:p>
-          <a:p>
-            <a:pPr>
-              <a:defRPr/>
-            </a:pPr>
-            <a:r>
-              <a:rPr lang="en-US" sz="2800" b="0" i="0" u="none" strike="noStrike" cap="none" spc="0">
-                <a:solidFill>
-                  <a:schemeClr val="tx1"/>
-                </a:solidFill>
-                <a:latin typeface="Arial"/>
-                <a:ea typeface="Arial"/>
-                <a:cs typeface="Arial"/>
-              </a:rPr>
-              <a:t>Centrality and brokerage indicate structural advantage</a:t>
-            </a:r>
-            <a:endParaRPr lang="en-US" sz="2800" b="0" i="0" u="none" strike="noStrike" cap="none" spc="0">
-              <a:solidFill>
-                <a:schemeClr val="tx1"/>
-              </a:solidFill>
-              <a:latin typeface="Arial"/>
-              <a:ea typeface="Arial"/>
-              <a:cs typeface="Arial"/>
-            </a:endParaRPr>
-          </a:p>
-        </p:txBody>
-      </p:sp>
+                <a:latin typeface="Arial Black"/>
+                <a:ea typeface="Arial Black"/>
+                <a:cs typeface="Arial Black"/>
+              </a:rPr>
+              <a:t>Coalition Structures and Sustainability Challengers</a:t>
+            </a:r>
+            <a:endParaRPr/>
+          </a:p>
+        </p:txBody>
+      </p:sp>
+      <p:pic>
+        <p:nvPicPr>
+          <p:cNvPr id="439614394" name=""/>
+          <p:cNvPicPr>
+            <a:picLocks noChangeAspect="1"/>
+          </p:cNvPicPr>
+          <p:nvPr/>
+        </p:nvPicPr>
+        <p:blipFill rotWithShape="1">
+          <a:blip r:embed="rId3"/>
+          <a:stretch/>
+        </p:blipFill>
+        <p:spPr bwMode="auto">
+          <a:xfrm flipH="0" flipV="0">
+            <a:off x="487120" y="1861738"/>
+            <a:ext cx="5301054" cy="3959653"/>
+          </a:xfrm>
+          <a:prstGeom prst="rect">
+            <a:avLst/>
+          </a:prstGeom>
+        </p:spPr>
+      </p:pic>
+      <p:pic>
+        <p:nvPicPr>
+          <p:cNvPr id="1821331476" name=""/>
+          <p:cNvPicPr>
+            <a:picLocks noChangeAspect="1"/>
+          </p:cNvPicPr>
+          <p:nvPr/>
+        </p:nvPicPr>
+        <p:blipFill rotWithShape="1">
+          <a:blip r:embed="rId4"/>
+        </p:blipFill>
+        <p:spPr bwMode="auto">
+          <a:xfrm flipH="0" flipV="0">
+            <a:off x="6433895" y="1861738"/>
+            <a:ext cx="5301054" cy="3959653"/>
+          </a:xfrm>
+          <a:prstGeom prst="rect">
+            <a:avLst/>
+          </a:prstGeom>
+        </p:spPr>
+      </p:pic>
     </p:spTree>
   </p:cSld>
   <p:clrMapOvr>
@@ -19677,7 +19941,7 @@
       </p:grpSpPr>
       <p:sp>
         <p:nvSpPr>
-          <p:cNvPr id="1428618777" name="Titel 1"/>
+          <p:cNvPr id="2016053370" name="Titel 1"/>
           <p:cNvSpPr>
             <a:spLocks noGrp="1"/>
           </p:cNvSpPr>
@@ -19702,15 +19966,15 @@
                 <a:ea typeface="Arial Black"/>
                 <a:cs typeface="Arial Black"/>
               </a:rPr>
-              <a:t>Linking Network Position to Sustainability Framing</a:t>
-            </a:r>
-            <a:endParaRPr/>
-          </a:p>
-        </p:txBody>
-      </p:sp>
-      <p:sp>
-        <p:nvSpPr>
-          <p:cNvPr id="853510413" name="Inhaltsplatzhalter 2"/>
+              <a:t>Backup Slide 9: What Is Influence?</a:t>
+            </a:r>
+            <a:endParaRPr/>
+          </a:p>
+        </p:txBody>
+      </p:sp>
+      <p:sp>
+        <p:nvSpPr>
+          <p:cNvPr id="1672856854" name="Inhaltsplatzhalter 2"/>
           <p:cNvSpPr>
             <a:spLocks noGrp="1"/>
           </p:cNvSpPr>
@@ -19725,10 +19989,24 @@
           </a:bodyPr>
           <a:lstStyle/>
           <a:p>
-            <a:pPr>
-              <a:defRPr/>
-            </a:pPr>
-            <a:endParaRPr lang="en-US" sz="2500" b="0" i="0" u="none" strike="noStrike" cap="none" spc="0">
+            <a:pPr marL="0" indent="0">
+              <a:buSzPct val="120000"/>
+              <a:buFont typeface="Arial"/>
+              <a:buNone/>
+              <a:defRPr/>
+            </a:pPr>
+            <a:r>
+              <a:rPr lang="en-US" sz="2800" b="0" i="0" u="none" strike="noStrike" cap="none" spc="0">
+                <a:solidFill>
+                  <a:schemeClr val="tx1"/>
+                </a:solidFill>
+                <a:latin typeface="Arial"/>
+                <a:ea typeface="Arial"/>
+                <a:cs typeface="Arial"/>
+              </a:rPr>
+              <a:t>Network ties capture relations such as</a:t>
+            </a:r>
+            <a:endParaRPr lang="en-US" sz="2800" b="0" i="0" u="none" strike="noStrike" cap="none" spc="0">
               <a:solidFill>
                 <a:schemeClr val="tx1"/>
               </a:solidFill>
@@ -19741,7 +20019,7 @@
               <a:defRPr/>
             </a:pPr>
             <a:r>
-              <a:rPr lang="en-US" sz="2500" b="0" i="0" u="none" strike="noStrike" cap="none" spc="0">
+              <a:rPr lang="en-US" sz="2800" b="0" i="0" u="none" strike="noStrike" cap="none" spc="0">
                 <a:solidFill>
                   <a:schemeClr val="tx1"/>
                 </a:solidFill>
@@ -19749,55 +20027,9 @@
                 <a:ea typeface="Arial"/>
                 <a:cs typeface="Arial"/>
               </a:rPr>
-              <a:t>Influence over sustainability-related AI policy is distributed unequally</a:t>
-            </a:r>
-            <a:endParaRPr lang="en-US" sz="2500" b="0" i="0" u="none" strike="noStrike" cap="none" spc="0">
-              <a:solidFill>
-                <a:schemeClr val="tx1"/>
-              </a:solidFill>
-              <a:latin typeface="Arial"/>
-              <a:ea typeface="Arial"/>
-              <a:cs typeface="Arial"/>
-            </a:endParaRPr>
-          </a:p>
-          <a:p>
-            <a:pPr>
-              <a:defRPr/>
-            </a:pPr>
-            <a:r>
-              <a:rPr lang="en-US" sz="2500" b="0" i="0" u="none" strike="noStrike" cap="none" spc="0">
-                <a:solidFill>
-                  <a:schemeClr val="tx1"/>
-                </a:solidFill>
-                <a:latin typeface="Arial"/>
-                <a:ea typeface="Arial"/>
-                <a:cs typeface="Arial"/>
-              </a:rPr>
-              <a:t>Central positions are occupied mainly by </a:t>
-            </a:r>
-            <a:r>
-              <a:rPr lang="en-US" sz="2500" b="0" i="0" u="none" strike="noStrike" cap="none" spc="0">
-                <a:solidFill>
-                  <a:schemeClr val="tx1"/>
-                </a:solidFill>
-                <a:latin typeface="Arial"/>
-                <a:ea typeface="Arial"/>
-                <a:cs typeface="Arial"/>
-              </a:rPr>
-              <a:t>market-oriented </a:t>
-            </a:r>
-            <a:r>
-              <a:rPr lang="en-US" sz="2500" b="0" i="0" u="none" strike="noStrike" cap="none" spc="0">
-                <a:solidFill>
-                  <a:schemeClr val="tx1"/>
-                </a:solidFill>
-                <a:latin typeface="Arial"/>
-                <a:ea typeface="Arial"/>
-                <a:cs typeface="Arial"/>
-              </a:rPr>
-              <a:t>incumbents</a:t>
-            </a:r>
-            <a:endParaRPr lang="en-US" sz="2500" b="0" i="0" u="none" strike="noStrike" cap="none" spc="0">
+              <a:t>Co-membership in institutional settings</a:t>
+            </a:r>
+            <a:endParaRPr lang="en-US" sz="2800" b="0" i="0" u="none" strike="noStrike" cap="none" spc="0">
               <a:solidFill>
                 <a:schemeClr val="tx1"/>
               </a:solidFill>
@@ -19810,7 +20042,7 @@
               <a:defRPr/>
             </a:pPr>
             <a:r>
-              <a:rPr lang="en-US" sz="2500" b="0" i="0" u="none" strike="noStrike" cap="none" spc="0">
+              <a:rPr lang="en-US" sz="2800" b="0" i="0" u="none" strike="noStrike" cap="none" spc="0">
                 <a:solidFill>
                   <a:schemeClr val="tx1"/>
                 </a:solidFill>
@@ -19818,9 +20050,9 @@
                 <a:ea typeface="Arial"/>
                 <a:cs typeface="Arial"/>
               </a:rPr>
-              <a:t>Ecological justice perspectives exist, but do not occupy central positions</a:t>
-            </a:r>
-            <a:endParaRPr lang="en-US" sz="2500" b="0" i="0" u="none" strike="noStrike" cap="none" spc="0">
+              <a:t>Shared participation in policy texts</a:t>
+            </a:r>
+            <a:endParaRPr lang="en-US" sz="2800" b="0" i="0" u="none" strike="noStrike" cap="none" spc="0">
               <a:solidFill>
                 <a:schemeClr val="tx1"/>
               </a:solidFill>
@@ -19833,7 +20065,7 @@
               <a:defRPr/>
             </a:pPr>
             <a:r>
-              <a:rPr lang="en-US" sz="2500" b="0" i="0" u="none" strike="noStrike" cap="none" spc="0">
+              <a:rPr lang="en-US" sz="2800" b="0" i="0" u="none" strike="noStrike" cap="none" spc="0">
                 <a:solidFill>
                   <a:schemeClr val="tx1"/>
                 </a:solidFill>
@@ -19841,9 +20073,9 @@
                 <a:ea typeface="Arial"/>
                 <a:cs typeface="Arial"/>
               </a:rPr>
-              <a:t>Narrative power follows structural embeddedness</a:t>
-            </a:r>
-            <a:endParaRPr lang="en-US" sz="2500" b="0" i="0" u="none" strike="noStrike" cap="none" spc="0">
+              <a:t>Formal authorship, contribution, or affiliation</a:t>
+            </a:r>
+            <a:endParaRPr lang="en-US" sz="2800" b="0" i="0" u="none" strike="noStrike" cap="none" spc="0">
               <a:solidFill>
                 <a:schemeClr val="tx1"/>
               </a:solidFill>
@@ -19855,22 +20087,35 @@
             <a:pPr>
               <a:defRPr/>
             </a:pPr>
-            <a:r>
-              <a:rPr lang="en-US" sz="2500" b="0" i="0" u="none" strike="noStrike" cap="none" spc="0">
-                <a:solidFill>
-                  <a:schemeClr val="tx1"/>
-                </a:solidFill>
-                <a:latin typeface="Arial"/>
-                <a:ea typeface="Arial"/>
-                <a:cs typeface="Arial"/>
-              </a:rPr>
-              <a:t>Hard for ecological justice advocates within landscape dominated by corporate interests</a:t>
-            </a:r>
-            <a:endParaRPr lang="en-US" sz="2500" b="0" i="0" u="none" strike="noStrike" cap="none" spc="0">
+            <a:endParaRPr lang="en-US" sz="2800" b="0" i="0" u="none" strike="noStrike" cap="none" spc="0">
               <a:solidFill>
                 <a:schemeClr val="tx1"/>
               </a:solidFill>
               <a:latin typeface="Arial"/>
+              <a:cs typeface="Arial"/>
+            </a:endParaRPr>
+          </a:p>
+          <a:p>
+            <a:pPr>
+              <a:defRPr/>
+            </a:pPr>
+            <a:r>
+              <a:rPr lang="en-US" sz="2800" b="0" i="0" u="none" strike="noStrike" cap="none" spc="0">
+                <a:solidFill>
+                  <a:schemeClr val="tx1"/>
+                </a:solidFill>
+                <a:latin typeface="Arial"/>
+                <a:ea typeface="Arial"/>
+                <a:cs typeface="Arial"/>
+              </a:rPr>
+              <a:t>Centrality and brokerage indicate structural advantage</a:t>
+            </a:r>
+            <a:endParaRPr lang="en-US" sz="2800" b="0" i="0" u="none" strike="noStrike" cap="none" spc="0">
+              <a:solidFill>
+                <a:schemeClr val="tx1"/>
+              </a:solidFill>
+              <a:latin typeface="Arial"/>
+              <a:ea typeface="Arial"/>
               <a:cs typeface="Arial"/>
             </a:endParaRPr>
           </a:p>
@@ -19893,6 +20138,240 @@
 </file>
 
 <file path=ppt/slides/slide37.xml><?xml version="1.0" encoding="utf-8"?>
+<p:sld xmlns:a="http://schemas.openxmlformats.org/drawingml/2006/main" xmlns:r="http://schemas.openxmlformats.org/officeDocument/2006/relationships" xmlns:p="http://schemas.openxmlformats.org/presentationml/2006/main" xmlns:m="http://schemas.openxmlformats.org/officeDocument/2006/math" xmlns:w="http://schemas.openxmlformats.org/wordprocessingml/2006/main" xmlns:mc="http://schemas.openxmlformats.org/markup-compatibility/2006" showMasterPhAnim="0" showMasterSp="1" show="0">
+  <p:cSld name="">
+    <p:spTree>
+      <p:nvGrpSpPr>
+        <p:cNvPr id="1" name=""/>
+        <p:cNvGrpSpPr/>
+        <p:nvPr/>
+      </p:nvGrpSpPr>
+      <p:grpSpPr bwMode="auto">
+        <a:xfrm>
+          <a:off x="0" y="0"/>
+          <a:ext cx="0" cy="0"/>
+          <a:chOff x="0" y="0"/>
+          <a:chExt cx="0" cy="0"/>
+        </a:xfrm>
+      </p:grpSpPr>
+      <p:sp>
+        <p:nvSpPr>
+          <p:cNvPr id="48362609" name="Titel 1"/>
+          <p:cNvSpPr>
+            <a:spLocks noGrp="1"/>
+          </p:cNvSpPr>
+          <p:nvPr>
+            <p:ph type="title"/>
+          </p:nvPr>
+        </p:nvSpPr>
+        <p:spPr bwMode="auto"/>
+        <p:txBody>
+          <a:bodyPr/>
+          <a:lstStyle/>
+          <a:p>
+            <a:pPr>
+              <a:defRPr/>
+            </a:pPr>
+            <a:r>
+              <a:rPr lang="en-US" sz="3600" b="0" i="0" u="none" strike="noStrike" cap="none" spc="0">
+                <a:solidFill>
+                  <a:schemeClr val="tx1"/>
+                </a:solidFill>
+                <a:latin typeface="Arial Black"/>
+                <a:ea typeface="Arial Black"/>
+                <a:cs typeface="Arial Black"/>
+              </a:rPr>
+              <a:t>Linking Network Position to Sustainability Framing</a:t>
+            </a:r>
+            <a:endParaRPr/>
+          </a:p>
+        </p:txBody>
+      </p:sp>
+      <p:sp>
+        <p:nvSpPr>
+          <p:cNvPr id="722612683" name="Inhaltsplatzhalter 2"/>
+          <p:cNvSpPr>
+            <a:spLocks noGrp="1"/>
+          </p:cNvSpPr>
+          <p:nvPr>
+            <p:ph idx="1"/>
+          </p:nvPr>
+        </p:nvSpPr>
+        <p:spPr bwMode="auto"/>
+        <p:txBody>
+          <a:bodyPr vertOverflow="overflow" horzOverflow="overflow" vert="horz" wrap="square" lIns="91440" tIns="45720" rIns="91440" bIns="45720" numCol="1" spcCol="0" rtlCol="0" fromWordArt="0" anchor="t" anchorCtr="0" forceAA="0" upright="0" compatLnSpc="0">
+            <a:normAutofit/>
+          </a:bodyPr>
+          <a:lstStyle/>
+          <a:p>
+            <a:pPr>
+              <a:defRPr/>
+            </a:pPr>
+            <a:endParaRPr lang="en-US" sz="2500" b="0" i="0" u="none" strike="noStrike" cap="none" spc="0">
+              <a:solidFill>
+                <a:schemeClr val="tx1"/>
+              </a:solidFill>
+              <a:latin typeface="Arial"/>
+              <a:cs typeface="Arial"/>
+            </a:endParaRPr>
+          </a:p>
+          <a:p>
+            <a:pPr>
+              <a:defRPr/>
+            </a:pPr>
+            <a:r>
+              <a:rPr lang="en-US" sz="2500" b="0" i="0" u="none" strike="noStrike" cap="none" spc="0">
+                <a:solidFill>
+                  <a:schemeClr val="tx1"/>
+                </a:solidFill>
+                <a:latin typeface="Arial"/>
+                <a:ea typeface="Arial"/>
+                <a:cs typeface="Arial"/>
+              </a:rPr>
+              <a:t>Influence over sustainability-related AI policy is distributed unequally</a:t>
+            </a:r>
+            <a:endParaRPr lang="en-US" sz="2500" b="0" i="0" u="none" strike="noStrike" cap="none" spc="0">
+              <a:solidFill>
+                <a:schemeClr val="tx1"/>
+              </a:solidFill>
+              <a:latin typeface="Arial"/>
+              <a:ea typeface="Arial"/>
+              <a:cs typeface="Arial"/>
+            </a:endParaRPr>
+          </a:p>
+          <a:p>
+            <a:pPr>
+              <a:defRPr/>
+            </a:pPr>
+            <a:r>
+              <a:rPr lang="en-US" sz="2500" b="0" i="0" u="none" strike="noStrike" cap="none" spc="0">
+                <a:solidFill>
+                  <a:schemeClr val="tx1"/>
+                </a:solidFill>
+                <a:latin typeface="Arial"/>
+                <a:ea typeface="Arial"/>
+                <a:cs typeface="Arial"/>
+              </a:rPr>
+              <a:t>Central positions are occupied mainly by </a:t>
+            </a:r>
+            <a:r>
+              <a:rPr lang="en-US" sz="2500" b="0" i="0" u="none" strike="noStrike" cap="none" spc="0">
+                <a:solidFill>
+                  <a:schemeClr val="tx1"/>
+                </a:solidFill>
+                <a:latin typeface="Arial"/>
+                <a:ea typeface="Arial"/>
+                <a:cs typeface="Arial"/>
+              </a:rPr>
+              <a:t>market-oriented </a:t>
+            </a:r>
+            <a:r>
+              <a:rPr lang="en-US" sz="2500" b="0" i="0" u="none" strike="noStrike" cap="none" spc="0">
+                <a:solidFill>
+                  <a:schemeClr val="tx1"/>
+                </a:solidFill>
+                <a:latin typeface="Arial"/>
+                <a:ea typeface="Arial"/>
+                <a:cs typeface="Arial"/>
+              </a:rPr>
+              <a:t>incumbents</a:t>
+            </a:r>
+            <a:endParaRPr lang="en-US" sz="2500" b="0" i="0" u="none" strike="noStrike" cap="none" spc="0">
+              <a:solidFill>
+                <a:schemeClr val="tx1"/>
+              </a:solidFill>
+              <a:latin typeface="Arial"/>
+              <a:cs typeface="Arial"/>
+            </a:endParaRPr>
+          </a:p>
+          <a:p>
+            <a:pPr>
+              <a:defRPr/>
+            </a:pPr>
+            <a:r>
+              <a:rPr lang="en-US" sz="2500" b="0" i="0" u="none" strike="noStrike" cap="none" spc="0">
+                <a:solidFill>
+                  <a:schemeClr val="tx1"/>
+                </a:solidFill>
+                <a:latin typeface="Arial"/>
+                <a:ea typeface="Arial"/>
+                <a:cs typeface="Arial"/>
+              </a:rPr>
+              <a:t>Ecological justice perspectives exist, but do not occupy central positions</a:t>
+            </a:r>
+            <a:endParaRPr lang="en-US" sz="2500" b="0" i="0" u="none" strike="noStrike" cap="none" spc="0">
+              <a:solidFill>
+                <a:schemeClr val="tx1"/>
+              </a:solidFill>
+              <a:latin typeface="Arial"/>
+              <a:cs typeface="Arial"/>
+            </a:endParaRPr>
+          </a:p>
+          <a:p>
+            <a:pPr>
+              <a:defRPr/>
+            </a:pPr>
+            <a:r>
+              <a:rPr lang="en-US" sz="2500" b="0" i="0" u="none" strike="noStrike" cap="none" spc="0">
+                <a:solidFill>
+                  <a:schemeClr val="tx1"/>
+                </a:solidFill>
+                <a:latin typeface="Arial"/>
+                <a:ea typeface="Arial"/>
+                <a:cs typeface="Arial"/>
+              </a:rPr>
+              <a:t>Narrative power follows structural embeddedness</a:t>
+            </a:r>
+            <a:endParaRPr lang="en-US" sz="2500" b="0" i="0" u="none" strike="noStrike" cap="none" spc="0">
+              <a:solidFill>
+                <a:schemeClr val="tx1"/>
+              </a:solidFill>
+              <a:latin typeface="Arial"/>
+              <a:cs typeface="Arial"/>
+            </a:endParaRPr>
+          </a:p>
+          <a:p>
+            <a:pPr>
+              <a:defRPr/>
+            </a:pPr>
+            <a:r>
+              <a:rPr lang="en-US" sz="2500" b="0" i="0" u="none" strike="noStrike" cap="none" spc="0">
+                <a:solidFill>
+                  <a:schemeClr val="tx1"/>
+                </a:solidFill>
+                <a:latin typeface="Arial"/>
+                <a:ea typeface="Arial"/>
+                <a:cs typeface="Arial"/>
+              </a:rPr>
+              <a:t>Hard for ecological justice advocates within landscape dominated by corporate interests</a:t>
+            </a:r>
+            <a:endParaRPr lang="en-US" sz="2500" b="0" i="0" u="none" strike="noStrike" cap="none" spc="0">
+              <a:solidFill>
+                <a:schemeClr val="tx1"/>
+              </a:solidFill>
+              <a:latin typeface="Arial"/>
+              <a:cs typeface="Arial"/>
+            </a:endParaRPr>
+          </a:p>
+        </p:txBody>
+      </p:sp>
+    </p:spTree>
+  </p:cSld>
+  <p:clrMapOvr>
+    <a:masterClrMapping/>
+  </p:clrMapOvr>
+  <mc:AlternateContent xmlns:mc="http://schemas.openxmlformats.org/markup-compatibility/2006">
+    <mc:Choice xmlns:p159="http://schemas.microsoft.com/office/powerpoint/2015/09/main" xmlns:p14="http://schemas.microsoft.com/office/powerpoint/2010/main" Requires="p159">
+      <p:transition p14:dur="500" advClick="1"/>
+    </mc:Choice>
+    <mc:Fallback>
+      <p:transition advClick="1"/>
+    </mc:Fallback>
+  </mc:AlternateContent>
+</p:sld>
+</file>
+
+<file path=ppt/slides/slide38.xml><?xml version="1.0" encoding="utf-8"?>
 <p:sld xmlns:a="http://schemas.openxmlformats.org/drawingml/2006/main" xmlns:r="http://schemas.openxmlformats.org/officeDocument/2006/relationships" xmlns:p="http://schemas.openxmlformats.org/presentationml/2006/main" xmlns:m="http://schemas.openxmlformats.org/officeDocument/2006/math" xmlns:w="http://schemas.openxmlformats.org/wordprocessingml/2006/main" xmlns:mc="http://schemas.openxmlformats.org/markup-compatibility/2006" showMasterPhAnim="0" showMasterSp="1" show="1">
   <p:cSld name="">
     <p:spTree>
@@ -19911,7 +20390,7 @@
       </p:grpSpPr>
       <p:sp>
         <p:nvSpPr>
-          <p:cNvPr id="1045725005" name="Textplatzhalter 5"/>
+          <p:cNvPr id="1858822" name="Textplatzhalter 5"/>
           <p:cNvSpPr>
             <a:spLocks noGrp="1"/>
           </p:cNvSpPr>
@@ -19979,7 +20458,7 @@
       </p:sp>
       <p:pic>
         <p:nvPicPr>
-          <p:cNvPr id="243477146" name=""/>
+          <p:cNvPr id="572529688" name=""/>
           <p:cNvPicPr>
             <a:picLocks noChangeAspect="1"/>
           </p:cNvPicPr>
@@ -19993,61 +20472,6 @@
           <a:xfrm>
             <a:off x="1459908" y="79047"/>
             <a:ext cx="9163049" cy="6057900"/>
-          </a:xfrm>
-          <a:prstGeom prst="rect">
-            <a:avLst/>
-          </a:prstGeom>
-        </p:spPr>
-      </p:pic>
-    </p:spTree>
-  </p:cSld>
-  <p:clrMapOvr>
-    <a:masterClrMapping/>
-  </p:clrMapOvr>
-  <mc:AlternateContent xmlns:mc="http://schemas.openxmlformats.org/markup-compatibility/2006">
-    <mc:Choice xmlns:p159="http://schemas.microsoft.com/office/powerpoint/2015/09/main" xmlns:p14="http://schemas.microsoft.com/office/powerpoint/2010/main" Requires="p159">
-      <p:transition p14:dur="500" advClick="1"/>
-    </mc:Choice>
-    <mc:Fallback>
-      <p:transition advClick="1"/>
-    </mc:Fallback>
-  </mc:AlternateContent>
-</p:sld>
-</file>
-
-<file path=ppt/slides/slide38.xml><?xml version="1.0" encoding="utf-8"?>
-<p:sld xmlns:a="http://schemas.openxmlformats.org/drawingml/2006/main" xmlns:r="http://schemas.openxmlformats.org/officeDocument/2006/relationships" xmlns:p="http://schemas.openxmlformats.org/presentationml/2006/main" xmlns:m="http://schemas.openxmlformats.org/officeDocument/2006/math" xmlns:w="http://schemas.openxmlformats.org/wordprocessingml/2006/main" xmlns:mc="http://schemas.openxmlformats.org/markup-compatibility/2006" showMasterPhAnim="0" showMasterSp="1" show="1">
-  <p:cSld name="">
-    <p:spTree>
-      <p:nvGrpSpPr>
-        <p:cNvPr id="1" name=""/>
-        <p:cNvGrpSpPr/>
-        <p:nvPr/>
-      </p:nvGrpSpPr>
-      <p:grpSpPr bwMode="auto">
-        <a:xfrm>
-          <a:off x="0" y="0"/>
-          <a:ext cx="0" cy="0"/>
-          <a:chOff x="0" y="0"/>
-          <a:chExt cx="0" cy="0"/>
-        </a:xfrm>
-      </p:grpSpPr>
-      <p:pic>
-        <p:nvPicPr>
-          <p:cNvPr id="1821841991" name=""/>
-          <p:cNvPicPr>
-            <a:picLocks noChangeAspect="1"/>
-          </p:cNvPicPr>
-          <p:nvPr/>
-        </p:nvPicPr>
-        <p:blipFill rotWithShape="1">
-          <a:blip r:embed="rId3"/>
-          <a:stretch/>
-        </p:blipFill>
-        <p:spPr bwMode="auto">
-          <a:xfrm>
-            <a:off x="1262062" y="1785937"/>
-            <a:ext cx="9667874" cy="3286125"/>
           </a:xfrm>
           <a:prstGeom prst="rect">
             <a:avLst/>
@@ -20087,339 +20511,28 @@
           <a:chExt cx="0" cy="0"/>
         </a:xfrm>
       </p:grpSpPr>
-      <p:sp>
-        <p:nvSpPr>
-          <p:cNvPr id="1475231014" name="Title 1"/>
-          <p:cNvSpPr>
-            <a:spLocks noGrp="1"/>
-          </p:cNvSpPr>
-          <p:nvPr>
-            <p:ph type="title" hasCustomPrompt="1"/>
-          </p:nvPr>
-        </p:nvSpPr>
-        <p:spPr bwMode="auto"/>
-        <p:txBody>
-          <a:bodyPr/>
-          <a:lstStyle>
-            <a:lvl1pPr>
-              <a:defRPr/>
-            </a:lvl1pPr>
-          </a:lstStyle>
-          <a:p>
-            <a:pPr>
-              <a:defRPr/>
-            </a:pPr>
-            <a:r>
-              <a:rPr/>
-              <a:t>My 6 favorite quotes from analyzed texts</a:t>
-            </a:r>
-            <a:endParaRPr/>
-          </a:p>
-        </p:txBody>
-      </p:sp>
-      <p:sp>
-        <p:nvSpPr>
-          <p:cNvPr id="377320753" name="Content Placeholder 2"/>
-          <p:cNvSpPr>
-            <a:spLocks noGrp="1"/>
-          </p:cNvSpPr>
-          <p:nvPr>
-            <p:ph idx="1"/>
-          </p:nvPr>
-        </p:nvSpPr>
+      <p:pic>
+        <p:nvPicPr>
+          <p:cNvPr id="1576508004" name=""/>
+          <p:cNvPicPr>
+            <a:picLocks noChangeAspect="1"/>
+          </p:cNvPicPr>
+          <p:nvPr/>
+        </p:nvPicPr>
+        <p:blipFill rotWithShape="1">
+          <a:blip r:embed="rId3"/>
+          <a:stretch/>
+        </p:blipFill>
         <p:spPr bwMode="auto">
-          <a:xfrm flipH="0" flipV="0">
-            <a:off x="471540" y="1621584"/>
-            <a:ext cx="11599142" cy="4516749"/>
+          <a:xfrm>
+            <a:off x="1262062" y="1785937"/>
+            <a:ext cx="9667874" cy="3286125"/>
           </a:xfrm>
           <a:prstGeom prst="rect">
             <a:avLst/>
           </a:prstGeom>
         </p:spPr>
-        <p:txBody>
-          <a:bodyPr vertOverflow="overflow" horzOverflow="overflow" vert="horz" wrap="square" lIns="91440" tIns="45720" rIns="91440" bIns="45720" numCol="1" spcCol="0" rtlCol="0" fromWordArt="0" anchor="t" anchorCtr="0" forceAA="0" upright="0" compatLnSpc="0">
-            <a:normAutofit fontScale="80000" lnSpcReduction="4000"/>
-          </a:bodyPr>
-          <a:lstStyle/>
-          <a:p>
-            <a:pPr>
-              <a:defRPr/>
-            </a:pPr>
-            <a:r>
-              <a:rPr lang="en-US" sz="2800" b="0" i="0" u="none" strike="noStrike" cap="none" spc="0">
-                <a:solidFill>
-                  <a:schemeClr val="tx1"/>
-                </a:solidFill>
-                <a:latin typeface="Arial"/>
-                <a:ea typeface="Arial"/>
-                <a:cs typeface="Arial"/>
-              </a:rPr>
-              <a:t>“AI [...] enables climate mitigation, efficiency, and optimization” </a:t>
-            </a:r>
-            <a:r>
-              <a:rPr lang="en-US" sz="2800" b="0" i="0" u="none" strike="noStrike" cap="none" spc="0">
-                <a:solidFill>
-                  <a:schemeClr val="tx1"/>
-                </a:solidFill>
-                <a:latin typeface="Arial"/>
-                <a:ea typeface="Arial"/>
-                <a:cs typeface="Arial"/>
-              </a:rPr>
-              <a:t>(White Paper,p. 2)</a:t>
-            </a:r>
-            <a:endParaRPr lang="en-US" sz="2800" b="0" i="0" u="none" strike="noStrike" cap="none" spc="0">
-              <a:solidFill>
-                <a:schemeClr val="tx1"/>
-              </a:solidFill>
-              <a:latin typeface="Arial"/>
-              <a:cs typeface="Arial"/>
-            </a:endParaRPr>
-          </a:p>
-          <a:p>
-            <a:pPr>
-              <a:defRPr/>
-            </a:pPr>
-            <a:r>
-              <a:rPr lang="en-US" sz="2800" b="0" i="0" u="none" strike="noStrike" cap="none" spc="0">
-                <a:solidFill>
-                  <a:schemeClr val="tx1"/>
-                </a:solidFill>
-                <a:latin typeface="Arial"/>
-                <a:ea typeface="Arial"/>
-                <a:cs typeface="Arial"/>
-              </a:rPr>
-              <a:t>“Environmental impact [...] is treated through a trust-and-uptake logic” </a:t>
-            </a:r>
-            <a:r>
-              <a:rPr lang="en-US" sz="2800" b="0" i="0" u="none" strike="noStrike" cap="none" spc="0">
-                <a:solidFill>
-                  <a:schemeClr val="tx1"/>
-                </a:solidFill>
-                <a:latin typeface="Arial"/>
-                <a:ea typeface="Arial"/>
-                <a:cs typeface="Arial"/>
-              </a:rPr>
-              <a:t>(Impact Assessment, p. 81)</a:t>
-            </a:r>
-            <a:r>
-              <a:rPr/>
-              <a:t> —&gt; Environmental Impact only as side-effect of uptake.</a:t>
-            </a:r>
-            <a:endParaRPr lang="en-US" sz="2800" b="0" i="0" u="none" strike="noStrike" cap="none" spc="0">
-              <a:solidFill>
-                <a:schemeClr val="tx1"/>
-              </a:solidFill>
-              <a:latin typeface="Arial"/>
-              <a:cs typeface="Arial"/>
-            </a:endParaRPr>
-          </a:p>
-          <a:p>
-            <a:pPr>
-              <a:defRPr/>
-            </a:pPr>
-            <a:r>
-              <a:rPr lang="en-US" sz="2800" b="0" i="0" u="none" strike="noStrike" cap="none" spc="0">
-                <a:solidFill>
-                  <a:schemeClr val="tx1"/>
-                </a:solidFill>
-                <a:latin typeface="Arial"/>
-                <a:ea typeface="Arial"/>
-                <a:cs typeface="Arial"/>
-              </a:rPr>
-              <a:t>“Sustainability is often defined as compatible with economic strengthening” </a:t>
-            </a:r>
-            <a:r>
-              <a:rPr lang="en-US" sz="2800" b="0" i="0" u="none" strike="noStrike" cap="none" spc="0">
-                <a:solidFill>
-                  <a:schemeClr val="tx1"/>
-                </a:solidFill>
-                <a:latin typeface="Arial"/>
-                <a:ea typeface="Arial"/>
-                <a:cs typeface="Arial"/>
-              </a:rPr>
-              <a:t>(EESC 2019, p. 5)</a:t>
-            </a:r>
-            <a:endParaRPr lang="en-US" sz="2800" b="0" i="0" u="none" strike="noStrike" cap="none" spc="0">
-              <a:solidFill>
-                <a:schemeClr val="tx1"/>
-              </a:solidFill>
-              <a:latin typeface="Arial"/>
-              <a:cs typeface="Arial"/>
-            </a:endParaRPr>
-          </a:p>
-          <a:p>
-            <a:pPr>
-              <a:defRPr/>
-            </a:pPr>
-            <a:r>
-              <a:rPr lang="en-US" sz="2800" b="0" i="0" u="none" strike="noStrike" cap="none" spc="0">
-                <a:solidFill>
-                  <a:schemeClr val="tx1"/>
-                </a:solidFill>
-                <a:latin typeface="Arial"/>
-                <a:ea typeface="Arial"/>
-                <a:cs typeface="Arial"/>
-              </a:rPr>
-              <a:t>“Economic sustainability” is explicitly tied to being “productive, profitable and competitive” </a:t>
-            </a:r>
-            <a:r>
-              <a:rPr lang="en-US" sz="2800" b="0" i="0" u="none" strike="noStrike" cap="none" spc="0">
-                <a:solidFill>
-                  <a:schemeClr val="tx1"/>
-                </a:solidFill>
-                <a:latin typeface="Arial"/>
-                <a:ea typeface="Arial"/>
-                <a:cs typeface="Arial"/>
-              </a:rPr>
-              <a:t>(EESC 2019, p. 9)</a:t>
-            </a:r>
-            <a:endParaRPr lang="en-US" sz="2800" b="0" i="0" u="none" strike="noStrike" cap="none" spc="0">
-              <a:solidFill>
-                <a:schemeClr val="tx1"/>
-              </a:solidFill>
-              <a:latin typeface="Arial"/>
-              <a:ea typeface="Arial"/>
-              <a:cs typeface="Arial"/>
-            </a:endParaRPr>
-          </a:p>
-          <a:p>
-            <a:pPr>
-              <a:defRPr/>
-            </a:pPr>
-            <a:r>
-              <a:rPr lang="en-US" sz="2800" b="0" i="0" u="none" strike="noStrike" cap="none" spc="0">
-                <a:solidFill>
-                  <a:schemeClr val="tx1"/>
-                </a:solidFill>
-                <a:latin typeface="Arial"/>
-                <a:ea typeface="Arial"/>
-                <a:cs typeface="Arial"/>
-              </a:rPr>
-              <a:t>“Stricter rules risk innovation and create administrative burden” </a:t>
-            </a:r>
-            <a:r>
-              <a:rPr lang="en-US" sz="2800" b="0" i="0" u="none" strike="noStrike" cap="none" spc="0">
-                <a:solidFill>
-                  <a:schemeClr val="tx1"/>
-                </a:solidFill>
-                <a:latin typeface="Arial"/>
-                <a:ea typeface="Arial"/>
-                <a:cs typeface="Arial"/>
-              </a:rPr>
-              <a:t>(DIGITALEUROPE, p. 5)</a:t>
-            </a:r>
-            <a:endParaRPr lang="en-US" sz="2800" b="0" i="0" u="none" strike="noStrike" cap="none" spc="0">
-              <a:solidFill>
-                <a:schemeClr val="tx1"/>
-              </a:solidFill>
-              <a:latin typeface="Arial"/>
-              <a:cs typeface="Arial"/>
-            </a:endParaRPr>
-          </a:p>
-          <a:p>
-            <a:pPr>
-              <a:defRPr/>
-            </a:pPr>
-            <a:r>
-              <a:rPr lang="en-US" sz="2800" b="0" i="0" u="none" strike="noStrike" cap="none" spc="0">
-                <a:solidFill>
-                  <a:schemeClr val="tx1"/>
-                </a:solidFill>
-                <a:latin typeface="Arial"/>
-                <a:ea typeface="Arial"/>
-                <a:cs typeface="Arial"/>
-              </a:rPr>
-              <a:t>“Digitalization has not reduced energy demand or emissions so far” </a:t>
-            </a:r>
-            <a:r>
-              <a:rPr lang="en-US" sz="2800" b="0" i="0" u="none" strike="noStrike" cap="none" spc="0">
-                <a:solidFill>
-                  <a:schemeClr val="tx1"/>
-                </a:solidFill>
-                <a:latin typeface="Arial"/>
-                <a:ea typeface="Arial"/>
-                <a:cs typeface="Arial"/>
-              </a:rPr>
-              <a:t>(EESC 2020, p. 14)</a:t>
-            </a:r>
-            <a:endParaRPr lang="en-US" sz="2800" b="0" i="0" u="none" strike="noStrike" cap="none" spc="0">
-              <a:solidFill>
-                <a:schemeClr val="tx1"/>
-              </a:solidFill>
-              <a:latin typeface="Arial"/>
-              <a:cs typeface="Arial"/>
-            </a:endParaRPr>
-          </a:p>
-        </p:txBody>
-      </p:sp>
-      <p:sp>
-        <p:nvSpPr>
-          <p:cNvPr id="787289894" name="Textplatzhalter 5"/>
-          <p:cNvSpPr>
-            <a:spLocks noGrp="1"/>
-          </p:cNvSpPr>
-          <p:nvPr>
-            <p:ph type="body" sz="quarter" idx="25" hasCustomPrompt="1"/>
-          </p:nvPr>
-        </p:nvSpPr>
-        <p:spPr bwMode="auto">
-          <a:xfrm>
-            <a:off x="471540" y="5858820"/>
-            <a:ext cx="11139783" cy="278127"/>
-          </a:xfrm>
-          <a:prstGeom prst="rect">
-            <a:avLst/>
-          </a:prstGeom>
-        </p:spPr>
-        <p:txBody>
-          <a:bodyPr/>
-          <a:lstStyle>
-            <a:lvl1pPr marL="0" indent="0">
-              <a:lnSpc>
-                <a:spcPct val="83000"/>
-              </a:lnSpc>
-              <a:buNone/>
-              <a:defRPr sz="800" b="0">
-                <a:latin typeface="+mn-lt"/>
-              </a:defRPr>
-            </a:lvl1pPr>
-            <a:lvl2pPr marL="198000" indent="0">
-              <a:lnSpc>
-                <a:spcPts val="999"/>
-              </a:lnSpc>
-              <a:buNone/>
-              <a:defRPr sz="750"/>
-            </a:lvl2pPr>
-            <a:lvl3pPr marL="396000" indent="0">
-              <a:lnSpc>
-                <a:spcPts val="999"/>
-              </a:lnSpc>
-              <a:buNone/>
-              <a:defRPr sz="750"/>
-            </a:lvl3pPr>
-            <a:lvl4pPr marL="594000" indent="0">
-              <a:lnSpc>
-                <a:spcPts val="999"/>
-              </a:lnSpc>
-              <a:buNone/>
-              <a:defRPr sz="750"/>
-            </a:lvl4pPr>
-            <a:lvl5pPr marL="792000" indent="0">
-              <a:lnSpc>
-                <a:spcPts val="999"/>
-              </a:lnSpc>
-              <a:buNone/>
-              <a:defRPr sz="750"/>
-            </a:lvl5pPr>
-          </a:lstStyle>
-          <a:p>
-            <a:pPr>
-              <a:defRPr/>
-            </a:pPr>
-            <a:endParaRPr/>
-          </a:p>
-        </p:txBody>
-      </p:sp>
+      </p:pic>
     </p:spTree>
   </p:cSld>
   <p:clrMapOvr>
@@ -20455,7 +20568,7 @@
       </p:grpSpPr>
       <p:sp>
         <p:nvSpPr>
-          <p:cNvPr id="1030889136" name="Titel 1"/>
+          <p:cNvPr id="291341075" name="Titel 1"/>
           <p:cNvSpPr>
             <a:spLocks noGrp="1"/>
           </p:cNvSpPr>
@@ -20488,7 +20601,7 @@
       </p:sp>
       <p:sp>
         <p:nvSpPr>
-          <p:cNvPr id="1015944420" name="Textplatzhalter 3"/>
+          <p:cNvPr id="2023043136" name="Textplatzhalter 3"/>
           <p:cNvSpPr>
             <a:spLocks noGrp="1"/>
           </p:cNvSpPr>
@@ -20510,7 +20623,7 @@
       </p:sp>
       <p:sp>
         <p:nvSpPr>
-          <p:cNvPr id="613722786" name="TextBox 2"/>
+          <p:cNvPr id="507516038" name="TextBox 2"/>
           <p:cNvSpPr txBox="1"/>
           <p:nvPr/>
         </p:nvSpPr>
@@ -20566,7 +20679,7 @@
       </p:sp>
       <p:grpSp>
         <p:nvGrpSpPr>
-          <p:cNvPr id="386566505" name="Group 4"/>
+          <p:cNvPr id="75770427" name="Group 4"/>
           <p:cNvGrpSpPr/>
           <p:nvPr/>
         </p:nvGrpSpPr>
@@ -20688,7 +20801,7 @@
       </p:grpSp>
       <p:grpSp>
         <p:nvGrpSpPr>
-          <p:cNvPr id="906448045" name="Group 10"/>
+          <p:cNvPr id="931947263" name="Group 10"/>
           <p:cNvGrpSpPr/>
           <p:nvPr/>
         </p:nvGrpSpPr>
@@ -20804,7 +20917,7 @@
       </p:grpSp>
       <p:sp>
         <p:nvSpPr>
-          <p:cNvPr id="1482391849" name="TextBox 2"/>
+          <p:cNvPr id="1413233518" name="TextBox 2"/>
           <p:cNvSpPr txBox="1"/>
           <p:nvPr/>
         </p:nvSpPr>
@@ -20860,7 +20973,7 @@
       </p:sp>
       <p:grpSp>
         <p:nvGrpSpPr>
-          <p:cNvPr id="2088075467" name="Group 4"/>
+          <p:cNvPr id="1665137123" name="Group 4"/>
           <p:cNvGrpSpPr/>
           <p:nvPr/>
         </p:nvGrpSpPr>
@@ -20982,7 +21095,7 @@
       </p:grpSp>
       <p:sp>
         <p:nvSpPr>
-          <p:cNvPr id="1573961977" name="TextBox 2"/>
+          <p:cNvPr id="235235347" name="TextBox 2"/>
           <p:cNvSpPr txBox="1"/>
           <p:nvPr/>
         </p:nvSpPr>
@@ -21052,7 +21165,7 @@
 </p:sld>
 </file>
 
-<file path=ppt/slides/slide5.xml><?xml version="1.0" encoding="utf-8"?>
+<file path=ppt/slides/slide40.xml><?xml version="1.0" encoding="utf-8"?>
 <p:sld xmlns:a="http://schemas.openxmlformats.org/drawingml/2006/main" xmlns:r="http://schemas.openxmlformats.org/officeDocument/2006/relationships" xmlns:p="http://schemas.openxmlformats.org/presentationml/2006/main" xmlns:m="http://schemas.openxmlformats.org/officeDocument/2006/math" xmlns:w="http://schemas.openxmlformats.org/wordprocessingml/2006/main" xmlns:mc="http://schemas.openxmlformats.org/markup-compatibility/2006" showMasterPhAnim="0" showMasterSp="1" show="1">
   <p:cSld name="">
     <p:spTree>
@@ -21071,33 +21184,37 @@
       </p:grpSpPr>
       <p:sp>
         <p:nvSpPr>
-          <p:cNvPr id="671099910" name="Titel 1"/>
-          <p:cNvSpPr>
-            <a:spLocks noGrp="1"/>
-          </p:cNvSpPr>
-          <p:nvPr>
-            <p:ph type="title"/>
+          <p:cNvPr id="775367113" name="Title 1"/>
+          <p:cNvSpPr>
+            <a:spLocks noGrp="1"/>
+          </p:cNvSpPr>
+          <p:nvPr>
+            <p:ph type="title" hasCustomPrompt="1"/>
           </p:nvPr>
         </p:nvSpPr>
         <p:spPr bwMode="auto"/>
         <p:txBody>
           <a:bodyPr/>
-          <a:lstStyle/>
-          <a:p>
-            <a:pPr algn="ctr">
-              <a:defRPr/>
-            </a:pPr>
-            <a:r>
-              <a:rPr lang="en-US"/>
-              <a:t>Research Question</a:t>
-            </a:r>
-            <a:endParaRPr/>
-          </a:p>
-        </p:txBody>
-      </p:sp>
-      <p:sp>
-        <p:nvSpPr>
-          <p:cNvPr id="1117981351" name="Inhaltsplatzhalter 2"/>
+          <a:lstStyle>
+            <a:lvl1pPr>
+              <a:defRPr/>
+            </a:lvl1pPr>
+          </a:lstStyle>
+          <a:p>
+            <a:pPr>
+              <a:defRPr/>
+            </a:pPr>
+            <a:r>
+              <a:rPr/>
+              <a:t>My 6 favorite quotes from analyzed texts</a:t>
+            </a:r>
+            <a:endParaRPr/>
+          </a:p>
+        </p:txBody>
+      </p:sp>
+      <p:sp>
+        <p:nvSpPr>
+          <p:cNvPr id="562606430" name="Content Placeholder 2"/>
           <p:cNvSpPr>
             <a:spLocks noGrp="1"/>
           </p:cNvSpPr>
@@ -21105,386 +21222,152 @@
             <p:ph idx="1"/>
           </p:nvPr>
         </p:nvSpPr>
-        <p:spPr bwMode="auto"/>
-        <p:txBody>
-          <a:bodyPr vertOverflow="overflow" horzOverflow="overflow" vert="horz" wrap="square" lIns="91440" tIns="45720" rIns="91440" bIns="45720" numCol="1" spcCol="0" rtlCol="0" fromWordArt="0" anchor="t" anchorCtr="0" forceAA="0" upright="0" compatLnSpc="0">
-            <a:normAutofit/>
-          </a:bodyPr>
-          <a:lstStyle/>
-          <a:p>
-            <a:pPr marL="0" indent="0" algn="ctr">
-              <a:lnSpc>
-                <a:spcPct val="150000"/>
-              </a:lnSpc>
-              <a:buSzPct val="120000"/>
-              <a:buFont typeface="Arial"/>
-              <a:buNone/>
-              <a:defRPr/>
-            </a:pPr>
-            <a:r>
-              <a:rPr lang="en-US" sz="2800" b="0" i="0" u="none" strike="noStrike" cap="none" spc="0">
-                <a:solidFill>
-                  <a:schemeClr val="tx1"/>
-                </a:solidFill>
-                <a:latin typeface="Arial"/>
-                <a:ea typeface="Arial"/>
-                <a:cs typeface="Arial"/>
-              </a:rPr>
-              <a:t>How is influence over sustainability-related AI policy distributed among organizational actors in the EU, and whose visions of ecological justice, if any, occupy central positions in the governance network?</a:t>
-            </a:r>
-            <a:endParaRPr sz="8000"/>
-          </a:p>
-        </p:txBody>
-      </p:sp>
-      <p:sp>
-        <p:nvSpPr>
-          <p:cNvPr id="1707672154" name="Textplatzhalter 3"/>
-          <p:cNvSpPr>
-            <a:spLocks noGrp="1"/>
-          </p:cNvSpPr>
-          <p:nvPr>
-            <p:ph type="body" sz="quarter" idx="25"/>
-          </p:nvPr>
-        </p:nvSpPr>
-        <p:spPr bwMode="auto"/>
-        <p:txBody>
-          <a:bodyPr/>
-          <a:lstStyle/>
-          <a:p>
-            <a:pPr>
-              <a:defRPr/>
-            </a:pPr>
-            <a:endParaRPr lang="af-ZA"/>
-          </a:p>
-        </p:txBody>
-      </p:sp>
-    </p:spTree>
-  </p:cSld>
-  <p:clrMapOvr>
-    <a:masterClrMapping/>
-  </p:clrMapOvr>
-  <mc:AlternateContent xmlns:mc="http://schemas.openxmlformats.org/markup-compatibility/2006">
-    <mc:Choice xmlns:p159="http://schemas.microsoft.com/office/powerpoint/2015/09/main" xmlns:p14="http://schemas.microsoft.com/office/powerpoint/2010/main" Requires="p159">
-      <p:transition p14:dur="500" advClick="1"/>
-    </mc:Choice>
-    <mc:Fallback>
-      <p:transition advClick="1"/>
-    </mc:Fallback>
-  </mc:AlternateContent>
-</p:sld>
-</file>
-
-<file path=ppt/slides/slide6.xml><?xml version="1.0" encoding="utf-8"?>
-<p:sld xmlns:a="http://schemas.openxmlformats.org/drawingml/2006/main" xmlns:r="http://schemas.openxmlformats.org/officeDocument/2006/relationships" xmlns:p="http://schemas.openxmlformats.org/presentationml/2006/main" xmlns:m="http://schemas.openxmlformats.org/officeDocument/2006/math" xmlns:w="http://schemas.openxmlformats.org/wordprocessingml/2006/main" xmlns:mc="http://schemas.openxmlformats.org/markup-compatibility/2006" showMasterPhAnim="0" showMasterSp="1" show="1">
-  <p:cSld name="">
-    <p:spTree>
-      <p:nvGrpSpPr>
-        <p:cNvPr id="1" name=""/>
-        <p:cNvGrpSpPr/>
-        <p:nvPr/>
-      </p:nvGrpSpPr>
-      <p:grpSpPr bwMode="auto">
-        <a:xfrm>
-          <a:off x="0" y="0"/>
-          <a:ext cx="0" cy="0"/>
-          <a:chOff x="0" y="0"/>
-          <a:chExt cx="0" cy="0"/>
-        </a:xfrm>
-      </p:grpSpPr>
-      <p:sp>
-        <p:nvSpPr>
-          <p:cNvPr id="691007852" name="Subtitle 2"/>
-          <p:cNvSpPr>
-            <a:spLocks noGrp="1"/>
-          </p:cNvSpPr>
-          <p:nvPr>
-            <p:ph type="subTitle" idx="1" hasCustomPrompt="1"/>
-          </p:nvPr>
-        </p:nvSpPr>
         <p:spPr bwMode="auto">
-          <a:xfrm>
-            <a:off x="485736" y="5412163"/>
-            <a:ext cx="9212078" cy="721935"/>
+          <a:xfrm flipH="0" flipV="0">
+            <a:off x="471540" y="1621584"/>
+            <a:ext cx="11599142" cy="4516749"/>
           </a:xfrm>
           <a:prstGeom prst="rect">
             <a:avLst/>
           </a:prstGeom>
         </p:spPr>
         <p:txBody>
-          <a:bodyPr/>
-          <a:lstStyle>
-            <a:lvl1pPr marL="0" indent="0" algn="l">
-              <a:spcBef>
-                <a:spcPts val="0"/>
-              </a:spcBef>
-              <a:buNone/>
-              <a:defRPr sz="1800">
-                <a:solidFill>
-                  <a:schemeClr val="bg1"/>
-                </a:solidFill>
-              </a:defRPr>
-            </a:lvl1pPr>
-            <a:lvl2pPr marL="457200" indent="0" algn="ctr">
-              <a:buNone/>
-              <a:defRPr sz="2000"/>
-            </a:lvl2pPr>
-            <a:lvl3pPr marL="914400" indent="0" algn="ctr">
-              <a:buNone/>
-              <a:defRPr sz="1800"/>
-            </a:lvl3pPr>
-            <a:lvl4pPr marL="1371600" indent="0" algn="ctr">
-              <a:buNone/>
-              <a:defRPr sz="1600"/>
-            </a:lvl4pPr>
-            <a:lvl5pPr marL="1828800" indent="0" algn="ctr">
-              <a:buNone/>
-              <a:defRPr sz="1600"/>
-            </a:lvl5pPr>
-            <a:lvl6pPr marL="2286000" indent="0" algn="ctr">
-              <a:buNone/>
-              <a:defRPr sz="1600"/>
-            </a:lvl6pPr>
-            <a:lvl7pPr marL="2743200" indent="0" algn="ctr">
-              <a:buNone/>
-              <a:defRPr sz="1600"/>
-            </a:lvl7pPr>
-            <a:lvl8pPr marL="3200400" indent="0" algn="ctr">
-              <a:buNone/>
-              <a:defRPr sz="1600"/>
-            </a:lvl8pPr>
-            <a:lvl9pPr marL="3657600" indent="0" algn="ctr">
-              <a:buNone/>
-              <a:defRPr sz="1600"/>
-            </a:lvl9pPr>
-          </a:lstStyle>
-          <a:p>
-            <a:pPr>
-              <a:defRPr/>
-            </a:pPr>
-            <a:endParaRPr/>
-          </a:p>
-        </p:txBody>
-      </p:sp>
-      <p:sp>
-        <p:nvSpPr>
-          <p:cNvPr id="1014848383" name="Titel 5"/>
-          <p:cNvSpPr>
-            <a:spLocks noGrp="1"/>
-          </p:cNvSpPr>
-          <p:nvPr>
-            <p:ph type="title" hasCustomPrompt="1"/>
-          </p:nvPr>
-        </p:nvSpPr>
-        <p:spPr bwMode="auto">
-          <a:xfrm flipH="0" flipV="0">
-            <a:off x="475588" y="274006"/>
-            <a:ext cx="9222224" cy="3042272"/>
-          </a:xfrm>
-        </p:spPr>
-        <p:txBody>
-          <a:bodyPr/>
-          <a:lstStyle>
-            <a:lvl1pPr>
-              <a:defRPr sz="4500">
-                <a:solidFill>
-                  <a:schemeClr val="bg1"/>
-                </a:solidFill>
-              </a:defRPr>
-            </a:lvl1pPr>
-          </a:lstStyle>
-          <a:p>
-            <a:pPr>
-              <a:defRPr/>
-            </a:pPr>
-            <a:r>
-              <a:rPr/>
-              <a:t>Part 01</a:t>
-            </a:r>
-            <a:br>
-              <a:rPr/>
-            </a:br>
-            <a:br>
-              <a:rPr/>
-            </a:br>
-            <a:r>
-              <a:rPr lang="en-US" sz="4500" b="0" i="0" u="none" strike="noStrike" cap="none" spc="0">
-                <a:solidFill>
-                  <a:schemeClr val="bg1"/>
-                </a:solidFill>
-                <a:latin typeface="Arial Black"/>
-                <a:ea typeface="Arial Black"/>
-                <a:cs typeface="Arial Black"/>
-              </a:rPr>
-              <a:t>Theoretical Frameworks and Analytical Approaches</a:t>
-            </a:r>
-            <a:endParaRPr/>
-          </a:p>
-        </p:txBody>
-      </p:sp>
-      <p:sp>
-        <p:nvSpPr>
-          <p:cNvPr id="108683899" name="Bildplatzhalter 9"/>
-          <p:cNvSpPr>
-            <a:spLocks noGrp="1"/>
-          </p:cNvSpPr>
-          <p:nvPr>
-            <p:ph type="pic" sz="quarter" idx="10" hasCustomPrompt="1"/>
-          </p:nvPr>
-        </p:nvSpPr>
-        <p:spPr bwMode="auto">
-          <a:xfrm>
-            <a:off x="10151559" y="2514416"/>
-            <a:ext cx="1468800" cy="1085720"/>
-          </a:xfrm>
-          <a:prstGeom prst="rect">
-            <a:avLst/>
-          </a:prstGeom>
-        </p:spPr>
-        <p:txBody>
-          <a:bodyPr/>
-          <a:lstStyle>
-            <a:lvl1pPr marL="0" indent="0">
-              <a:buNone/>
-              <a:defRPr sz="1400">
-                <a:solidFill>
-                  <a:schemeClr val="bg1"/>
-                </a:solidFill>
-              </a:defRPr>
-            </a:lvl1pPr>
-          </a:lstStyle>
-          <a:p>
-            <a:pPr>
-              <a:defRPr/>
-            </a:pPr>
-            <a:endParaRPr/>
-          </a:p>
-        </p:txBody>
-      </p:sp>
-      <p:sp>
-        <p:nvSpPr>
-          <p:cNvPr id="764567069" name="Bildplatzhalter 9"/>
-          <p:cNvSpPr>
-            <a:spLocks noGrp="1"/>
-          </p:cNvSpPr>
-          <p:nvPr>
-            <p:ph type="pic" sz="quarter" idx="11" hasCustomPrompt="1"/>
-          </p:nvPr>
-        </p:nvSpPr>
-        <p:spPr bwMode="auto">
-          <a:xfrm>
-            <a:off x="10151745" y="4039230"/>
-            <a:ext cx="1468800" cy="1085720"/>
-          </a:xfrm>
-          <a:prstGeom prst="rect">
-            <a:avLst/>
-          </a:prstGeom>
-        </p:spPr>
-        <p:txBody>
-          <a:bodyPr/>
-          <a:lstStyle>
-            <a:lvl1pPr marL="0" indent="0">
-              <a:buNone/>
-              <a:defRPr sz="1400">
-                <a:solidFill>
-                  <a:schemeClr val="bg1"/>
-                </a:solidFill>
-              </a:defRPr>
-            </a:lvl1pPr>
-          </a:lstStyle>
-          <a:p>
-            <a:pPr>
-              <a:defRPr/>
-            </a:pPr>
-            <a:endParaRPr/>
-          </a:p>
-        </p:txBody>
-      </p:sp>
-    </p:spTree>
-  </p:cSld>
-  <p:clrMapOvr>
-    <a:masterClrMapping/>
-  </p:clrMapOvr>
-  <mc:AlternateContent xmlns:mc="http://schemas.openxmlformats.org/markup-compatibility/2006">
-    <mc:Choice xmlns:p159="http://schemas.microsoft.com/office/powerpoint/2015/09/main" xmlns:p14="http://schemas.microsoft.com/office/powerpoint/2010/main" Requires="p159">
-      <p:transition p14:dur="500" advClick="1"/>
-    </mc:Choice>
-    <mc:Fallback>
-      <p:transition advClick="1"/>
-    </mc:Fallback>
-  </mc:AlternateContent>
-</p:sld>
-</file>
-
-<file path=ppt/slides/slide7.xml><?xml version="1.0" encoding="utf-8"?>
-<p:sld xmlns:a="http://schemas.openxmlformats.org/drawingml/2006/main" xmlns:r="http://schemas.openxmlformats.org/officeDocument/2006/relationships" xmlns:p="http://schemas.openxmlformats.org/presentationml/2006/main" xmlns:m="http://schemas.openxmlformats.org/officeDocument/2006/math" xmlns:w="http://schemas.openxmlformats.org/wordprocessingml/2006/main" xmlns:mc="http://schemas.openxmlformats.org/markup-compatibility/2006" showMasterPhAnim="0" showMasterSp="1" show="1">
-  <p:cSld name="">
-    <p:spTree>
-      <p:nvGrpSpPr>
-        <p:cNvPr id="1" name=""/>
-        <p:cNvGrpSpPr/>
-        <p:nvPr/>
-      </p:nvGrpSpPr>
-      <p:grpSpPr bwMode="auto">
-        <a:xfrm>
-          <a:off x="0" y="0"/>
-          <a:ext cx="0" cy="0"/>
-          <a:chOff x="0" y="0"/>
-          <a:chExt cx="0" cy="0"/>
-        </a:xfrm>
-      </p:grpSpPr>
-      <p:sp>
-        <p:nvSpPr>
-          <p:cNvPr id="925243222" name="Titel 1"/>
-          <p:cNvSpPr>
-            <a:spLocks noGrp="1"/>
-          </p:cNvSpPr>
-          <p:nvPr>
-            <p:ph type="title"/>
-          </p:nvPr>
-        </p:nvSpPr>
-        <p:spPr bwMode="auto"/>
-        <p:txBody>
-          <a:bodyPr/>
-          <a:lstStyle/>
-          <a:p>
-            <a:pPr>
-              <a:defRPr/>
-            </a:pPr>
-            <a:r>
-              <a:rPr lang="en-US" sz="3600" b="0" i="0" u="none" strike="noStrike" cap="none" spc="0">
-                <a:solidFill>
-                  <a:schemeClr val="tx1"/>
-                </a:solidFill>
-                <a:latin typeface="Arial Black"/>
-                <a:ea typeface="Arial Black"/>
-                <a:cs typeface="Arial Black"/>
-              </a:rPr>
-              <a:t>Political Ecology: Power, Discourse, and Extractivism</a:t>
-            </a:r>
-            <a:endParaRPr/>
-          </a:p>
-        </p:txBody>
-      </p:sp>
-      <p:sp>
-        <p:nvSpPr>
-          <p:cNvPr id="1435282345" name="Inhaltsplatzhalter 2"/>
-          <p:cNvSpPr>
-            <a:spLocks noGrp="1"/>
-          </p:cNvSpPr>
-          <p:nvPr>
-            <p:ph idx="1"/>
-          </p:nvPr>
-        </p:nvSpPr>
-        <p:spPr bwMode="auto"/>
-        <p:txBody>
           <a:bodyPr vertOverflow="overflow" horzOverflow="overflow" vert="horz" wrap="square" lIns="91440" tIns="45720" rIns="91440" bIns="45720" numCol="1" spcCol="0" rtlCol="0" fromWordArt="0" anchor="t" anchorCtr="0" forceAA="0" upright="0" compatLnSpc="0">
-            <a:normAutofit/>
+            <a:normAutofit fontScale="80000" lnSpcReduction="4000"/>
           </a:bodyPr>
           <a:lstStyle/>
           <a:p>
             <a:pPr>
               <a:defRPr/>
             </a:pPr>
+            <a:r>
+              <a:rPr lang="en-US" sz="2800" b="0" i="0" u="none" strike="noStrike" cap="none" spc="0">
+                <a:solidFill>
+                  <a:schemeClr val="tx1"/>
+                </a:solidFill>
+                <a:latin typeface="Arial"/>
+                <a:ea typeface="Arial"/>
+                <a:cs typeface="Arial"/>
+              </a:rPr>
+              <a:t>“AI [...] enables climate mitigation, efficiency, and optimization” </a:t>
+            </a:r>
+            <a:r>
+              <a:rPr lang="en-US" sz="2800" b="0" i="0" u="none" strike="noStrike" cap="none" spc="0">
+                <a:solidFill>
+                  <a:schemeClr val="tx1"/>
+                </a:solidFill>
+                <a:latin typeface="Arial"/>
+                <a:ea typeface="Arial"/>
+                <a:cs typeface="Arial"/>
+              </a:rPr>
+              <a:t>(White Paper,p. 2)</a:t>
+            </a:r>
+            <a:endParaRPr lang="en-US" sz="2800" b="0" i="0" u="none" strike="noStrike" cap="none" spc="0">
+              <a:solidFill>
+                <a:schemeClr val="tx1"/>
+              </a:solidFill>
+              <a:latin typeface="Arial"/>
+              <a:cs typeface="Arial"/>
+            </a:endParaRPr>
+          </a:p>
+          <a:p>
+            <a:pPr>
+              <a:defRPr/>
+            </a:pPr>
+            <a:r>
+              <a:rPr lang="en-US" sz="2800" b="0" i="0" u="none" strike="noStrike" cap="none" spc="0">
+                <a:solidFill>
+                  <a:schemeClr val="tx1"/>
+                </a:solidFill>
+                <a:latin typeface="Arial"/>
+                <a:ea typeface="Arial"/>
+                <a:cs typeface="Arial"/>
+              </a:rPr>
+              <a:t>“Environmental impact [...] is treated through a trust-and-uptake logic” </a:t>
+            </a:r>
+            <a:r>
+              <a:rPr lang="en-US" sz="2800" b="0" i="0" u="none" strike="noStrike" cap="none" spc="0">
+                <a:solidFill>
+                  <a:schemeClr val="tx1"/>
+                </a:solidFill>
+                <a:latin typeface="Arial"/>
+                <a:ea typeface="Arial"/>
+                <a:cs typeface="Arial"/>
+              </a:rPr>
+              <a:t>(Impact Assessment, p. 81)</a:t>
+            </a:r>
+            <a:r>
+              <a:rPr/>
+              <a:t> —&gt; Environmental Impact only as side-effect of uptake.</a:t>
+            </a:r>
+            <a:endParaRPr lang="en-US" sz="2800" b="0" i="0" u="none" strike="noStrike" cap="none" spc="0">
+              <a:solidFill>
+                <a:schemeClr val="tx1"/>
+              </a:solidFill>
+              <a:latin typeface="Arial"/>
+              <a:cs typeface="Arial"/>
+            </a:endParaRPr>
+          </a:p>
+          <a:p>
+            <a:pPr>
+              <a:defRPr/>
+            </a:pPr>
+            <a:r>
+              <a:rPr lang="en-US" sz="2800" b="0" i="0" u="none" strike="noStrike" cap="none" spc="0">
+                <a:solidFill>
+                  <a:schemeClr val="tx1"/>
+                </a:solidFill>
+                <a:latin typeface="Arial"/>
+                <a:ea typeface="Arial"/>
+                <a:cs typeface="Arial"/>
+              </a:rPr>
+              <a:t>“Sustainability is often defined as compatible with economic strengthening” </a:t>
+            </a:r>
+            <a:r>
+              <a:rPr lang="en-US" sz="2800" b="0" i="0" u="none" strike="noStrike" cap="none" spc="0">
+                <a:solidFill>
+                  <a:schemeClr val="tx1"/>
+                </a:solidFill>
+                <a:latin typeface="Arial"/>
+                <a:ea typeface="Arial"/>
+                <a:cs typeface="Arial"/>
+              </a:rPr>
+              <a:t>(EESC 2019, p. 5)</a:t>
+            </a:r>
+            <a:endParaRPr lang="en-US" sz="2800" b="0" i="0" u="none" strike="noStrike" cap="none" spc="0">
+              <a:solidFill>
+                <a:schemeClr val="tx1"/>
+              </a:solidFill>
+              <a:latin typeface="Arial"/>
+              <a:cs typeface="Arial"/>
+            </a:endParaRPr>
+          </a:p>
+          <a:p>
+            <a:pPr>
+              <a:defRPr/>
+            </a:pPr>
+            <a:r>
+              <a:rPr lang="en-US" sz="2800" b="0" i="0" u="none" strike="noStrike" cap="none" spc="0">
+                <a:solidFill>
+                  <a:schemeClr val="tx1"/>
+                </a:solidFill>
+                <a:latin typeface="Arial"/>
+                <a:ea typeface="Arial"/>
+                <a:cs typeface="Arial"/>
+              </a:rPr>
+              <a:t>“Economic sustainability” is explicitly tied to being “productive, profitable and competitive” </a:t>
+            </a:r>
+            <a:r>
+              <a:rPr lang="en-US" sz="2800" b="0" i="0" u="none" strike="noStrike" cap="none" spc="0">
+                <a:solidFill>
+                  <a:schemeClr val="tx1"/>
+                </a:solidFill>
+                <a:latin typeface="Arial"/>
+                <a:ea typeface="Arial"/>
+                <a:cs typeface="Arial"/>
+              </a:rPr>
+              <a:t>(EESC 2019, p. 9)</a:t>
+            </a:r>
             <a:endParaRPr lang="en-US" sz="2800" b="0" i="0" u="none" strike="noStrike" cap="none" spc="0">
               <a:solidFill>
                 <a:schemeClr val="tx1"/>
@@ -21507,21 +21390,8 @@
                 <a:ea typeface="Arial"/>
                 <a:cs typeface="Arial"/>
               </a:rPr>
-              <a:t>Governance shaped by power</a:t>
-            </a:r>
-            <a:endParaRPr lang="en-US" sz="2800" b="0" i="0" u="none" strike="noStrike" cap="none" spc="0">
-              <a:solidFill>
-                <a:schemeClr val="tx1"/>
-              </a:solidFill>
-              <a:latin typeface="Arial"/>
-              <a:ea typeface="Arial"/>
-              <a:cs typeface="Arial"/>
-            </a:endParaRPr>
-          </a:p>
-          <a:p>
-            <a:pPr>
-              <a:defRPr/>
-            </a:pPr>
+              <a:t>“Stricter rules risk innovation and create administrative burden” </a:t>
+            </a:r>
             <a:r>
               <a:rPr lang="en-US" sz="2800" b="0" i="0" u="none" strike="noStrike" cap="none" spc="0">
                 <a:solidFill>
@@ -21531,263 +21401,9 @@
                 <a:ea typeface="Arial"/>
                 <a:cs typeface="Arial"/>
               </a:rPr>
-              <a:t>Who defines “sustainable AI”?</a:t>
+              <a:t>(DIGITALEUROPE, p. 5)</a:t>
             </a:r>
             <a:endParaRPr lang="en-US" sz="2800" b="0" i="0" u="none" strike="noStrike" cap="none" spc="0">
-              <a:solidFill>
-                <a:schemeClr val="tx1"/>
-              </a:solidFill>
-              <a:latin typeface="Arial"/>
-              <a:ea typeface="Arial"/>
-              <a:cs typeface="Arial"/>
-            </a:endParaRPr>
-          </a:p>
-          <a:p>
-            <a:pPr>
-              <a:defRPr/>
-            </a:pPr>
-            <a:r>
-              <a:rPr lang="en-US" sz="2800" b="0" i="0" u="none" strike="noStrike" cap="none" spc="0">
-                <a:solidFill>
-                  <a:schemeClr val="tx1"/>
-                </a:solidFill>
-                <a:latin typeface="Arial"/>
-                <a:ea typeface="Arial"/>
-                <a:cs typeface="Arial"/>
-              </a:rPr>
-              <a:t>How does discourse shape sustainability perceptions/actions?</a:t>
-            </a:r>
-            <a:endParaRPr lang="en-US" sz="2800" b="0" i="0" u="none" strike="noStrike" cap="none" spc="0">
-              <a:solidFill>
-                <a:schemeClr val="tx1"/>
-              </a:solidFill>
-              <a:latin typeface="Arial"/>
-              <a:ea typeface="Arial"/>
-              <a:cs typeface="Arial"/>
-            </a:endParaRPr>
-          </a:p>
-          <a:p>
-            <a:pPr>
-              <a:defRPr/>
-            </a:pPr>
-            <a:r>
-              <a:rPr lang="en-US" sz="2800" b="0" i="0" u="none" strike="noStrike" cap="none" spc="0">
-                <a:solidFill>
-                  <a:schemeClr val="tx1"/>
-                </a:solidFill>
-                <a:latin typeface="Arial"/>
-                <a:ea typeface="Arial"/>
-                <a:cs typeface="Arial"/>
-              </a:rPr>
-              <a:t>Often: certain narratives privileged – others marginalized</a:t>
-            </a:r>
-            <a:endParaRPr lang="en-US" sz="2800" b="0" i="0" u="none" strike="noStrike" cap="none" spc="0">
-              <a:solidFill>
-                <a:schemeClr val="tx1"/>
-              </a:solidFill>
-              <a:latin typeface="Arial"/>
-              <a:ea typeface="Arial"/>
-              <a:cs typeface="Arial"/>
-            </a:endParaRPr>
-          </a:p>
-          <a:p>
-            <a:pPr>
-              <a:defRPr/>
-            </a:pPr>
-            <a:r>
-              <a:rPr lang="en-US" sz="2800" b="0" i="0" u="none" strike="noStrike" cap="none" spc="0">
-                <a:solidFill>
-                  <a:schemeClr val="tx1"/>
-                </a:solidFill>
-                <a:latin typeface="Arial"/>
-                <a:ea typeface="Arial"/>
-                <a:cs typeface="Arial"/>
-              </a:rPr>
-              <a:t>AI’s ecological cost often absent in EU discourse</a:t>
-            </a:r>
-            <a:endParaRPr lang="en-US" sz="2800" b="0" i="0" u="none" strike="noStrike" cap="none" spc="0">
-              <a:solidFill>
-                <a:schemeClr val="tx1"/>
-              </a:solidFill>
-              <a:latin typeface="Arial"/>
-              <a:ea typeface="Arial"/>
-              <a:cs typeface="Arial"/>
-            </a:endParaRPr>
-          </a:p>
-          <a:p>
-            <a:pPr>
-              <a:defRPr/>
-            </a:pPr>
-            <a:r>
-              <a:rPr lang="en-US" sz="2800" b="0" i="0" u="none" strike="noStrike" cap="none" spc="0">
-                <a:solidFill>
-                  <a:schemeClr val="tx1"/>
-                </a:solidFill>
-                <a:latin typeface="Arial"/>
-                <a:ea typeface="Arial"/>
-                <a:cs typeface="Arial"/>
-              </a:rPr>
-              <a:t>C</a:t>
-            </a:r>
-            <a:r>
-              <a:rPr lang="en-US" sz="2800" b="0" i="0" u="none" strike="noStrike" cap="none" spc="0">
-                <a:solidFill>
-                  <a:schemeClr val="tx1"/>
-                </a:solidFill>
-                <a:latin typeface="Arial"/>
-                <a:ea typeface="Arial"/>
-                <a:cs typeface="Arial"/>
-              </a:rPr>
-              <a:t>onnects power structures to environmental outcomes</a:t>
-            </a:r>
-            <a:endParaRPr lang="en-US" sz="2800" b="0" i="0" u="none" strike="noStrike" cap="none" spc="0">
-              <a:solidFill>
-                <a:schemeClr val="tx1"/>
-              </a:solidFill>
-              <a:latin typeface="Arial"/>
-              <a:ea typeface="Arial"/>
-              <a:cs typeface="Arial"/>
-            </a:endParaRPr>
-          </a:p>
-        </p:txBody>
-      </p:sp>
-    </p:spTree>
-  </p:cSld>
-  <p:clrMapOvr>
-    <a:masterClrMapping/>
-  </p:clrMapOvr>
-  <mc:AlternateContent xmlns:mc="http://schemas.openxmlformats.org/markup-compatibility/2006">
-    <mc:Choice xmlns:p159="http://schemas.microsoft.com/office/powerpoint/2015/09/main" xmlns:p14="http://schemas.microsoft.com/office/powerpoint/2010/main" Requires="p159">
-      <p:transition p14:dur="500" advClick="1"/>
-    </mc:Choice>
-    <mc:Fallback>
-      <p:transition advClick="1"/>
-    </mc:Fallback>
-  </mc:AlternateContent>
-</p:sld>
-</file>
-
-<file path=ppt/slides/slide8.xml><?xml version="1.0" encoding="utf-8"?>
-<p:sld xmlns:a="http://schemas.openxmlformats.org/drawingml/2006/main" xmlns:r="http://schemas.openxmlformats.org/officeDocument/2006/relationships" xmlns:p="http://schemas.openxmlformats.org/presentationml/2006/main" xmlns:m="http://schemas.openxmlformats.org/officeDocument/2006/math" xmlns:w="http://schemas.openxmlformats.org/wordprocessingml/2006/main" xmlns:mc="http://schemas.openxmlformats.org/markup-compatibility/2006" showMasterPhAnim="0" showMasterSp="1" show="1">
-  <p:cSld name="">
-    <p:spTree>
-      <p:nvGrpSpPr>
-        <p:cNvPr id="1" name=""/>
-        <p:cNvGrpSpPr/>
-        <p:nvPr/>
-      </p:nvGrpSpPr>
-      <p:grpSpPr bwMode="auto">
-        <a:xfrm>
-          <a:off x="0" y="0"/>
-          <a:ext cx="0" cy="0"/>
-          <a:chOff x="0" y="0"/>
-          <a:chExt cx="0" cy="0"/>
-        </a:xfrm>
-      </p:grpSpPr>
-      <p:sp>
-        <p:nvSpPr>
-          <p:cNvPr id="1735488505" name="Title 1"/>
-          <p:cNvSpPr>
-            <a:spLocks noGrp="1"/>
-          </p:cNvSpPr>
-          <p:nvPr>
-            <p:ph type="title" hasCustomPrompt="1"/>
-          </p:nvPr>
-        </p:nvSpPr>
-        <p:spPr bwMode="auto"/>
-        <p:txBody>
-          <a:bodyPr/>
-          <a:lstStyle>
-            <a:lvl1pPr>
-              <a:defRPr/>
-            </a:lvl1pPr>
-          </a:lstStyle>
-          <a:p>
-            <a:pPr>
-              <a:defRPr/>
-            </a:pPr>
-            <a:r>
-              <a:rPr lang="en-US" sz="3600" b="0" i="0" u="none" strike="noStrike" cap="none" spc="0">
-                <a:solidFill>
-                  <a:schemeClr val="tx1"/>
-                </a:solidFill>
-                <a:latin typeface="Arial Black"/>
-                <a:ea typeface="Arial Black"/>
-                <a:cs typeface="Arial Black"/>
-              </a:rPr>
-              <a:t>Strategic Action Fields (SAF) Theory: Framework and Applications</a:t>
-            </a:r>
-            <a:endParaRPr/>
-          </a:p>
-        </p:txBody>
-      </p:sp>
-      <p:sp>
-        <p:nvSpPr>
-          <p:cNvPr id="2049287996" name="Content Placeholder 2"/>
-          <p:cNvSpPr>
-            <a:spLocks noGrp="1"/>
-          </p:cNvSpPr>
-          <p:nvPr>
-            <p:ph idx="1"/>
-          </p:nvPr>
-        </p:nvSpPr>
-        <p:spPr bwMode="auto">
-          <a:xfrm>
-            <a:off x="471540" y="1621584"/>
-            <a:ext cx="11139783" cy="4516749"/>
-          </a:xfrm>
-          <a:prstGeom prst="rect">
-            <a:avLst/>
-          </a:prstGeom>
-        </p:spPr>
-        <p:txBody>
-          <a:bodyPr/>
-          <a:lstStyle/>
-          <a:p>
-            <a:pPr>
-              <a:defRPr/>
-            </a:pPr>
-            <a:endParaRPr>
-              <a:latin typeface="Arial"/>
-              <a:cs typeface="Arial"/>
-            </a:endParaRPr>
-          </a:p>
-          <a:p>
-            <a:pPr>
-              <a:defRPr/>
-            </a:pPr>
-            <a:r>
-              <a:rPr lang="en-US" sz="2800" b="0" i="0" u="none" strike="noStrike" cap="none" spc="0">
-                <a:solidFill>
-                  <a:schemeClr val="tx1"/>
-                </a:solidFill>
-                <a:latin typeface="Arial"/>
-                <a:ea typeface="Arial"/>
-                <a:cs typeface="Arial"/>
-              </a:rPr>
-              <a:t>Governance as a Contested Space</a:t>
-            </a:r>
-            <a:endParaRPr>
-              <a:latin typeface="Arial"/>
-              <a:cs typeface="Arial"/>
-            </a:endParaRPr>
-          </a:p>
-          <a:p>
-            <a:pPr>
-              <a:defRPr/>
-            </a:pPr>
-            <a:r>
-              <a:rPr lang="en-US" sz="2800" b="0" i="0" u="none" strike="noStrike" cap="none" spc="0">
-                <a:solidFill>
-                  <a:schemeClr val="tx1"/>
-                </a:solidFill>
-                <a:latin typeface="Arial"/>
-                <a:ea typeface="Arial"/>
-                <a:cs typeface="Arial"/>
-              </a:rPr>
-              <a:t>Incumbents and challengers compete for influence</a:t>
-            </a:r>
-            <a:endParaRPr sz="2800" b="0" i="0" u="none" strike="noStrike" cap="none" spc="0">
               <a:solidFill>
                 <a:schemeClr val="tx1"/>
               </a:solidFill>
@@ -21808,98 +21424,32 @@
                 <a:ea typeface="Arial"/>
                 <a:cs typeface="Arial"/>
               </a:rPr>
-              <a:t>Vital for </a:t>
+              <a:t>“Digitalization has not reduced energy demand or emissions so far” </a:t>
             </a:r>
             <a:r>
               <a:rPr lang="en-US" sz="2800" b="0" i="0" u="none" strike="noStrike" cap="none" spc="0">
                 <a:solidFill>
-                  <a:srgbClr val="262626"/>
+                  <a:schemeClr val="tx1"/>
                 </a:solidFill>
                 <a:latin typeface="Arial"/>
                 <a:ea typeface="Arial"/>
                 <a:cs typeface="Arial"/>
               </a:rPr>
-              <a:t>analyzing power dynamics within EU AI governance</a:t>
-            </a:r>
-            <a:endParaRPr sz="2800" b="0" i="0" u="none" strike="noStrike" cap="none" spc="0">
+              <a:t>(EESC 2020, p. 14)</a:t>
+            </a:r>
+            <a:endParaRPr lang="en-US" sz="2800" b="0" i="0" u="none" strike="noStrike" cap="none" spc="0">
               <a:solidFill>
-                <a:srgbClr val="262626"/>
+                <a:schemeClr val="tx1"/>
               </a:solidFill>
               <a:latin typeface="Arial"/>
               <a:cs typeface="Arial"/>
             </a:endParaRPr>
           </a:p>
-          <a:p>
-            <a:pPr>
-              <a:defRPr/>
-            </a:pPr>
-            <a:r>
-              <a:rPr lang="en-US" sz="2800" b="0" i="0" u="none" strike="noStrike" cap="none" spc="0">
-                <a:solidFill>
-                  <a:srgbClr val="262626"/>
-                </a:solidFill>
-                <a:latin typeface="Arial"/>
-                <a:ea typeface="Arial"/>
-                <a:cs typeface="Arial"/>
-              </a:rPr>
-              <a:t>Helps interpret network centrality</a:t>
-            </a:r>
-            <a:endParaRPr sz="2800" b="0" i="0" u="none" strike="noStrike" cap="none" spc="0">
-              <a:solidFill>
-                <a:srgbClr val="262626"/>
-              </a:solidFill>
-              <a:latin typeface="Arial"/>
-              <a:cs typeface="Arial"/>
-            </a:endParaRPr>
-          </a:p>
-          <a:p>
-            <a:pPr>
-              <a:defRPr/>
-            </a:pPr>
-            <a:r>
-              <a:rPr lang="en-US" sz="2800" b="0" i="0" u="none" strike="noStrike" cap="none" spc="0">
-                <a:solidFill>
-                  <a:srgbClr val="262626"/>
-                </a:solidFill>
-                <a:latin typeface="Arial"/>
-                <a:ea typeface="Arial"/>
-                <a:cs typeface="Arial"/>
-              </a:rPr>
-              <a:t>Connects structure to outcomes</a:t>
-            </a:r>
-            <a:endParaRPr sz="2800" b="0" i="0" u="none" strike="noStrike" cap="none" spc="0">
-              <a:solidFill>
-                <a:srgbClr val="262626"/>
-              </a:solidFill>
-              <a:latin typeface="Arial"/>
-              <a:cs typeface="Arial"/>
-            </a:endParaRPr>
-          </a:p>
-          <a:p>
-            <a:pPr>
-              <a:defRPr/>
-            </a:pPr>
-            <a:r>
-              <a:rPr lang="en-US" sz="2800" b="0" i="0" u="none" strike="noStrike" cap="none" spc="0">
-                <a:solidFill>
-                  <a:srgbClr val="262626"/>
-                </a:solidFill>
-                <a:latin typeface="Arial"/>
-                <a:ea typeface="Arial"/>
-                <a:cs typeface="Arial"/>
-              </a:rPr>
-              <a:t>How do structural advantages affect policy outcomes?</a:t>
-            </a:r>
-            <a:endParaRPr>
-              <a:latin typeface="Arial"/>
-              <a:cs typeface="Arial"/>
-            </a:endParaRPr>
-          </a:p>
-        </p:txBody>
-      </p:sp>
-      <p:sp>
-        <p:nvSpPr>
-          <p:cNvPr id="987828826" name="Textplatzhalter 5"/>
+        </p:txBody>
+      </p:sp>
+      <p:sp>
+        <p:nvSpPr>
+          <p:cNvPr id="654771106" name="Textplatzhalter 5"/>
           <p:cNvSpPr>
             <a:spLocks noGrp="1"/>
           </p:cNvSpPr>
@@ -21981,6 +21531,935 @@
 </p:sld>
 </file>
 
+<file path=ppt/slides/slide5.xml><?xml version="1.0" encoding="utf-8"?>
+<p:sld xmlns:a="http://schemas.openxmlformats.org/drawingml/2006/main" xmlns:r="http://schemas.openxmlformats.org/officeDocument/2006/relationships" xmlns:p="http://schemas.openxmlformats.org/presentationml/2006/main" xmlns:m="http://schemas.openxmlformats.org/officeDocument/2006/math" xmlns:w="http://schemas.openxmlformats.org/wordprocessingml/2006/main" xmlns:mc="http://schemas.openxmlformats.org/markup-compatibility/2006" showMasterPhAnim="0" showMasterSp="1" show="1">
+  <p:cSld name="">
+    <p:spTree>
+      <p:nvGrpSpPr>
+        <p:cNvPr id="1" name=""/>
+        <p:cNvGrpSpPr/>
+        <p:nvPr/>
+      </p:nvGrpSpPr>
+      <p:grpSpPr bwMode="auto">
+        <a:xfrm>
+          <a:off x="0" y="0"/>
+          <a:ext cx="0" cy="0"/>
+          <a:chOff x="0" y="0"/>
+          <a:chExt cx="0" cy="0"/>
+        </a:xfrm>
+      </p:grpSpPr>
+      <p:sp>
+        <p:nvSpPr>
+          <p:cNvPr id="1035154139" name="Titel 1"/>
+          <p:cNvSpPr>
+            <a:spLocks noGrp="1"/>
+          </p:cNvSpPr>
+          <p:nvPr>
+            <p:ph type="title"/>
+          </p:nvPr>
+        </p:nvSpPr>
+        <p:spPr bwMode="auto"/>
+        <p:txBody>
+          <a:bodyPr/>
+          <a:lstStyle/>
+          <a:p>
+            <a:pPr algn="ctr">
+              <a:defRPr/>
+            </a:pPr>
+            <a:r>
+              <a:rPr lang="en-US"/>
+              <a:t>Research Question</a:t>
+            </a:r>
+            <a:endParaRPr/>
+          </a:p>
+        </p:txBody>
+      </p:sp>
+      <p:sp>
+        <p:nvSpPr>
+          <p:cNvPr id="620942656" name="Inhaltsplatzhalter 2"/>
+          <p:cNvSpPr>
+            <a:spLocks noGrp="1"/>
+          </p:cNvSpPr>
+          <p:nvPr>
+            <p:ph idx="1"/>
+          </p:nvPr>
+        </p:nvSpPr>
+        <p:spPr bwMode="auto"/>
+        <p:txBody>
+          <a:bodyPr vertOverflow="overflow" horzOverflow="overflow" vert="horz" wrap="square" lIns="91440" tIns="45720" rIns="91440" bIns="45720" numCol="1" spcCol="0" rtlCol="0" fromWordArt="0" anchor="t" anchorCtr="0" forceAA="0" upright="0" compatLnSpc="0">
+            <a:normAutofit/>
+          </a:bodyPr>
+          <a:lstStyle/>
+          <a:p>
+            <a:pPr marL="0" indent="0" algn="ctr">
+              <a:lnSpc>
+                <a:spcPct val="150000"/>
+              </a:lnSpc>
+              <a:buSzPct val="120000"/>
+              <a:buFont typeface="Arial"/>
+              <a:buNone/>
+              <a:defRPr/>
+            </a:pPr>
+            <a:r>
+              <a:rPr lang="en-US" sz="2800" b="0" i="0" u="none" strike="noStrike" cap="none" spc="0">
+                <a:solidFill>
+                  <a:schemeClr val="tx1"/>
+                </a:solidFill>
+                <a:latin typeface="Arial"/>
+                <a:ea typeface="Arial"/>
+                <a:cs typeface="Arial"/>
+              </a:rPr>
+              <a:t>How is influence over sustainability-related AI policy distributed among organizational actors in the EU, and whose visions of ecological justice, if any, occupy central positions in the governance network?</a:t>
+            </a:r>
+            <a:endParaRPr sz="8000"/>
+          </a:p>
+        </p:txBody>
+      </p:sp>
+      <p:sp>
+        <p:nvSpPr>
+          <p:cNvPr id="996444278" name="Textplatzhalter 3"/>
+          <p:cNvSpPr>
+            <a:spLocks noGrp="1"/>
+          </p:cNvSpPr>
+          <p:nvPr>
+            <p:ph type="body" sz="quarter" idx="25"/>
+          </p:nvPr>
+        </p:nvSpPr>
+        <p:spPr bwMode="auto"/>
+        <p:txBody>
+          <a:bodyPr/>
+          <a:lstStyle/>
+          <a:p>
+            <a:pPr>
+              <a:defRPr/>
+            </a:pPr>
+            <a:endParaRPr lang="af-ZA"/>
+          </a:p>
+        </p:txBody>
+      </p:sp>
+    </p:spTree>
+  </p:cSld>
+  <p:clrMapOvr>
+    <a:masterClrMapping/>
+  </p:clrMapOvr>
+  <mc:AlternateContent xmlns:mc="http://schemas.openxmlformats.org/markup-compatibility/2006">
+    <mc:Choice xmlns:p159="http://schemas.microsoft.com/office/powerpoint/2015/09/main" xmlns:p14="http://schemas.microsoft.com/office/powerpoint/2010/main" Requires="p159">
+      <p:transition p14:dur="500" advClick="1"/>
+    </mc:Choice>
+    <mc:Fallback>
+      <p:transition advClick="1"/>
+    </mc:Fallback>
+  </mc:AlternateContent>
+</p:sld>
+</file>
+
+<file path=ppt/slides/slide6.xml><?xml version="1.0" encoding="utf-8"?>
+<p:sld xmlns:a="http://schemas.openxmlformats.org/drawingml/2006/main" xmlns:r="http://schemas.openxmlformats.org/officeDocument/2006/relationships" xmlns:p="http://schemas.openxmlformats.org/presentationml/2006/main" xmlns:m="http://schemas.openxmlformats.org/officeDocument/2006/math" xmlns:w="http://schemas.openxmlformats.org/wordprocessingml/2006/main" xmlns:mc="http://schemas.openxmlformats.org/markup-compatibility/2006" showMasterPhAnim="0" showMasterSp="1" show="1">
+  <p:cSld name="">
+    <p:spTree>
+      <p:nvGrpSpPr>
+        <p:cNvPr id="1" name=""/>
+        <p:cNvGrpSpPr/>
+        <p:nvPr/>
+      </p:nvGrpSpPr>
+      <p:grpSpPr bwMode="auto">
+        <a:xfrm>
+          <a:off x="0" y="0"/>
+          <a:ext cx="0" cy="0"/>
+          <a:chOff x="0" y="0"/>
+          <a:chExt cx="0" cy="0"/>
+        </a:xfrm>
+      </p:grpSpPr>
+      <p:sp>
+        <p:nvSpPr>
+          <p:cNvPr id="308810793" name="Subtitle 2"/>
+          <p:cNvSpPr>
+            <a:spLocks noGrp="1"/>
+          </p:cNvSpPr>
+          <p:nvPr>
+            <p:ph type="subTitle" idx="1" hasCustomPrompt="1"/>
+          </p:nvPr>
+        </p:nvSpPr>
+        <p:spPr bwMode="auto">
+          <a:xfrm>
+            <a:off x="485736" y="5412163"/>
+            <a:ext cx="9212078" cy="721935"/>
+          </a:xfrm>
+          <a:prstGeom prst="rect">
+            <a:avLst/>
+          </a:prstGeom>
+        </p:spPr>
+        <p:txBody>
+          <a:bodyPr/>
+          <a:lstStyle>
+            <a:lvl1pPr marL="0" indent="0" algn="l">
+              <a:spcBef>
+                <a:spcPts val="0"/>
+              </a:spcBef>
+              <a:buNone/>
+              <a:defRPr sz="1800">
+                <a:solidFill>
+                  <a:schemeClr val="bg1"/>
+                </a:solidFill>
+              </a:defRPr>
+            </a:lvl1pPr>
+            <a:lvl2pPr marL="457200" indent="0" algn="ctr">
+              <a:buNone/>
+              <a:defRPr sz="2000"/>
+            </a:lvl2pPr>
+            <a:lvl3pPr marL="914400" indent="0" algn="ctr">
+              <a:buNone/>
+              <a:defRPr sz="1800"/>
+            </a:lvl3pPr>
+            <a:lvl4pPr marL="1371600" indent="0" algn="ctr">
+              <a:buNone/>
+              <a:defRPr sz="1600"/>
+            </a:lvl4pPr>
+            <a:lvl5pPr marL="1828800" indent="0" algn="ctr">
+              <a:buNone/>
+              <a:defRPr sz="1600"/>
+            </a:lvl5pPr>
+            <a:lvl6pPr marL="2286000" indent="0" algn="ctr">
+              <a:buNone/>
+              <a:defRPr sz="1600"/>
+            </a:lvl6pPr>
+            <a:lvl7pPr marL="2743200" indent="0" algn="ctr">
+              <a:buNone/>
+              <a:defRPr sz="1600"/>
+            </a:lvl7pPr>
+            <a:lvl8pPr marL="3200400" indent="0" algn="ctr">
+              <a:buNone/>
+              <a:defRPr sz="1600"/>
+            </a:lvl8pPr>
+            <a:lvl9pPr marL="3657600" indent="0" algn="ctr">
+              <a:buNone/>
+              <a:defRPr sz="1600"/>
+            </a:lvl9pPr>
+          </a:lstStyle>
+          <a:p>
+            <a:pPr>
+              <a:defRPr/>
+            </a:pPr>
+            <a:endParaRPr/>
+          </a:p>
+        </p:txBody>
+      </p:sp>
+      <p:sp>
+        <p:nvSpPr>
+          <p:cNvPr id="192378924" name="Titel 5"/>
+          <p:cNvSpPr>
+            <a:spLocks noGrp="1"/>
+          </p:cNvSpPr>
+          <p:nvPr>
+            <p:ph type="title" hasCustomPrompt="1"/>
+          </p:nvPr>
+        </p:nvSpPr>
+        <p:spPr bwMode="auto">
+          <a:xfrm flipH="0" flipV="0">
+            <a:off x="475588" y="274006"/>
+            <a:ext cx="9222224" cy="3042272"/>
+          </a:xfrm>
+        </p:spPr>
+        <p:txBody>
+          <a:bodyPr/>
+          <a:lstStyle>
+            <a:lvl1pPr>
+              <a:defRPr sz="4500">
+                <a:solidFill>
+                  <a:schemeClr val="bg1"/>
+                </a:solidFill>
+              </a:defRPr>
+            </a:lvl1pPr>
+          </a:lstStyle>
+          <a:p>
+            <a:pPr>
+              <a:defRPr/>
+            </a:pPr>
+            <a:r>
+              <a:rPr/>
+              <a:t>Part 01</a:t>
+            </a:r>
+            <a:br>
+              <a:rPr/>
+            </a:br>
+            <a:br>
+              <a:rPr/>
+            </a:br>
+            <a:r>
+              <a:rPr lang="en-US" sz="4500" b="0" i="0" u="none" strike="noStrike" cap="none" spc="0">
+                <a:solidFill>
+                  <a:schemeClr val="bg1"/>
+                </a:solidFill>
+                <a:latin typeface="Arial Black"/>
+                <a:ea typeface="Arial Black"/>
+                <a:cs typeface="Arial Black"/>
+              </a:rPr>
+              <a:t>Theoretical Frameworks and Analytical Approaches</a:t>
+            </a:r>
+            <a:endParaRPr/>
+          </a:p>
+        </p:txBody>
+      </p:sp>
+      <p:sp>
+        <p:nvSpPr>
+          <p:cNvPr id="600651343" name="Bildplatzhalter 9"/>
+          <p:cNvSpPr>
+            <a:spLocks noGrp="1"/>
+          </p:cNvSpPr>
+          <p:nvPr>
+            <p:ph type="pic" sz="quarter" idx="10" hasCustomPrompt="1"/>
+          </p:nvPr>
+        </p:nvSpPr>
+        <p:spPr bwMode="auto">
+          <a:xfrm>
+            <a:off x="10151559" y="2514416"/>
+            <a:ext cx="1468800" cy="1085720"/>
+          </a:xfrm>
+          <a:prstGeom prst="rect">
+            <a:avLst/>
+          </a:prstGeom>
+        </p:spPr>
+        <p:txBody>
+          <a:bodyPr/>
+          <a:lstStyle>
+            <a:lvl1pPr marL="0" indent="0">
+              <a:buNone/>
+              <a:defRPr sz="1400">
+                <a:solidFill>
+                  <a:schemeClr val="bg1"/>
+                </a:solidFill>
+              </a:defRPr>
+            </a:lvl1pPr>
+          </a:lstStyle>
+          <a:p>
+            <a:pPr>
+              <a:defRPr/>
+            </a:pPr>
+            <a:endParaRPr/>
+          </a:p>
+        </p:txBody>
+      </p:sp>
+      <p:sp>
+        <p:nvSpPr>
+          <p:cNvPr id="1383313824" name="Bildplatzhalter 9"/>
+          <p:cNvSpPr>
+            <a:spLocks noGrp="1"/>
+          </p:cNvSpPr>
+          <p:nvPr>
+            <p:ph type="pic" sz="quarter" idx="11" hasCustomPrompt="1"/>
+          </p:nvPr>
+        </p:nvSpPr>
+        <p:spPr bwMode="auto">
+          <a:xfrm>
+            <a:off x="10151745" y="4039230"/>
+            <a:ext cx="1468800" cy="1085720"/>
+          </a:xfrm>
+          <a:prstGeom prst="rect">
+            <a:avLst/>
+          </a:prstGeom>
+        </p:spPr>
+        <p:txBody>
+          <a:bodyPr/>
+          <a:lstStyle>
+            <a:lvl1pPr marL="0" indent="0">
+              <a:buNone/>
+              <a:defRPr sz="1400">
+                <a:solidFill>
+                  <a:schemeClr val="bg1"/>
+                </a:solidFill>
+              </a:defRPr>
+            </a:lvl1pPr>
+          </a:lstStyle>
+          <a:p>
+            <a:pPr>
+              <a:defRPr/>
+            </a:pPr>
+            <a:endParaRPr/>
+          </a:p>
+        </p:txBody>
+      </p:sp>
+    </p:spTree>
+  </p:cSld>
+  <p:clrMapOvr>
+    <a:masterClrMapping/>
+  </p:clrMapOvr>
+  <mc:AlternateContent xmlns:mc="http://schemas.openxmlformats.org/markup-compatibility/2006">
+    <mc:Choice xmlns:p159="http://schemas.microsoft.com/office/powerpoint/2015/09/main" xmlns:p14="http://schemas.microsoft.com/office/powerpoint/2010/main" Requires="p159">
+      <p:transition p14:dur="500" advClick="1"/>
+    </mc:Choice>
+    <mc:Fallback>
+      <p:transition advClick="1"/>
+    </mc:Fallback>
+  </mc:AlternateContent>
+</p:sld>
+</file>
+
+<file path=ppt/slides/slide7.xml><?xml version="1.0" encoding="utf-8"?>
+<p:sld xmlns:a="http://schemas.openxmlformats.org/drawingml/2006/main" xmlns:r="http://schemas.openxmlformats.org/officeDocument/2006/relationships" xmlns:p="http://schemas.openxmlformats.org/presentationml/2006/main" xmlns:m="http://schemas.openxmlformats.org/officeDocument/2006/math" xmlns:w="http://schemas.openxmlformats.org/wordprocessingml/2006/main" xmlns:mc="http://schemas.openxmlformats.org/markup-compatibility/2006" showMasterPhAnim="0" showMasterSp="1" show="1">
+  <p:cSld name="">
+    <p:spTree>
+      <p:nvGrpSpPr>
+        <p:cNvPr id="1" name=""/>
+        <p:cNvGrpSpPr/>
+        <p:nvPr/>
+      </p:nvGrpSpPr>
+      <p:grpSpPr bwMode="auto">
+        <a:xfrm>
+          <a:off x="0" y="0"/>
+          <a:ext cx="0" cy="0"/>
+          <a:chOff x="0" y="0"/>
+          <a:chExt cx="0" cy="0"/>
+        </a:xfrm>
+      </p:grpSpPr>
+      <p:sp>
+        <p:nvSpPr>
+          <p:cNvPr id="233810552" name="Titel 1"/>
+          <p:cNvSpPr>
+            <a:spLocks noGrp="1"/>
+          </p:cNvSpPr>
+          <p:nvPr>
+            <p:ph type="title"/>
+          </p:nvPr>
+        </p:nvSpPr>
+        <p:spPr bwMode="auto"/>
+        <p:txBody>
+          <a:bodyPr/>
+          <a:lstStyle/>
+          <a:p>
+            <a:pPr>
+              <a:defRPr/>
+            </a:pPr>
+            <a:r>
+              <a:rPr lang="en-US" sz="3600" b="0" i="0" u="none" strike="noStrike" cap="none" spc="0">
+                <a:solidFill>
+                  <a:schemeClr val="tx1"/>
+                </a:solidFill>
+                <a:latin typeface="Arial Black"/>
+                <a:ea typeface="Arial Black"/>
+                <a:cs typeface="Arial Black"/>
+              </a:rPr>
+              <a:t>Political Ecology: Power, Discourse, and Extractivism</a:t>
+            </a:r>
+            <a:endParaRPr/>
+          </a:p>
+        </p:txBody>
+      </p:sp>
+      <p:sp>
+        <p:nvSpPr>
+          <p:cNvPr id="316312170" name="Inhaltsplatzhalter 2"/>
+          <p:cNvSpPr>
+            <a:spLocks noGrp="1"/>
+          </p:cNvSpPr>
+          <p:nvPr>
+            <p:ph idx="1"/>
+          </p:nvPr>
+        </p:nvSpPr>
+        <p:spPr bwMode="auto"/>
+        <p:txBody>
+          <a:bodyPr vertOverflow="overflow" horzOverflow="overflow" vert="horz" wrap="square" lIns="91440" tIns="45720" rIns="91440" bIns="45720" numCol="1" spcCol="0" rtlCol="0" fromWordArt="0" anchor="t" anchorCtr="0" forceAA="0" upright="0" compatLnSpc="0">
+            <a:normAutofit/>
+          </a:bodyPr>
+          <a:lstStyle/>
+          <a:p>
+            <a:pPr>
+              <a:defRPr/>
+            </a:pPr>
+            <a:endParaRPr lang="en-US" sz="2800" b="0" i="0" u="none" strike="noStrike" cap="none" spc="0">
+              <a:solidFill>
+                <a:schemeClr val="tx1"/>
+              </a:solidFill>
+              <a:latin typeface="Arial"/>
+              <a:ea typeface="Arial"/>
+              <a:cs typeface="Arial"/>
+            </a:endParaRPr>
+          </a:p>
+          <a:p>
+            <a:pPr>
+              <a:defRPr/>
+            </a:pPr>
+            <a:r>
+              <a:rPr lang="en-US" sz="2800" b="0" i="0" u="none" strike="noStrike" cap="none" spc="0">
+                <a:solidFill>
+                  <a:schemeClr val="tx1"/>
+                </a:solidFill>
+                <a:latin typeface="Arial"/>
+                <a:ea typeface="Arial"/>
+                <a:cs typeface="Arial"/>
+              </a:rPr>
+              <a:t>Governance shaped by power</a:t>
+            </a:r>
+            <a:endParaRPr lang="en-US" sz="2800" b="0" i="0" u="none" strike="noStrike" cap="none" spc="0">
+              <a:solidFill>
+                <a:schemeClr val="tx1"/>
+              </a:solidFill>
+              <a:latin typeface="Arial"/>
+              <a:ea typeface="Arial"/>
+              <a:cs typeface="Arial"/>
+            </a:endParaRPr>
+          </a:p>
+          <a:p>
+            <a:pPr>
+              <a:defRPr/>
+            </a:pPr>
+            <a:r>
+              <a:rPr lang="en-US" sz="2800" b="0" i="0" u="none" strike="noStrike" cap="none" spc="0">
+                <a:solidFill>
+                  <a:schemeClr val="tx1"/>
+                </a:solidFill>
+                <a:latin typeface="Arial"/>
+                <a:ea typeface="Arial"/>
+                <a:cs typeface="Arial"/>
+              </a:rPr>
+              <a:t>Who defines “sustainable AI”?</a:t>
+            </a:r>
+            <a:endParaRPr lang="en-US" sz="2800" b="0" i="0" u="none" strike="noStrike" cap="none" spc="0">
+              <a:solidFill>
+                <a:schemeClr val="tx1"/>
+              </a:solidFill>
+              <a:latin typeface="Arial"/>
+              <a:ea typeface="Arial"/>
+              <a:cs typeface="Arial"/>
+            </a:endParaRPr>
+          </a:p>
+          <a:p>
+            <a:pPr>
+              <a:defRPr/>
+            </a:pPr>
+            <a:r>
+              <a:rPr lang="en-US" sz="2800" b="0" i="0" u="none" strike="noStrike" cap="none" spc="0">
+                <a:solidFill>
+                  <a:schemeClr val="tx1"/>
+                </a:solidFill>
+                <a:latin typeface="Arial"/>
+                <a:ea typeface="Arial"/>
+                <a:cs typeface="Arial"/>
+              </a:rPr>
+              <a:t>How does discourse shape sustainability perceptions/actions?</a:t>
+            </a:r>
+            <a:endParaRPr lang="en-US" sz="2800" b="0" i="0" u="none" strike="noStrike" cap="none" spc="0">
+              <a:solidFill>
+                <a:schemeClr val="tx1"/>
+              </a:solidFill>
+              <a:latin typeface="Arial"/>
+              <a:ea typeface="Arial"/>
+              <a:cs typeface="Arial"/>
+            </a:endParaRPr>
+          </a:p>
+          <a:p>
+            <a:pPr>
+              <a:defRPr/>
+            </a:pPr>
+            <a:r>
+              <a:rPr lang="en-US" sz="2800" b="0" i="0" u="none" strike="noStrike" cap="none" spc="0">
+                <a:solidFill>
+                  <a:schemeClr val="tx1"/>
+                </a:solidFill>
+                <a:latin typeface="Arial"/>
+                <a:ea typeface="Arial"/>
+                <a:cs typeface="Arial"/>
+              </a:rPr>
+              <a:t>Often: certain narratives privileged – others marginalized</a:t>
+            </a:r>
+            <a:endParaRPr lang="en-US" sz="2800" b="0" i="0" u="none" strike="noStrike" cap="none" spc="0">
+              <a:solidFill>
+                <a:schemeClr val="tx1"/>
+              </a:solidFill>
+              <a:latin typeface="Arial"/>
+              <a:ea typeface="Arial"/>
+              <a:cs typeface="Arial"/>
+            </a:endParaRPr>
+          </a:p>
+          <a:p>
+            <a:pPr>
+              <a:defRPr/>
+            </a:pPr>
+            <a:r>
+              <a:rPr lang="en-US" sz="2800" b="0" i="0" u="none" strike="noStrike" cap="none" spc="0">
+                <a:solidFill>
+                  <a:schemeClr val="tx1"/>
+                </a:solidFill>
+                <a:latin typeface="Arial"/>
+                <a:ea typeface="Arial"/>
+                <a:cs typeface="Arial"/>
+              </a:rPr>
+              <a:t>AI’s ecological cost often absent in EU discourse</a:t>
+            </a:r>
+            <a:endParaRPr lang="en-US" sz="2800" b="0" i="0" u="none" strike="noStrike" cap="none" spc="0">
+              <a:solidFill>
+                <a:schemeClr val="tx1"/>
+              </a:solidFill>
+              <a:latin typeface="Arial"/>
+              <a:ea typeface="Arial"/>
+              <a:cs typeface="Arial"/>
+            </a:endParaRPr>
+          </a:p>
+          <a:p>
+            <a:pPr>
+              <a:defRPr/>
+            </a:pPr>
+            <a:r>
+              <a:rPr lang="en-US" sz="2800" b="0" i="0" u="none" strike="noStrike" cap="none" spc="0">
+                <a:solidFill>
+                  <a:schemeClr val="tx1"/>
+                </a:solidFill>
+                <a:latin typeface="Arial"/>
+                <a:ea typeface="Arial"/>
+                <a:cs typeface="Arial"/>
+              </a:rPr>
+              <a:t>C</a:t>
+            </a:r>
+            <a:r>
+              <a:rPr lang="en-US" sz="2800" b="0" i="0" u="none" strike="noStrike" cap="none" spc="0">
+                <a:solidFill>
+                  <a:schemeClr val="tx1"/>
+                </a:solidFill>
+                <a:latin typeface="Arial"/>
+                <a:ea typeface="Arial"/>
+                <a:cs typeface="Arial"/>
+              </a:rPr>
+              <a:t>onnects power structures to environmental outcomes</a:t>
+            </a:r>
+            <a:endParaRPr lang="en-US" sz="2800" b="0" i="0" u="none" strike="noStrike" cap="none" spc="0">
+              <a:solidFill>
+                <a:schemeClr val="tx1"/>
+              </a:solidFill>
+              <a:latin typeface="Arial"/>
+              <a:ea typeface="Arial"/>
+              <a:cs typeface="Arial"/>
+            </a:endParaRPr>
+          </a:p>
+        </p:txBody>
+      </p:sp>
+    </p:spTree>
+  </p:cSld>
+  <p:clrMapOvr>
+    <a:masterClrMapping/>
+  </p:clrMapOvr>
+  <mc:AlternateContent xmlns:mc="http://schemas.openxmlformats.org/markup-compatibility/2006">
+    <mc:Choice xmlns:p159="http://schemas.microsoft.com/office/powerpoint/2015/09/main" xmlns:p14="http://schemas.microsoft.com/office/powerpoint/2010/main" Requires="p159">
+      <p:transition p14:dur="500" advClick="1"/>
+    </mc:Choice>
+    <mc:Fallback>
+      <p:transition advClick="1"/>
+    </mc:Fallback>
+  </mc:AlternateContent>
+</p:sld>
+</file>
+
+<file path=ppt/slides/slide8.xml><?xml version="1.0" encoding="utf-8"?>
+<p:sld xmlns:a="http://schemas.openxmlformats.org/drawingml/2006/main" xmlns:r="http://schemas.openxmlformats.org/officeDocument/2006/relationships" xmlns:p="http://schemas.openxmlformats.org/presentationml/2006/main" xmlns:m="http://schemas.openxmlformats.org/officeDocument/2006/math" xmlns:w="http://schemas.openxmlformats.org/wordprocessingml/2006/main" xmlns:mc="http://schemas.openxmlformats.org/markup-compatibility/2006" showMasterPhAnim="0" showMasterSp="1" show="1">
+  <p:cSld name="">
+    <p:spTree>
+      <p:nvGrpSpPr>
+        <p:cNvPr id="1" name=""/>
+        <p:cNvGrpSpPr/>
+        <p:nvPr/>
+      </p:nvGrpSpPr>
+      <p:grpSpPr bwMode="auto">
+        <a:xfrm>
+          <a:off x="0" y="0"/>
+          <a:ext cx="0" cy="0"/>
+          <a:chOff x="0" y="0"/>
+          <a:chExt cx="0" cy="0"/>
+        </a:xfrm>
+      </p:grpSpPr>
+      <p:sp>
+        <p:nvSpPr>
+          <p:cNvPr id="526915678" name="Title 1"/>
+          <p:cNvSpPr>
+            <a:spLocks noGrp="1"/>
+          </p:cNvSpPr>
+          <p:nvPr>
+            <p:ph type="title" hasCustomPrompt="1"/>
+          </p:nvPr>
+        </p:nvSpPr>
+        <p:spPr bwMode="auto"/>
+        <p:txBody>
+          <a:bodyPr/>
+          <a:lstStyle>
+            <a:lvl1pPr>
+              <a:defRPr/>
+            </a:lvl1pPr>
+          </a:lstStyle>
+          <a:p>
+            <a:pPr>
+              <a:defRPr/>
+            </a:pPr>
+            <a:r>
+              <a:rPr lang="en-US" sz="3600" b="0" i="0" u="none" strike="noStrike" cap="none" spc="0">
+                <a:solidFill>
+                  <a:schemeClr val="tx1"/>
+                </a:solidFill>
+                <a:latin typeface="Arial Black"/>
+                <a:ea typeface="Arial Black"/>
+                <a:cs typeface="Arial Black"/>
+              </a:rPr>
+              <a:t>Strategic Action Fields (SAF) Theory: Framework and Applications</a:t>
+            </a:r>
+            <a:endParaRPr/>
+          </a:p>
+        </p:txBody>
+      </p:sp>
+      <p:sp>
+        <p:nvSpPr>
+          <p:cNvPr id="1408590868" name="Content Placeholder 2"/>
+          <p:cNvSpPr>
+            <a:spLocks noGrp="1"/>
+          </p:cNvSpPr>
+          <p:nvPr>
+            <p:ph idx="1"/>
+          </p:nvPr>
+        </p:nvSpPr>
+        <p:spPr bwMode="auto">
+          <a:xfrm>
+            <a:off x="471540" y="1621584"/>
+            <a:ext cx="11139783" cy="4516749"/>
+          </a:xfrm>
+          <a:prstGeom prst="rect">
+            <a:avLst/>
+          </a:prstGeom>
+        </p:spPr>
+        <p:txBody>
+          <a:bodyPr/>
+          <a:lstStyle/>
+          <a:p>
+            <a:pPr>
+              <a:defRPr/>
+            </a:pPr>
+            <a:endParaRPr>
+              <a:latin typeface="Arial"/>
+              <a:cs typeface="Arial"/>
+            </a:endParaRPr>
+          </a:p>
+          <a:p>
+            <a:pPr>
+              <a:defRPr/>
+            </a:pPr>
+            <a:r>
+              <a:rPr lang="en-US" sz="2800" b="0" i="0" u="none" strike="noStrike" cap="none" spc="0">
+                <a:solidFill>
+                  <a:schemeClr val="tx1"/>
+                </a:solidFill>
+                <a:latin typeface="Arial"/>
+                <a:ea typeface="Arial"/>
+                <a:cs typeface="Arial"/>
+              </a:rPr>
+              <a:t>Governance as a Contested Space</a:t>
+            </a:r>
+            <a:endParaRPr>
+              <a:latin typeface="Arial"/>
+              <a:cs typeface="Arial"/>
+            </a:endParaRPr>
+          </a:p>
+          <a:p>
+            <a:pPr>
+              <a:defRPr/>
+            </a:pPr>
+            <a:r>
+              <a:rPr lang="en-US" sz="2800" b="0" i="0" u="none" strike="noStrike" cap="none" spc="0">
+                <a:solidFill>
+                  <a:schemeClr val="tx1"/>
+                </a:solidFill>
+                <a:latin typeface="Arial"/>
+                <a:ea typeface="Arial"/>
+                <a:cs typeface="Arial"/>
+              </a:rPr>
+              <a:t>Incumbents and challengers compete for influence</a:t>
+            </a:r>
+            <a:endParaRPr sz="2800" b="0" i="0" u="none" strike="noStrike" cap="none" spc="0">
+              <a:solidFill>
+                <a:schemeClr val="tx1"/>
+              </a:solidFill>
+              <a:latin typeface="Arial"/>
+              <a:cs typeface="Arial"/>
+            </a:endParaRPr>
+          </a:p>
+          <a:p>
+            <a:pPr>
+              <a:defRPr/>
+            </a:pPr>
+            <a:r>
+              <a:rPr lang="en-US" sz="2800" b="0" i="0" u="none" strike="noStrike" cap="none" spc="0">
+                <a:solidFill>
+                  <a:schemeClr val="tx1"/>
+                </a:solidFill>
+                <a:latin typeface="Arial"/>
+                <a:ea typeface="Arial"/>
+                <a:cs typeface="Arial"/>
+              </a:rPr>
+              <a:t>Vital for </a:t>
+            </a:r>
+            <a:r>
+              <a:rPr lang="en-US" sz="2800" b="0" i="0" u="none" strike="noStrike" cap="none" spc="0">
+                <a:solidFill>
+                  <a:srgbClr val="262626"/>
+                </a:solidFill>
+                <a:latin typeface="Arial"/>
+                <a:ea typeface="Arial"/>
+                <a:cs typeface="Arial"/>
+              </a:rPr>
+              <a:t>analyzing power dynamics within EU AI governance</a:t>
+            </a:r>
+            <a:endParaRPr sz="2800" b="0" i="0" u="none" strike="noStrike" cap="none" spc="0">
+              <a:solidFill>
+                <a:srgbClr val="262626"/>
+              </a:solidFill>
+              <a:latin typeface="Arial"/>
+              <a:cs typeface="Arial"/>
+            </a:endParaRPr>
+          </a:p>
+          <a:p>
+            <a:pPr>
+              <a:defRPr/>
+            </a:pPr>
+            <a:r>
+              <a:rPr lang="en-US" sz="2800" b="0" i="0" u="none" strike="noStrike" cap="none" spc="0">
+                <a:solidFill>
+                  <a:srgbClr val="262626"/>
+                </a:solidFill>
+                <a:latin typeface="Arial"/>
+                <a:ea typeface="Arial"/>
+                <a:cs typeface="Arial"/>
+              </a:rPr>
+              <a:t>Helps interpret network centrality</a:t>
+            </a:r>
+            <a:endParaRPr sz="2800" b="0" i="0" u="none" strike="noStrike" cap="none" spc="0">
+              <a:solidFill>
+                <a:srgbClr val="262626"/>
+              </a:solidFill>
+              <a:latin typeface="Arial"/>
+              <a:cs typeface="Arial"/>
+            </a:endParaRPr>
+          </a:p>
+          <a:p>
+            <a:pPr>
+              <a:defRPr/>
+            </a:pPr>
+            <a:r>
+              <a:rPr lang="en-US" sz="2800" b="0" i="0" u="none" strike="noStrike" cap="none" spc="0">
+                <a:solidFill>
+                  <a:srgbClr val="262626"/>
+                </a:solidFill>
+                <a:latin typeface="Arial"/>
+                <a:ea typeface="Arial"/>
+                <a:cs typeface="Arial"/>
+              </a:rPr>
+              <a:t>Connects structure to outcomes</a:t>
+            </a:r>
+            <a:endParaRPr sz="2800" b="0" i="0" u="none" strike="noStrike" cap="none" spc="0">
+              <a:solidFill>
+                <a:srgbClr val="262626"/>
+              </a:solidFill>
+              <a:latin typeface="Arial"/>
+              <a:cs typeface="Arial"/>
+            </a:endParaRPr>
+          </a:p>
+          <a:p>
+            <a:pPr>
+              <a:defRPr/>
+            </a:pPr>
+            <a:r>
+              <a:rPr lang="en-US" sz="2800" b="0" i="0" u="none" strike="noStrike" cap="none" spc="0">
+                <a:solidFill>
+                  <a:srgbClr val="262626"/>
+                </a:solidFill>
+                <a:latin typeface="Arial"/>
+                <a:ea typeface="Arial"/>
+                <a:cs typeface="Arial"/>
+              </a:rPr>
+              <a:t>How do structural advantages affect policy outcomes?</a:t>
+            </a:r>
+            <a:endParaRPr>
+              <a:latin typeface="Arial"/>
+              <a:cs typeface="Arial"/>
+            </a:endParaRPr>
+          </a:p>
+        </p:txBody>
+      </p:sp>
+      <p:sp>
+        <p:nvSpPr>
+          <p:cNvPr id="338525108" name="Textplatzhalter 5"/>
+          <p:cNvSpPr>
+            <a:spLocks noGrp="1"/>
+          </p:cNvSpPr>
+          <p:nvPr>
+            <p:ph type="body" sz="quarter" idx="25" hasCustomPrompt="1"/>
+          </p:nvPr>
+        </p:nvSpPr>
+        <p:spPr bwMode="auto">
+          <a:xfrm>
+            <a:off x="471540" y="5858820"/>
+            <a:ext cx="11139783" cy="278127"/>
+          </a:xfrm>
+          <a:prstGeom prst="rect">
+            <a:avLst/>
+          </a:prstGeom>
+        </p:spPr>
+        <p:txBody>
+          <a:bodyPr/>
+          <a:lstStyle>
+            <a:lvl1pPr marL="0" indent="0">
+              <a:lnSpc>
+                <a:spcPct val="83000"/>
+              </a:lnSpc>
+              <a:buNone/>
+              <a:defRPr sz="800" b="0">
+                <a:latin typeface="+mn-lt"/>
+              </a:defRPr>
+            </a:lvl1pPr>
+            <a:lvl2pPr marL="198000" indent="0">
+              <a:lnSpc>
+                <a:spcPts val="999"/>
+              </a:lnSpc>
+              <a:buNone/>
+              <a:defRPr sz="750"/>
+            </a:lvl2pPr>
+            <a:lvl3pPr marL="396000" indent="0">
+              <a:lnSpc>
+                <a:spcPts val="999"/>
+              </a:lnSpc>
+              <a:buNone/>
+              <a:defRPr sz="750"/>
+            </a:lvl3pPr>
+            <a:lvl4pPr marL="594000" indent="0">
+              <a:lnSpc>
+                <a:spcPts val="999"/>
+              </a:lnSpc>
+              <a:buNone/>
+              <a:defRPr sz="750"/>
+            </a:lvl4pPr>
+            <a:lvl5pPr marL="792000" indent="0">
+              <a:lnSpc>
+                <a:spcPts val="999"/>
+              </a:lnSpc>
+              <a:buNone/>
+              <a:defRPr sz="750"/>
+            </a:lvl5pPr>
+          </a:lstStyle>
+          <a:p>
+            <a:pPr>
+              <a:defRPr/>
+            </a:pPr>
+            <a:endParaRPr/>
+          </a:p>
+        </p:txBody>
+      </p:sp>
+    </p:spTree>
+  </p:cSld>
+  <p:clrMapOvr>
+    <a:masterClrMapping/>
+  </p:clrMapOvr>
+  <mc:AlternateContent xmlns:mc="http://schemas.openxmlformats.org/markup-compatibility/2006">
+    <mc:Choice xmlns:p159="http://schemas.microsoft.com/office/powerpoint/2015/09/main" xmlns:p14="http://schemas.microsoft.com/office/powerpoint/2010/main" Requires="p159">
+      <p:transition p14:dur="500" advClick="1"/>
+    </mc:Choice>
+    <mc:Fallback>
+      <p:transition advClick="1"/>
+    </mc:Fallback>
+  </mc:AlternateContent>
+</p:sld>
+</file>
+
 <file path=ppt/slides/slide9.xml><?xml version="1.0" encoding="utf-8"?>
 <p:sld xmlns:a="http://schemas.openxmlformats.org/drawingml/2006/main" xmlns:r="http://schemas.openxmlformats.org/officeDocument/2006/relationships" xmlns:p="http://schemas.openxmlformats.org/presentationml/2006/main" xmlns:m="http://schemas.openxmlformats.org/officeDocument/2006/math" xmlns:w="http://schemas.openxmlformats.org/wordprocessingml/2006/main" xmlns:mc="http://schemas.openxmlformats.org/markup-compatibility/2006" showMasterPhAnim="0" showMasterSp="1" show="1">
   <p:cSld name="">
@@ -22000,7 +22479,7 @@
       </p:grpSpPr>
       <p:sp>
         <p:nvSpPr>
-          <p:cNvPr id="515816482" name="Title 1"/>
+          <p:cNvPr id="426697671" name="Title 1"/>
           <p:cNvSpPr>
             <a:spLocks noGrp="1"/>
           </p:cNvSpPr>
@@ -22037,7 +22516,7 @@
       </p:sp>
       <p:sp>
         <p:nvSpPr>
-          <p:cNvPr id="879200103" name="Content Placeholder 2"/>
+          <p:cNvPr id="1643202723" name="Content Placeholder 2"/>
           <p:cNvSpPr>
             <a:spLocks noGrp="1"/>
           </p:cNvSpPr>
